--- a/Section 4 - files/Section 4 — Hypothesis tests for the mean (English).pptx
+++ b/Section 4 - files/Section 4 — Hypothesis tests for the mean (English).pptx
@@ -6773,11 +6773,11 @@
                     <a:p>
                       <a:pPr indent="0" marL="0">
                         <a:lnSpc>
-                          <a:spcPts val="1680"/>
+                          <a:spcPts val="1579"/>
                         </a:lnSpc>
                         <a:buNone/>
                       </a:pPr>
-                      <a:endParaRPr lang="en-US" sz="1200" dirty="0">
+                      <a:endParaRPr lang="en-US" sz="1150" dirty="0">
                         <a:latin typeface="Tahoma" charset="0"/>
                         <a:ea typeface="Tahoma" charset="0"/>
                         <a:cs typeface="Tahoma" charset="0"/>
@@ -6821,12 +6821,12 @@
                     <a:p>
                       <a:pPr algn="ctr" indent="0" marL="0">
                         <a:lnSpc>
-                          <a:spcPts val="1680"/>
+                          <a:spcPts val="1579"/>
                         </a:lnSpc>
                         <a:buNone/>
                       </a:pPr>
                       <a:r>
-                        <a:rPr lang="en-US" sz="1200" b="1" dirty="0">
+                        <a:rPr lang="en-US" sz="1150" b="1" dirty="0">
                           <a:solidFill>
                             <a:srgbClr val="F6F4EF"/>
                           </a:solidFill>
@@ -6836,7 +6836,7 @@
                         </a:rPr>
                         <a:t>N</a:t>
                       </a:r>
-                      <a:endParaRPr lang="en-US" sz="1200" dirty="0">
+                      <a:endParaRPr lang="en-US" sz="1150" dirty="0">
                         <a:latin typeface="Tahoma" charset="0"/>
                         <a:ea typeface="Tahoma" charset="0"/>
                         <a:cs typeface="Tahoma" charset="0"/>
@@ -6886,12 +6886,12 @@
                     <a:p>
                       <a:pPr algn="ctr" indent="0" marL="0">
                         <a:lnSpc>
-                          <a:spcPts val="1680"/>
+                          <a:spcPts val="1579"/>
                         </a:lnSpc>
                         <a:buNone/>
                       </a:pPr>
                       <a:r>
-                        <a:rPr lang="en-US" sz="1200" b="1" dirty="0">
+                        <a:rPr lang="en-US" sz="1150" b="1" dirty="0">
                           <a:solidFill>
                             <a:srgbClr val="F6F4EF"/>
                           </a:solidFill>
@@ -6901,7 +6901,7 @@
                         </a:rPr>
                         <a:t>Mean</a:t>
                       </a:r>
-                      <a:endParaRPr lang="en-US" sz="1200" dirty="0">
+                      <a:endParaRPr lang="en-US" sz="1150" dirty="0">
                         <a:latin typeface="Tahoma" charset="0"/>
                         <a:ea typeface="Tahoma" charset="0"/>
                         <a:cs typeface="Tahoma" charset="0"/>
@@ -6951,12 +6951,12 @@
                     <a:p>
                       <a:pPr algn="ctr" indent="0" marL="0">
                         <a:lnSpc>
-                          <a:spcPts val="1680"/>
+                          <a:spcPts val="1579"/>
                         </a:lnSpc>
                         <a:buNone/>
                       </a:pPr>
                       <a:r>
-                        <a:rPr lang="en-US" sz="1200" b="1" dirty="0">
+                        <a:rPr lang="en-US" sz="1150" b="1" dirty="0">
                           <a:solidFill>
                             <a:srgbClr val="F6F4EF"/>
                           </a:solidFill>
@@ -6966,7 +6966,7 @@
                         </a:rPr>
                         <a:t>Std. Deviation</a:t>
                       </a:r>
-                      <a:endParaRPr lang="en-US" sz="1200" dirty="0">
+                      <a:endParaRPr lang="en-US" sz="1150" dirty="0">
                         <a:latin typeface="Tahoma" charset="0"/>
                         <a:ea typeface="Tahoma" charset="0"/>
                         <a:cs typeface="Tahoma" charset="0"/>
@@ -7016,12 +7016,12 @@
                     <a:p>
                       <a:pPr algn="ctr" indent="0" marL="0">
                         <a:lnSpc>
-                          <a:spcPts val="1680"/>
+                          <a:spcPts val="1579"/>
                         </a:lnSpc>
                         <a:buNone/>
                       </a:pPr>
                       <a:r>
-                        <a:rPr lang="en-US" sz="1200" b="1" dirty="0">
+                        <a:rPr lang="en-US" sz="1150" b="1" dirty="0">
                           <a:solidFill>
                             <a:srgbClr val="F6F4EF"/>
                           </a:solidFill>
@@ -7031,7 +7031,7 @@
                         </a:rPr>
                         <a:t>Std. Error Mean</a:t>
                       </a:r>
-                      <a:endParaRPr lang="en-US" sz="1200" dirty="0">
+                      <a:endParaRPr lang="en-US" sz="1150" dirty="0">
                         <a:latin typeface="Tahoma" charset="0"/>
                         <a:ea typeface="Tahoma" charset="0"/>
                         <a:cs typeface="Tahoma" charset="0"/>
@@ -7083,12 +7083,12 @@
                     <a:p>
                       <a:pPr indent="0" marL="0">
                         <a:lnSpc>
-                          <a:spcPts val="1680"/>
+                          <a:spcPts val="1579"/>
                         </a:lnSpc>
                         <a:buNone/>
                       </a:pPr>
                       <a:r>
-                        <a:rPr lang="en-US" sz="1200" dirty="0">
+                        <a:rPr lang="en-US" sz="1150" dirty="0">
                           <a:solidFill>
                             <a:srgbClr val="14233A"/>
                           </a:solidFill>
@@ -7098,7 +7098,7 @@
                         </a:rPr>
                         <a:t>hours</a:t>
                       </a:r>
-                      <a:endParaRPr lang="en-US" sz="1200" dirty="0">
+                      <a:endParaRPr lang="en-US" sz="1150" dirty="0">
                         <a:latin typeface="Tahoma" charset="0"/>
                         <a:ea typeface="Tahoma" charset="0"/>
                         <a:cs typeface="Tahoma" charset="0"/>
@@ -7148,12 +7148,12 @@
                     <a:p>
                       <a:pPr algn="ctr" indent="0" marL="0">
                         <a:lnSpc>
-                          <a:spcPts val="1680"/>
+                          <a:spcPts val="1579"/>
                         </a:lnSpc>
                         <a:buNone/>
                       </a:pPr>
                       <a:r>
-                        <a:rPr lang="en-US" sz="1200" dirty="0">
+                        <a:rPr lang="en-US" sz="1150" dirty="0">
                           <a:solidFill>
                             <a:srgbClr val="14233A"/>
                           </a:solidFill>
@@ -7163,7 +7163,7 @@
                         </a:rPr>
                         <a:t>10</a:t>
                       </a:r>
-                      <a:endParaRPr lang="en-US" sz="1200" dirty="0">
+                      <a:endParaRPr lang="en-US" sz="1150" dirty="0">
                         <a:latin typeface="Tahoma" charset="0"/>
                         <a:ea typeface="Tahoma" charset="0"/>
                         <a:cs typeface="Tahoma" charset="0"/>
@@ -7219,12 +7219,12 @@
                     <a:p>
                       <a:pPr algn="ctr" indent="0" marL="0">
                         <a:lnSpc>
-                          <a:spcPts val="1680"/>
+                          <a:spcPts val="1579"/>
                         </a:lnSpc>
                         <a:buNone/>
                       </a:pPr>
                       <a:r>
-                        <a:rPr lang="en-US" sz="1200" dirty="0">
+                        <a:rPr lang="en-US" sz="1150" dirty="0">
                           <a:solidFill>
                             <a:srgbClr val="14233A"/>
                           </a:solidFill>
@@ -7234,7 +7234,7 @@
                         </a:rPr>
                         <a:t>20.40</a:t>
                       </a:r>
-                      <a:endParaRPr lang="en-US" sz="1200" dirty="0">
+                      <a:endParaRPr lang="en-US" sz="1150" dirty="0">
                         <a:latin typeface="Tahoma" charset="0"/>
                         <a:ea typeface="Tahoma" charset="0"/>
                         <a:cs typeface="Tahoma" charset="0"/>
@@ -7290,12 +7290,12 @@
                     <a:p>
                       <a:pPr algn="ctr" indent="0" marL="0">
                         <a:lnSpc>
-                          <a:spcPts val="1680"/>
+                          <a:spcPts val="1579"/>
                         </a:lnSpc>
                         <a:buNone/>
                       </a:pPr>
                       <a:r>
-                        <a:rPr lang="en-US" sz="1200" dirty="0">
+                        <a:rPr lang="en-US" sz="1150" dirty="0">
                           <a:solidFill>
                             <a:srgbClr val="14233A"/>
                           </a:solidFill>
@@ -7305,7 +7305,7 @@
                         </a:rPr>
                         <a:t>4.926</a:t>
                       </a:r>
-                      <a:endParaRPr lang="en-US" sz="1200" dirty="0">
+                      <a:endParaRPr lang="en-US" sz="1150" dirty="0">
                         <a:latin typeface="Tahoma" charset="0"/>
                         <a:ea typeface="Tahoma" charset="0"/>
                         <a:cs typeface="Tahoma" charset="0"/>
@@ -7361,12 +7361,12 @@
                     <a:p>
                       <a:pPr algn="ctr" indent="0" marL="0">
                         <a:lnSpc>
-                          <a:spcPts val="1680"/>
+                          <a:spcPts val="1579"/>
                         </a:lnSpc>
                         <a:buNone/>
                       </a:pPr>
                       <a:r>
-                        <a:rPr lang="en-US" sz="1200" dirty="0">
+                        <a:rPr lang="en-US" sz="1150" dirty="0">
                           <a:solidFill>
                             <a:srgbClr val="14233A"/>
                           </a:solidFill>
@@ -7376,7 +7376,7 @@
                         </a:rPr>
                         <a:t>1.558</a:t>
                       </a:r>
-                      <a:endParaRPr lang="en-US" sz="1200" dirty="0">
+                      <a:endParaRPr lang="en-US" sz="1150" dirty="0">
                         <a:latin typeface="Tahoma" charset="0"/>
                         <a:ea typeface="Tahoma" charset="0"/>
                         <a:cs typeface="Tahoma" charset="0"/>
@@ -7638,11 +7638,11 @@
                     <a:p>
                       <a:pPr indent="0" marL="0">
                         <a:lnSpc>
-                          <a:spcPts val="1680"/>
+                          <a:spcPts val="1579"/>
                         </a:lnSpc>
                         <a:buNone/>
                       </a:pPr>
-                      <a:endParaRPr lang="en-US" sz="1200" dirty="0">
+                      <a:endParaRPr lang="en-US" sz="1150" dirty="0">
                         <a:latin typeface="Tahoma" charset="0"/>
                         <a:ea typeface="Tahoma" charset="0"/>
                         <a:cs typeface="Tahoma" charset="0"/>
@@ -7686,12 +7686,12 @@
                     <a:p>
                       <a:pPr algn="ctr" indent="0" marL="0">
                         <a:lnSpc>
-                          <a:spcPts val="1680"/>
+                          <a:spcPts val="1579"/>
                         </a:lnSpc>
                         <a:buNone/>
                       </a:pPr>
                       <a:r>
-                        <a:rPr lang="en-US" sz="1200" b="1" dirty="0">
+                        <a:rPr lang="en-US" sz="1150" b="1" dirty="0">
                           <a:solidFill>
                             <a:srgbClr val="F6F4EF"/>
                           </a:solidFill>
@@ -7701,7 +7701,7 @@
                         </a:rPr>
                         <a:t>t</a:t>
                       </a:r>
-                      <a:endParaRPr lang="en-US" sz="1200" dirty="0">
+                      <a:endParaRPr lang="en-US" sz="1150" dirty="0">
                         <a:latin typeface="Tahoma" charset="0"/>
                         <a:ea typeface="Tahoma" charset="0"/>
                         <a:cs typeface="Tahoma" charset="0"/>
@@ -7751,12 +7751,12 @@
                     <a:p>
                       <a:pPr algn="ctr" indent="0" marL="0">
                         <a:lnSpc>
-                          <a:spcPts val="1680"/>
+                          <a:spcPts val="1579"/>
                         </a:lnSpc>
                         <a:buNone/>
                       </a:pPr>
                       <a:r>
-                        <a:rPr lang="en-US" sz="1200" b="1" dirty="0">
+                        <a:rPr lang="en-US" sz="1150" b="1" dirty="0">
                           <a:solidFill>
                             <a:srgbClr val="F6F4EF"/>
                           </a:solidFill>
@@ -7766,7 +7766,7 @@
                         </a:rPr>
                         <a:t>df</a:t>
                       </a:r>
-                      <a:endParaRPr lang="en-US" sz="1200" dirty="0">
+                      <a:endParaRPr lang="en-US" sz="1150" dirty="0">
                         <a:latin typeface="Tahoma" charset="0"/>
                         <a:ea typeface="Tahoma" charset="0"/>
                         <a:cs typeface="Tahoma" charset="0"/>
@@ -7816,12 +7816,12 @@
                     <a:p>
                       <a:pPr algn="ctr" indent="0" marL="0">
                         <a:lnSpc>
-                          <a:spcPts val="1680"/>
+                          <a:spcPts val="1579"/>
                         </a:lnSpc>
                         <a:buNone/>
                       </a:pPr>
                       <a:r>
-                        <a:rPr lang="en-US" sz="1200" b="1" dirty="0">
+                        <a:rPr lang="en-US" sz="1150" b="1" dirty="0">
                           <a:solidFill>
                             <a:srgbClr val="F6F4EF"/>
                           </a:solidFill>
@@ -7831,7 +7831,7 @@
                         </a:rPr>
                         <a:t>Sig. (2-tailed)</a:t>
                       </a:r>
-                      <a:endParaRPr lang="en-US" sz="1200" dirty="0">
+                      <a:endParaRPr lang="en-US" sz="1150" dirty="0">
                         <a:latin typeface="Tahoma" charset="0"/>
                         <a:ea typeface="Tahoma" charset="0"/>
                         <a:cs typeface="Tahoma" charset="0"/>
@@ -7881,12 +7881,12 @@
                     <a:p>
                       <a:pPr algn="ctr" indent="0" marL="0">
                         <a:lnSpc>
-                          <a:spcPts val="1680"/>
+                          <a:spcPts val="1579"/>
                         </a:lnSpc>
                         <a:buNone/>
                       </a:pPr>
                       <a:r>
-                        <a:rPr lang="en-US" sz="1200" b="1" dirty="0">
+                        <a:rPr lang="en-US" sz="1150" b="1" dirty="0">
                           <a:solidFill>
                             <a:srgbClr val="F6F4EF"/>
                           </a:solidFill>
@@ -7896,7 +7896,7 @@
                         </a:rPr>
                         <a:t>Mean Difference</a:t>
                       </a:r>
-                      <a:endParaRPr lang="en-US" sz="1200" dirty="0">
+                      <a:endParaRPr lang="en-US" sz="1150" dirty="0">
                         <a:latin typeface="Tahoma" charset="0"/>
                         <a:ea typeface="Tahoma" charset="0"/>
                         <a:cs typeface="Tahoma" charset="0"/>
@@ -7946,12 +7946,12 @@
                     <a:p>
                       <a:pPr algn="ctr" indent="0" marL="0">
                         <a:lnSpc>
-                          <a:spcPts val="1680"/>
+                          <a:spcPts val="1579"/>
                         </a:lnSpc>
                         <a:buNone/>
                       </a:pPr>
                       <a:r>
-                        <a:rPr lang="en-US" sz="1200" b="1" dirty="0">
+                        <a:rPr lang="en-US" sz="1150" b="1" dirty="0">
                           <a:solidFill>
                             <a:srgbClr val="F6F4EF"/>
                           </a:solidFill>
@@ -7961,7 +7961,7 @@
                         </a:rPr>
                         <a:t>95% CI Lower</a:t>
                       </a:r>
-                      <a:endParaRPr lang="en-US" sz="1200" dirty="0">
+                      <a:endParaRPr lang="en-US" sz="1150" dirty="0">
                         <a:latin typeface="Tahoma" charset="0"/>
                         <a:ea typeface="Tahoma" charset="0"/>
                         <a:cs typeface="Tahoma" charset="0"/>
@@ -8011,12 +8011,12 @@
                     <a:p>
                       <a:pPr algn="ctr" indent="0" marL="0">
                         <a:lnSpc>
-                          <a:spcPts val="1680"/>
+                          <a:spcPts val="1579"/>
                         </a:lnSpc>
                         <a:buNone/>
                       </a:pPr>
                       <a:r>
-                        <a:rPr lang="en-US" sz="1200" b="1" dirty="0">
+                        <a:rPr lang="en-US" sz="1150" b="1" dirty="0">
                           <a:solidFill>
                             <a:srgbClr val="F6F4EF"/>
                           </a:solidFill>
@@ -8026,7 +8026,7 @@
                         </a:rPr>
                         <a:t>95% CI Upper</a:t>
                       </a:r>
-                      <a:endParaRPr lang="en-US" sz="1200" dirty="0">
+                      <a:endParaRPr lang="en-US" sz="1150" dirty="0">
                         <a:latin typeface="Tahoma" charset="0"/>
                         <a:ea typeface="Tahoma" charset="0"/>
                         <a:cs typeface="Tahoma" charset="0"/>
@@ -8078,12 +8078,12 @@
                     <a:p>
                       <a:pPr indent="0" marL="0">
                         <a:lnSpc>
-                          <a:spcPts val="1680"/>
+                          <a:spcPts val="1579"/>
                         </a:lnSpc>
                         <a:buNone/>
                       </a:pPr>
                       <a:r>
-                        <a:rPr lang="en-US" sz="1200" dirty="0">
+                        <a:rPr lang="en-US" sz="1150" dirty="0">
                           <a:solidFill>
                             <a:srgbClr val="14233A"/>
                           </a:solidFill>
@@ -8093,7 +8093,7 @@
                         </a:rPr>
                         <a:t>hours</a:t>
                       </a:r>
-                      <a:endParaRPr lang="en-US" sz="1200" dirty="0">
+                      <a:endParaRPr lang="en-US" sz="1150" dirty="0">
                         <a:latin typeface="Tahoma" charset="0"/>
                         <a:ea typeface="Tahoma" charset="0"/>
                         <a:cs typeface="Tahoma" charset="0"/>
@@ -8143,12 +8143,12 @@
                     <a:p>
                       <a:pPr algn="ctr" indent="0" marL="0">
                         <a:lnSpc>
-                          <a:spcPts val="1680"/>
+                          <a:spcPts val="1579"/>
                         </a:lnSpc>
                         <a:buNone/>
                       </a:pPr>
                       <a:r>
-                        <a:rPr lang="en-US" sz="1200" dirty="0">
+                        <a:rPr lang="en-US" sz="1150" dirty="0">
                           <a:solidFill>
                             <a:srgbClr val="14233A"/>
                           </a:solidFill>
@@ -8158,7 +8158,7 @@
                         </a:rPr>
                         <a:t>.257</a:t>
                       </a:r>
-                      <a:endParaRPr lang="en-US" sz="1200" dirty="0">
+                      <a:endParaRPr lang="en-US" sz="1150" dirty="0">
                         <a:latin typeface="Tahoma" charset="0"/>
                         <a:ea typeface="Tahoma" charset="0"/>
                         <a:cs typeface="Tahoma" charset="0"/>
@@ -8214,12 +8214,12 @@
                     <a:p>
                       <a:pPr algn="ctr" indent="0" marL="0">
                         <a:lnSpc>
-                          <a:spcPts val="1680"/>
+                          <a:spcPts val="1579"/>
                         </a:lnSpc>
                         <a:buNone/>
                       </a:pPr>
                       <a:r>
-                        <a:rPr lang="en-US" sz="1200" dirty="0">
+                        <a:rPr lang="en-US" sz="1150" dirty="0">
                           <a:solidFill>
                             <a:srgbClr val="14233A"/>
                           </a:solidFill>
@@ -8229,7 +8229,7 @@
                         </a:rPr>
                         <a:t>9</a:t>
                       </a:r>
-                      <a:endParaRPr lang="en-US" sz="1200" dirty="0">
+                      <a:endParaRPr lang="en-US" sz="1150" dirty="0">
                         <a:latin typeface="Tahoma" charset="0"/>
                         <a:ea typeface="Tahoma" charset="0"/>
                         <a:cs typeface="Tahoma" charset="0"/>
@@ -8285,12 +8285,12 @@
                     <a:p>
                       <a:pPr algn="ctr" indent="0" marL="0">
                         <a:lnSpc>
-                          <a:spcPts val="1680"/>
+                          <a:spcPts val="1579"/>
                         </a:lnSpc>
                         <a:buNone/>
                       </a:pPr>
                       <a:r>
-                        <a:rPr lang="en-US" sz="1200" dirty="0">
+                        <a:rPr lang="en-US" sz="1150" dirty="0">
                           <a:solidFill>
                             <a:srgbClr val="9A5B00"/>
                           </a:solidFill>
@@ -8300,7 +8300,7 @@
                         </a:rPr>
                         <a:t>.803</a:t>
                       </a:r>
-                      <a:endParaRPr lang="en-US" sz="1200" dirty="0">
+                      <a:endParaRPr lang="en-US" sz="1150" dirty="0">
                         <a:latin typeface="Tahoma" charset="0"/>
                         <a:ea typeface="Tahoma" charset="0"/>
                         <a:cs typeface="Tahoma" charset="0"/>
@@ -8356,12 +8356,12 @@
                     <a:p>
                       <a:pPr algn="ctr" indent="0" marL="0">
                         <a:lnSpc>
-                          <a:spcPts val="1680"/>
+                          <a:spcPts val="1579"/>
                         </a:lnSpc>
                         <a:buNone/>
                       </a:pPr>
                       <a:r>
-                        <a:rPr lang="en-US" sz="1200" dirty="0">
+                        <a:rPr lang="en-US" sz="1150" dirty="0">
                           <a:solidFill>
                             <a:srgbClr val="14233A"/>
                           </a:solidFill>
@@ -8371,7 +8371,7 @@
                         </a:rPr>
                         <a:t>.400</a:t>
                       </a:r>
-                      <a:endParaRPr lang="en-US" sz="1200" dirty="0">
+                      <a:endParaRPr lang="en-US" sz="1150" dirty="0">
                         <a:latin typeface="Tahoma" charset="0"/>
                         <a:ea typeface="Tahoma" charset="0"/>
                         <a:cs typeface="Tahoma" charset="0"/>
@@ -8427,12 +8427,12 @@
                     <a:p>
                       <a:pPr algn="ctr" indent="0" marL="0">
                         <a:lnSpc>
-                          <a:spcPts val="1680"/>
+                          <a:spcPts val="1579"/>
                         </a:lnSpc>
                         <a:buNone/>
                       </a:pPr>
                       <a:r>
-                        <a:rPr lang="en-US" sz="1200" dirty="0">
+                        <a:rPr lang="en-US" sz="1150" dirty="0">
                           <a:solidFill>
                             <a:srgbClr val="14233A"/>
                           </a:solidFill>
@@ -8442,7 +8442,7 @@
                         </a:rPr>
                         <a:t>-3.12</a:t>
                       </a:r>
-                      <a:endParaRPr lang="en-US" sz="1200" dirty="0">
+                      <a:endParaRPr lang="en-US" sz="1150" dirty="0">
                         <a:latin typeface="Tahoma" charset="0"/>
                         <a:ea typeface="Tahoma" charset="0"/>
                         <a:cs typeface="Tahoma" charset="0"/>
@@ -8498,12 +8498,12 @@
                     <a:p>
                       <a:pPr algn="ctr" indent="0" marL="0">
                         <a:lnSpc>
-                          <a:spcPts val="1680"/>
+                          <a:spcPts val="1579"/>
                         </a:lnSpc>
                         <a:buNone/>
                       </a:pPr>
                       <a:r>
-                        <a:rPr lang="en-US" sz="1200" dirty="0">
+                        <a:rPr lang="en-US" sz="1150" dirty="0">
                           <a:solidFill>
                             <a:srgbClr val="14233A"/>
                           </a:solidFill>
@@ -8513,7 +8513,7 @@
                         </a:rPr>
                         <a:t>3.92</a:t>
                       </a:r>
-                      <a:endParaRPr lang="en-US" sz="1200" dirty="0">
+                      <a:endParaRPr lang="en-US" sz="1150" dirty="0">
                         <a:latin typeface="Tahoma" charset="0"/>
                         <a:ea typeface="Tahoma" charset="0"/>
                         <a:cs typeface="Tahoma" charset="0"/>
@@ -8770,6 +8770,200 @@
   <p:clrMapOvr>
     <a:masterClrMapping/>
   </p:clrMapOvr>
+  <p:timing>
+    <p:tnLst>
+      <p:par>
+        <p:cTn id="1" dur="indefinite" restart="never" nodeType="tmRoot">
+          <p:childTnLst>
+            <p:seq concurrent="1" nextAc="seek">
+              <p:cTn id="2" dur="indefinite" nodeType="mainSeq">
+                <p:childTnLst>
+                  <p:par>
+                    <p:cTn id="3" fill="hold">
+                      <p:stCondLst>
+                        <p:cond delay="indefinite"/>
+                      </p:stCondLst>
+                      <p:childTnLst>
+                        <p:par>
+                          <p:cTn id="4" fill="hold">
+                            <p:stCondLst>
+                              <p:cond delay="0"/>
+                            </p:stCondLst>
+                            <p:childTnLst>
+                              <p:par>
+                                <p:cTn id="5" presetID="10" presetClass="entr" presetSubtype="0" fill="hold" grpId="0" nodeType="clickEffect">
+                                  <p:stCondLst>
+                                    <p:cond delay="0"/>
+                                  </p:stCondLst>
+                                  <p:childTnLst>
+                                    <p:set>
+                                      <p:cBhvr>
+                                        <p:cTn id="105" dur="1" fill="hold">
+                                          <p:stCondLst>
+                                            <p:cond delay="0"/>
+                                          </p:stCondLst>
+                                        </p:cTn>
+                                        <p:tgtEl>
+                                          <p:spTgt spid="3"/>
+                                        </p:tgtEl>
+                                        <p:attrNameLst>
+                                          <p:attrName>style.visibility</p:attrName>
+                                        </p:attrNameLst>
+                                      </p:cBhvr>
+                                      <p:to>
+                                        <p:strVal val="visible"/>
+                                      </p:to>
+                                    </p:set>
+                                    <p:animEffect transition="in" filter="fade">
+                                      <p:cBhvr>
+                                        <p:cTn id="6" dur="500"/>
+                                        <p:tgtEl>
+                                          <p:spTgt spid="3"/>
+                                        </p:tgtEl>
+                                      </p:cBhvr>
+                                    </p:animEffect>
+                                  </p:childTnLst>
+                                </p:cTn>
+                              </p:par>
+                              <p:par>
+                                <p:cTn id="7" presetID="10" presetClass="entr" presetSubtype="0" fill="hold" grpId="0" nodeType="withEffect">
+                                  <p:stCondLst>
+                                    <p:cond delay="0"/>
+                                  </p:stCondLst>
+                                  <p:childTnLst>
+                                    <p:set>
+                                      <p:cBhvr>
+                                        <p:cTn id="107" dur="1" fill="hold">
+                                          <p:stCondLst>
+                                            <p:cond delay="0"/>
+                                          </p:stCondLst>
+                                        </p:cTn>
+                                        <p:tgtEl>
+                                          <p:spTgt spid="16"/>
+                                        </p:tgtEl>
+                                        <p:attrNameLst>
+                                          <p:attrName>style.visibility</p:attrName>
+                                        </p:attrNameLst>
+                                      </p:cBhvr>
+                                      <p:to>
+                                        <p:strVal val="visible"/>
+                                      </p:to>
+                                    </p:set>
+                                    <p:animEffect transition="in" filter="fade">
+                                      <p:cBhvr>
+                                        <p:cTn id="8" dur="500"/>
+                                        <p:tgtEl>
+                                          <p:spTgt spid="16"/>
+                                        </p:tgtEl>
+                                      </p:cBhvr>
+                                    </p:animEffect>
+                                  </p:childTnLst>
+                                </p:cTn>
+                              </p:par>
+                              <p:par>
+                                <p:cTn id="9" presetID="10" presetClass="entr" presetSubtype="0" fill="hold" grpId="0" nodeType="withEffect">
+                                  <p:stCondLst>
+                                    <p:cond delay="0"/>
+                                  </p:stCondLst>
+                                  <p:childTnLst>
+                                    <p:set>
+                                      <p:cBhvr>
+                                        <p:cTn id="109" dur="1" fill="hold">
+                                          <p:stCondLst>
+                                            <p:cond delay="0"/>
+                                          </p:stCondLst>
+                                        </p:cTn>
+                                        <p:tgtEl>
+                                          <p:spTgt spid="17"/>
+                                        </p:tgtEl>
+                                        <p:attrNameLst>
+                                          <p:attrName>style.visibility</p:attrName>
+                                        </p:attrNameLst>
+                                      </p:cBhvr>
+                                      <p:to>
+                                        <p:strVal val="visible"/>
+                                      </p:to>
+                                    </p:set>
+                                    <p:animEffect transition="in" filter="fade">
+                                      <p:cBhvr>
+                                        <p:cTn id="10" dur="500"/>
+                                        <p:tgtEl>
+                                          <p:spTgt spid="17"/>
+                                        </p:tgtEl>
+                                      </p:cBhvr>
+                                    </p:animEffect>
+                                  </p:childTnLst>
+                                </p:cTn>
+                              </p:par>
+                              <p:par>
+                                <p:cTn id="11" presetID="10" presetClass="entr" presetSubtype="0" fill="hold" grpId="0" nodeType="withEffect">
+                                  <p:stCondLst>
+                                    <p:cond delay="0"/>
+                                  </p:stCondLst>
+                                  <p:childTnLst>
+                                    <p:set>
+                                      <p:cBhvr>
+                                        <p:cTn id="111" dur="1" fill="hold">
+                                          <p:stCondLst>
+                                            <p:cond delay="0"/>
+                                          </p:stCondLst>
+                                        </p:cTn>
+                                        <p:tgtEl>
+                                          <p:spTgt spid="18"/>
+                                        </p:tgtEl>
+                                        <p:attrNameLst>
+                                          <p:attrName>style.visibility</p:attrName>
+                                        </p:attrNameLst>
+                                      </p:cBhvr>
+                                      <p:to>
+                                        <p:strVal val="visible"/>
+                                      </p:to>
+                                    </p:set>
+                                    <p:animEffect transition="in" filter="fade">
+                                      <p:cBhvr>
+                                        <p:cTn id="12" dur="500"/>
+                                        <p:tgtEl>
+                                          <p:spTgt spid="18"/>
+                                        </p:tgtEl>
+                                      </p:cBhvr>
+                                    </p:animEffect>
+                                  </p:childTnLst>
+                                </p:cTn>
+                              </p:par>
+                            </p:childTnLst>
+                          </p:cTn>
+                        </p:par>
+                      </p:childTnLst>
+                    </p:cTn>
+                  </p:par>
+                </p:childTnLst>
+              </p:cTn>
+              <p:prevCondLst>
+                <p:cond evt="onPrev" delay="0">
+                  <p:tgtEl>
+                    <p:sldTgt/>
+                  </p:tgtEl>
+                </p:cond>
+              </p:prevCondLst>
+              <p:nextCondLst>
+                <p:cond evt="onNext" delay="0">
+                  <p:tgtEl>
+                    <p:sldTgt/>
+                  </p:tgtEl>
+                </p:cond>
+              </p:nextCondLst>
+            </p:seq>
+          </p:childTnLst>
+        </p:cTn>
+      </p:par>
+    </p:tnLst>
+    <p:bldLst>
+      <p:bldP spid="3" grpId="0" animBg="1"/>
+      <p:bldP spid="16" grpId="0" animBg="1"/>
+      <p:bldP spid="17" grpId="0" animBg="1"/>
+      <p:bldP spid="18" grpId="0" animBg="1"/>
+    </p:bldLst>
+  </p:timing>
 </p:sld>
 </file>
 
@@ -11681,11 +11875,11 @@
                     <a:p>
                       <a:pPr indent="0" marL="0">
                         <a:lnSpc>
-                          <a:spcPts val="1680"/>
+                          <a:spcPts val="1579"/>
                         </a:lnSpc>
                         <a:buNone/>
                       </a:pPr>
-                      <a:endParaRPr lang="en-US" sz="1200" dirty="0">
+                      <a:endParaRPr lang="en-US" sz="1150" dirty="0">
                         <a:latin typeface="Tahoma" charset="0"/>
                         <a:ea typeface="Tahoma" charset="0"/>
                         <a:cs typeface="Tahoma" charset="0"/>
@@ -11729,12 +11923,12 @@
                     <a:p>
                       <a:pPr algn="ctr" indent="0" marL="0">
                         <a:lnSpc>
-                          <a:spcPts val="1680"/>
+                          <a:spcPts val="1579"/>
                         </a:lnSpc>
                         <a:buNone/>
                       </a:pPr>
                       <a:r>
-                        <a:rPr lang="en-US" sz="1200" b="1" dirty="0">
+                        <a:rPr lang="en-US" sz="1150" b="1" dirty="0">
                           <a:solidFill>
                             <a:srgbClr val="F6F4EF"/>
                           </a:solidFill>
@@ -11744,7 +11938,7 @@
                         </a:rPr>
                         <a:t>N</a:t>
                       </a:r>
-                      <a:endParaRPr lang="en-US" sz="1200" dirty="0">
+                      <a:endParaRPr lang="en-US" sz="1150" dirty="0">
                         <a:latin typeface="Tahoma" charset="0"/>
                         <a:ea typeface="Tahoma" charset="0"/>
                         <a:cs typeface="Tahoma" charset="0"/>
@@ -11794,12 +11988,12 @@
                     <a:p>
                       <a:pPr algn="ctr" indent="0" marL="0">
                         <a:lnSpc>
-                          <a:spcPts val="1680"/>
+                          <a:spcPts val="1579"/>
                         </a:lnSpc>
                         <a:buNone/>
                       </a:pPr>
                       <a:r>
-                        <a:rPr lang="en-US" sz="1200" b="1" dirty="0">
+                        <a:rPr lang="en-US" sz="1150" b="1" dirty="0">
                           <a:solidFill>
                             <a:srgbClr val="F6F4EF"/>
                           </a:solidFill>
@@ -11809,7 +12003,7 @@
                         </a:rPr>
                         <a:t>Mean</a:t>
                       </a:r>
-                      <a:endParaRPr lang="en-US" sz="1200" dirty="0">
+                      <a:endParaRPr lang="en-US" sz="1150" dirty="0">
                         <a:latin typeface="Tahoma" charset="0"/>
                         <a:ea typeface="Tahoma" charset="0"/>
                         <a:cs typeface="Tahoma" charset="0"/>
@@ -11859,12 +12053,12 @@
                     <a:p>
                       <a:pPr algn="ctr" indent="0" marL="0">
                         <a:lnSpc>
-                          <a:spcPts val="1680"/>
+                          <a:spcPts val="1579"/>
                         </a:lnSpc>
                         <a:buNone/>
                       </a:pPr>
                       <a:r>
-                        <a:rPr lang="en-US" sz="1200" b="1" dirty="0">
+                        <a:rPr lang="en-US" sz="1150" b="1" dirty="0">
                           <a:solidFill>
                             <a:srgbClr val="F6F4EF"/>
                           </a:solidFill>
@@ -11874,7 +12068,7 @@
                         </a:rPr>
                         <a:t>Std. Deviation</a:t>
                       </a:r>
-                      <a:endParaRPr lang="en-US" sz="1200" dirty="0">
+                      <a:endParaRPr lang="en-US" sz="1150" dirty="0">
                         <a:latin typeface="Tahoma" charset="0"/>
                         <a:ea typeface="Tahoma" charset="0"/>
                         <a:cs typeface="Tahoma" charset="0"/>
@@ -11924,12 +12118,12 @@
                     <a:p>
                       <a:pPr algn="ctr" indent="0" marL="0">
                         <a:lnSpc>
-                          <a:spcPts val="1680"/>
+                          <a:spcPts val="1579"/>
                         </a:lnSpc>
                         <a:buNone/>
                       </a:pPr>
                       <a:r>
-                        <a:rPr lang="en-US" sz="1200" b="1" dirty="0">
+                        <a:rPr lang="en-US" sz="1150" b="1" dirty="0">
                           <a:solidFill>
                             <a:srgbClr val="F6F4EF"/>
                           </a:solidFill>
@@ -11939,7 +12133,7 @@
                         </a:rPr>
                         <a:t>Std. Error Mean</a:t>
                       </a:r>
-                      <a:endParaRPr lang="en-US" sz="1200" dirty="0">
+                      <a:endParaRPr lang="en-US" sz="1150" dirty="0">
                         <a:latin typeface="Tahoma" charset="0"/>
                         <a:ea typeface="Tahoma" charset="0"/>
                         <a:cs typeface="Tahoma" charset="0"/>
@@ -11991,12 +12185,12 @@
                     <a:p>
                       <a:pPr indent="0" marL="0">
                         <a:lnSpc>
-                          <a:spcPts val="1680"/>
+                          <a:spcPts val="1579"/>
                         </a:lnSpc>
                         <a:buNone/>
                       </a:pPr>
                       <a:r>
-                        <a:rPr lang="en-US" sz="1200" dirty="0">
+                        <a:rPr lang="en-US" sz="1150" dirty="0">
                           <a:solidFill>
                             <a:srgbClr val="14233A"/>
                           </a:solidFill>
@@ -12006,7 +12200,7 @@
                         </a:rPr>
                         <a:t>attitude</a:t>
                       </a:r>
-                      <a:endParaRPr lang="en-US" sz="1200" dirty="0">
+                      <a:endParaRPr lang="en-US" sz="1150" dirty="0">
                         <a:latin typeface="Tahoma" charset="0"/>
                         <a:ea typeface="Tahoma" charset="0"/>
                         <a:cs typeface="Tahoma" charset="0"/>
@@ -12056,12 +12250,12 @@
                     <a:p>
                       <a:pPr algn="ctr" indent="0" marL="0">
                         <a:lnSpc>
-                          <a:spcPts val="1680"/>
+                          <a:spcPts val="1579"/>
                         </a:lnSpc>
                         <a:buNone/>
                       </a:pPr>
                       <a:r>
-                        <a:rPr lang="en-US" sz="1200" dirty="0">
+                        <a:rPr lang="en-US" sz="1150" dirty="0">
                           <a:solidFill>
                             <a:srgbClr val="14233A"/>
                           </a:solidFill>
@@ -12071,7 +12265,7 @@
                         </a:rPr>
                         <a:t>12</a:t>
                       </a:r>
-                      <a:endParaRPr lang="en-US" sz="1200" dirty="0">
+                      <a:endParaRPr lang="en-US" sz="1150" dirty="0">
                         <a:latin typeface="Tahoma" charset="0"/>
                         <a:ea typeface="Tahoma" charset="0"/>
                         <a:cs typeface="Tahoma" charset="0"/>
@@ -12127,12 +12321,12 @@
                     <a:p>
                       <a:pPr algn="ctr" indent="0" marL="0">
                         <a:lnSpc>
-                          <a:spcPts val="1680"/>
+                          <a:spcPts val="1579"/>
                         </a:lnSpc>
                         <a:buNone/>
                       </a:pPr>
                       <a:r>
-                        <a:rPr lang="en-US" sz="1200" dirty="0">
+                        <a:rPr lang="en-US" sz="1150" dirty="0">
                           <a:solidFill>
                             <a:srgbClr val="14233A"/>
                           </a:solidFill>
@@ -12142,7 +12336,7 @@
                         </a:rPr>
                         <a:t>3.68</a:t>
                       </a:r>
-                      <a:endParaRPr lang="en-US" sz="1200" dirty="0">
+                      <a:endParaRPr lang="en-US" sz="1150" dirty="0">
                         <a:latin typeface="Tahoma" charset="0"/>
                         <a:ea typeface="Tahoma" charset="0"/>
                         <a:cs typeface="Tahoma" charset="0"/>
@@ -12198,12 +12392,12 @@
                     <a:p>
                       <a:pPr algn="ctr" indent="0" marL="0">
                         <a:lnSpc>
-                          <a:spcPts val="1680"/>
+                          <a:spcPts val="1579"/>
                         </a:lnSpc>
                         <a:buNone/>
                       </a:pPr>
                       <a:r>
-                        <a:rPr lang="en-US" sz="1200" dirty="0">
+                        <a:rPr lang="en-US" sz="1150" dirty="0">
                           <a:solidFill>
                             <a:srgbClr val="14233A"/>
                           </a:solidFill>
@@ -12213,7 +12407,7 @@
                         </a:rPr>
                         <a:t>.556</a:t>
                       </a:r>
-                      <a:endParaRPr lang="en-US" sz="1200" dirty="0">
+                      <a:endParaRPr lang="en-US" sz="1150" dirty="0">
                         <a:latin typeface="Tahoma" charset="0"/>
                         <a:ea typeface="Tahoma" charset="0"/>
                         <a:cs typeface="Tahoma" charset="0"/>
@@ -12269,12 +12463,12 @@
                     <a:p>
                       <a:pPr algn="ctr" indent="0" marL="0">
                         <a:lnSpc>
-                          <a:spcPts val="1680"/>
+                          <a:spcPts val="1579"/>
                         </a:lnSpc>
                         <a:buNone/>
                       </a:pPr>
                       <a:r>
-                        <a:rPr lang="en-US" sz="1200" dirty="0">
+                        <a:rPr lang="en-US" sz="1150" dirty="0">
                           <a:solidFill>
                             <a:srgbClr val="14233A"/>
                           </a:solidFill>
@@ -12284,7 +12478,7 @@
                         </a:rPr>
                         <a:t>.160</a:t>
                       </a:r>
-                      <a:endParaRPr lang="en-US" sz="1200" dirty="0">
+                      <a:endParaRPr lang="en-US" sz="1150" dirty="0">
                         <a:latin typeface="Tahoma" charset="0"/>
                         <a:ea typeface="Tahoma" charset="0"/>
                         <a:cs typeface="Tahoma" charset="0"/>
@@ -12546,11 +12740,11 @@
                     <a:p>
                       <a:pPr indent="0" marL="0">
                         <a:lnSpc>
-                          <a:spcPts val="1680"/>
+                          <a:spcPts val="1579"/>
                         </a:lnSpc>
                         <a:buNone/>
                       </a:pPr>
-                      <a:endParaRPr lang="en-US" sz="1200" dirty="0">
+                      <a:endParaRPr lang="en-US" sz="1150" dirty="0">
                         <a:latin typeface="Tahoma" charset="0"/>
                         <a:ea typeface="Tahoma" charset="0"/>
                         <a:cs typeface="Tahoma" charset="0"/>
@@ -12594,12 +12788,12 @@
                     <a:p>
                       <a:pPr algn="ctr" indent="0" marL="0">
                         <a:lnSpc>
-                          <a:spcPts val="1680"/>
+                          <a:spcPts val="1579"/>
                         </a:lnSpc>
                         <a:buNone/>
                       </a:pPr>
                       <a:r>
-                        <a:rPr lang="en-US" sz="1200" b="1" dirty="0">
+                        <a:rPr lang="en-US" sz="1150" b="1" dirty="0">
                           <a:solidFill>
                             <a:srgbClr val="F6F4EF"/>
                           </a:solidFill>
@@ -12609,7 +12803,7 @@
                         </a:rPr>
                         <a:t>t</a:t>
                       </a:r>
-                      <a:endParaRPr lang="en-US" sz="1200" dirty="0">
+                      <a:endParaRPr lang="en-US" sz="1150" dirty="0">
                         <a:latin typeface="Tahoma" charset="0"/>
                         <a:ea typeface="Tahoma" charset="0"/>
                         <a:cs typeface="Tahoma" charset="0"/>
@@ -12659,12 +12853,12 @@
                     <a:p>
                       <a:pPr algn="ctr" indent="0" marL="0">
                         <a:lnSpc>
-                          <a:spcPts val="1680"/>
+                          <a:spcPts val="1579"/>
                         </a:lnSpc>
                         <a:buNone/>
                       </a:pPr>
                       <a:r>
-                        <a:rPr lang="en-US" sz="1200" b="1" dirty="0">
+                        <a:rPr lang="en-US" sz="1150" b="1" dirty="0">
                           <a:solidFill>
                             <a:srgbClr val="F6F4EF"/>
                           </a:solidFill>
@@ -12674,7 +12868,7 @@
                         </a:rPr>
                         <a:t>df</a:t>
                       </a:r>
-                      <a:endParaRPr lang="en-US" sz="1200" dirty="0">
+                      <a:endParaRPr lang="en-US" sz="1150" dirty="0">
                         <a:latin typeface="Tahoma" charset="0"/>
                         <a:ea typeface="Tahoma" charset="0"/>
                         <a:cs typeface="Tahoma" charset="0"/>
@@ -12724,12 +12918,12 @@
                     <a:p>
                       <a:pPr algn="ctr" indent="0" marL="0">
                         <a:lnSpc>
-                          <a:spcPts val="1680"/>
+                          <a:spcPts val="1579"/>
                         </a:lnSpc>
                         <a:buNone/>
                       </a:pPr>
                       <a:r>
-                        <a:rPr lang="en-US" sz="1200" b="1" dirty="0">
+                        <a:rPr lang="en-US" sz="1150" b="1" dirty="0">
                           <a:solidFill>
                             <a:srgbClr val="F6F4EF"/>
                           </a:solidFill>
@@ -12739,7 +12933,7 @@
                         </a:rPr>
                         <a:t>Sig. (2-tailed)</a:t>
                       </a:r>
-                      <a:endParaRPr lang="en-US" sz="1200" dirty="0">
+                      <a:endParaRPr lang="en-US" sz="1150" dirty="0">
                         <a:latin typeface="Tahoma" charset="0"/>
                         <a:ea typeface="Tahoma" charset="0"/>
                         <a:cs typeface="Tahoma" charset="0"/>
@@ -12789,12 +12983,12 @@
                     <a:p>
                       <a:pPr algn="ctr" indent="0" marL="0">
                         <a:lnSpc>
-                          <a:spcPts val="1680"/>
+                          <a:spcPts val="1579"/>
                         </a:lnSpc>
                         <a:buNone/>
                       </a:pPr>
                       <a:r>
-                        <a:rPr lang="en-US" sz="1200" b="1" dirty="0">
+                        <a:rPr lang="en-US" sz="1150" b="1" dirty="0">
                           <a:solidFill>
                             <a:srgbClr val="F6F4EF"/>
                           </a:solidFill>
@@ -12804,7 +12998,7 @@
                         </a:rPr>
                         <a:t>Mean Difference</a:t>
                       </a:r>
-                      <a:endParaRPr lang="en-US" sz="1200" dirty="0">
+                      <a:endParaRPr lang="en-US" sz="1150" dirty="0">
                         <a:latin typeface="Tahoma" charset="0"/>
                         <a:ea typeface="Tahoma" charset="0"/>
                         <a:cs typeface="Tahoma" charset="0"/>
@@ -12854,12 +13048,12 @@
                     <a:p>
                       <a:pPr algn="ctr" indent="0" marL="0">
                         <a:lnSpc>
-                          <a:spcPts val="1680"/>
+                          <a:spcPts val="1579"/>
                         </a:lnSpc>
                         <a:buNone/>
                       </a:pPr>
                       <a:r>
-                        <a:rPr lang="en-US" sz="1200" b="1" dirty="0">
+                        <a:rPr lang="en-US" sz="1150" b="1" dirty="0">
                           <a:solidFill>
                             <a:srgbClr val="F6F4EF"/>
                           </a:solidFill>
@@ -12869,7 +13063,7 @@
                         </a:rPr>
                         <a:t>95% CI Lower</a:t>
                       </a:r>
-                      <a:endParaRPr lang="en-US" sz="1200" dirty="0">
+                      <a:endParaRPr lang="en-US" sz="1150" dirty="0">
                         <a:latin typeface="Tahoma" charset="0"/>
                         <a:ea typeface="Tahoma" charset="0"/>
                         <a:cs typeface="Tahoma" charset="0"/>
@@ -12919,12 +13113,12 @@
                     <a:p>
                       <a:pPr algn="ctr" indent="0" marL="0">
                         <a:lnSpc>
-                          <a:spcPts val="1680"/>
+                          <a:spcPts val="1579"/>
                         </a:lnSpc>
                         <a:buNone/>
                       </a:pPr>
                       <a:r>
-                        <a:rPr lang="en-US" sz="1200" b="1" dirty="0">
+                        <a:rPr lang="en-US" sz="1150" b="1" dirty="0">
                           <a:solidFill>
                             <a:srgbClr val="F6F4EF"/>
                           </a:solidFill>
@@ -12934,7 +13128,7 @@
                         </a:rPr>
                         <a:t>95% CI Upper</a:t>
                       </a:r>
-                      <a:endParaRPr lang="en-US" sz="1200" dirty="0">
+                      <a:endParaRPr lang="en-US" sz="1150" dirty="0">
                         <a:latin typeface="Tahoma" charset="0"/>
                         <a:ea typeface="Tahoma" charset="0"/>
                         <a:cs typeface="Tahoma" charset="0"/>
@@ -12986,12 +13180,12 @@
                     <a:p>
                       <a:pPr indent="0" marL="0">
                         <a:lnSpc>
-                          <a:spcPts val="1680"/>
+                          <a:spcPts val="1579"/>
                         </a:lnSpc>
                         <a:buNone/>
                       </a:pPr>
                       <a:r>
-                        <a:rPr lang="en-US" sz="1200" dirty="0">
+                        <a:rPr lang="en-US" sz="1150" dirty="0">
                           <a:solidFill>
                             <a:srgbClr val="14233A"/>
                           </a:solidFill>
@@ -13001,7 +13195,7 @@
                         </a:rPr>
                         <a:t>attitude</a:t>
                       </a:r>
-                      <a:endParaRPr lang="en-US" sz="1200" dirty="0">
+                      <a:endParaRPr lang="en-US" sz="1150" dirty="0">
                         <a:latin typeface="Tahoma" charset="0"/>
                         <a:ea typeface="Tahoma" charset="0"/>
                         <a:cs typeface="Tahoma" charset="0"/>
@@ -13051,12 +13245,12 @@
                     <a:p>
                       <a:pPr algn="ctr" indent="0" marL="0">
                         <a:lnSpc>
-                          <a:spcPts val="1680"/>
+                          <a:spcPts val="1579"/>
                         </a:lnSpc>
                         <a:buNone/>
                       </a:pPr>
                       <a:r>
-                        <a:rPr lang="en-US" sz="1200" dirty="0">
+                        <a:rPr lang="en-US" sz="1150" dirty="0">
                           <a:solidFill>
                             <a:srgbClr val="14233A"/>
                           </a:solidFill>
@@ -13066,7 +13260,7 @@
                         </a:rPr>
                         <a:t>4.260</a:t>
                       </a:r>
-                      <a:endParaRPr lang="en-US" sz="1200" dirty="0">
+                      <a:endParaRPr lang="en-US" sz="1150" dirty="0">
                         <a:latin typeface="Tahoma" charset="0"/>
                         <a:ea typeface="Tahoma" charset="0"/>
                         <a:cs typeface="Tahoma" charset="0"/>
@@ -13122,12 +13316,12 @@
                     <a:p>
                       <a:pPr algn="ctr" indent="0" marL="0">
                         <a:lnSpc>
-                          <a:spcPts val="1680"/>
+                          <a:spcPts val="1579"/>
                         </a:lnSpc>
                         <a:buNone/>
                       </a:pPr>
                       <a:r>
-                        <a:rPr lang="en-US" sz="1200" dirty="0">
+                        <a:rPr lang="en-US" sz="1150" dirty="0">
                           <a:solidFill>
                             <a:srgbClr val="14233A"/>
                           </a:solidFill>
@@ -13137,7 +13331,7 @@
                         </a:rPr>
                         <a:t>11</a:t>
                       </a:r>
-                      <a:endParaRPr lang="en-US" sz="1200" dirty="0">
+                      <a:endParaRPr lang="en-US" sz="1150" dirty="0">
                         <a:latin typeface="Tahoma" charset="0"/>
                         <a:ea typeface="Tahoma" charset="0"/>
                         <a:cs typeface="Tahoma" charset="0"/>
@@ -13193,12 +13387,12 @@
                     <a:p>
                       <a:pPr algn="ctr" indent="0" marL="0">
                         <a:lnSpc>
-                          <a:spcPts val="1680"/>
+                          <a:spcPts val="1579"/>
                         </a:lnSpc>
                         <a:buNone/>
                       </a:pPr>
                       <a:r>
-                        <a:rPr lang="en-US" sz="1200" dirty="0">
+                        <a:rPr lang="en-US" sz="1150" dirty="0">
                           <a:solidFill>
                             <a:srgbClr val="9A5B00"/>
                           </a:solidFill>
@@ -13208,7 +13402,7 @@
                         </a:rPr>
                         <a:t>.001</a:t>
                       </a:r>
-                      <a:endParaRPr lang="en-US" sz="1200" dirty="0">
+                      <a:endParaRPr lang="en-US" sz="1150" dirty="0">
                         <a:latin typeface="Tahoma" charset="0"/>
                         <a:ea typeface="Tahoma" charset="0"/>
                         <a:cs typeface="Tahoma" charset="0"/>
@@ -13264,12 +13458,12 @@
                     <a:p>
                       <a:pPr algn="ctr" indent="0" marL="0">
                         <a:lnSpc>
-                          <a:spcPts val="1680"/>
+                          <a:spcPts val="1579"/>
                         </a:lnSpc>
                         <a:buNone/>
                       </a:pPr>
                       <a:r>
-                        <a:rPr lang="en-US" sz="1200" dirty="0">
+                        <a:rPr lang="en-US" sz="1150" dirty="0">
                           <a:solidFill>
                             <a:srgbClr val="14233A"/>
                           </a:solidFill>
@@ -13279,7 +13473,7 @@
                         </a:rPr>
                         <a:t>.683</a:t>
                       </a:r>
-                      <a:endParaRPr lang="en-US" sz="1200" dirty="0">
+                      <a:endParaRPr lang="en-US" sz="1150" dirty="0">
                         <a:latin typeface="Tahoma" charset="0"/>
                         <a:ea typeface="Tahoma" charset="0"/>
                         <a:cs typeface="Tahoma" charset="0"/>
@@ -13335,12 +13529,12 @@
                     <a:p>
                       <a:pPr algn="ctr" indent="0" marL="0">
                         <a:lnSpc>
-                          <a:spcPts val="1680"/>
+                          <a:spcPts val="1579"/>
                         </a:lnSpc>
                         <a:buNone/>
                       </a:pPr>
                       <a:r>
-                        <a:rPr lang="en-US" sz="1200" dirty="0">
+                        <a:rPr lang="en-US" sz="1150" dirty="0">
                           <a:solidFill>
                             <a:srgbClr val="14233A"/>
                           </a:solidFill>
@@ -13350,7 +13544,7 @@
                         </a:rPr>
                         <a:t>.33</a:t>
                       </a:r>
-                      <a:endParaRPr lang="en-US" sz="1200" dirty="0">
+                      <a:endParaRPr lang="en-US" sz="1150" dirty="0">
                         <a:latin typeface="Tahoma" charset="0"/>
                         <a:ea typeface="Tahoma" charset="0"/>
                         <a:cs typeface="Tahoma" charset="0"/>
@@ -13406,12 +13600,12 @@
                     <a:p>
                       <a:pPr algn="ctr" indent="0" marL="0">
                         <a:lnSpc>
-                          <a:spcPts val="1680"/>
+                          <a:spcPts val="1579"/>
                         </a:lnSpc>
                         <a:buNone/>
                       </a:pPr>
                       <a:r>
-                        <a:rPr lang="en-US" sz="1200" dirty="0">
+                        <a:rPr lang="en-US" sz="1150" dirty="0">
                           <a:solidFill>
                             <a:srgbClr val="14233A"/>
                           </a:solidFill>
@@ -13421,7 +13615,7 @@
                         </a:rPr>
                         <a:t>1.04</a:t>
                       </a:r>
-                      <a:endParaRPr lang="en-US" sz="1200" dirty="0">
+                      <a:endParaRPr lang="en-US" sz="1150" dirty="0">
                         <a:latin typeface="Tahoma" charset="0"/>
                         <a:ea typeface="Tahoma" charset="0"/>
                         <a:cs typeface="Tahoma" charset="0"/>
@@ -13678,6 +13872,200 @@
   <p:clrMapOvr>
     <a:masterClrMapping/>
   </p:clrMapOvr>
+  <p:timing>
+    <p:tnLst>
+      <p:par>
+        <p:cTn id="1" dur="indefinite" restart="never" nodeType="tmRoot">
+          <p:childTnLst>
+            <p:seq concurrent="1" nextAc="seek">
+              <p:cTn id="2" dur="indefinite" nodeType="mainSeq">
+                <p:childTnLst>
+                  <p:par>
+                    <p:cTn id="3" fill="hold">
+                      <p:stCondLst>
+                        <p:cond delay="indefinite"/>
+                      </p:stCondLst>
+                      <p:childTnLst>
+                        <p:par>
+                          <p:cTn id="4" fill="hold">
+                            <p:stCondLst>
+                              <p:cond delay="0"/>
+                            </p:stCondLst>
+                            <p:childTnLst>
+                              <p:par>
+                                <p:cTn id="5" presetID="10" presetClass="entr" presetSubtype="0" fill="hold" grpId="0" nodeType="clickEffect">
+                                  <p:stCondLst>
+                                    <p:cond delay="0"/>
+                                  </p:stCondLst>
+                                  <p:childTnLst>
+                                    <p:set>
+                                      <p:cBhvr>
+                                        <p:cTn id="105" dur="1" fill="hold">
+                                          <p:stCondLst>
+                                            <p:cond delay="0"/>
+                                          </p:stCondLst>
+                                        </p:cTn>
+                                        <p:tgtEl>
+                                          <p:spTgt spid="3"/>
+                                        </p:tgtEl>
+                                        <p:attrNameLst>
+                                          <p:attrName>style.visibility</p:attrName>
+                                        </p:attrNameLst>
+                                      </p:cBhvr>
+                                      <p:to>
+                                        <p:strVal val="visible"/>
+                                      </p:to>
+                                    </p:set>
+                                    <p:animEffect transition="in" filter="fade">
+                                      <p:cBhvr>
+                                        <p:cTn id="6" dur="500"/>
+                                        <p:tgtEl>
+                                          <p:spTgt spid="3"/>
+                                        </p:tgtEl>
+                                      </p:cBhvr>
+                                    </p:animEffect>
+                                  </p:childTnLst>
+                                </p:cTn>
+                              </p:par>
+                              <p:par>
+                                <p:cTn id="7" presetID="10" presetClass="entr" presetSubtype="0" fill="hold" grpId="0" nodeType="withEffect">
+                                  <p:stCondLst>
+                                    <p:cond delay="0"/>
+                                  </p:stCondLst>
+                                  <p:childTnLst>
+                                    <p:set>
+                                      <p:cBhvr>
+                                        <p:cTn id="107" dur="1" fill="hold">
+                                          <p:stCondLst>
+                                            <p:cond delay="0"/>
+                                          </p:stCondLst>
+                                        </p:cTn>
+                                        <p:tgtEl>
+                                          <p:spTgt spid="16"/>
+                                        </p:tgtEl>
+                                        <p:attrNameLst>
+                                          <p:attrName>style.visibility</p:attrName>
+                                        </p:attrNameLst>
+                                      </p:cBhvr>
+                                      <p:to>
+                                        <p:strVal val="visible"/>
+                                      </p:to>
+                                    </p:set>
+                                    <p:animEffect transition="in" filter="fade">
+                                      <p:cBhvr>
+                                        <p:cTn id="8" dur="500"/>
+                                        <p:tgtEl>
+                                          <p:spTgt spid="16"/>
+                                        </p:tgtEl>
+                                      </p:cBhvr>
+                                    </p:animEffect>
+                                  </p:childTnLst>
+                                </p:cTn>
+                              </p:par>
+                              <p:par>
+                                <p:cTn id="9" presetID="10" presetClass="entr" presetSubtype="0" fill="hold" grpId="0" nodeType="withEffect">
+                                  <p:stCondLst>
+                                    <p:cond delay="0"/>
+                                  </p:stCondLst>
+                                  <p:childTnLst>
+                                    <p:set>
+                                      <p:cBhvr>
+                                        <p:cTn id="109" dur="1" fill="hold">
+                                          <p:stCondLst>
+                                            <p:cond delay="0"/>
+                                          </p:stCondLst>
+                                        </p:cTn>
+                                        <p:tgtEl>
+                                          <p:spTgt spid="17"/>
+                                        </p:tgtEl>
+                                        <p:attrNameLst>
+                                          <p:attrName>style.visibility</p:attrName>
+                                        </p:attrNameLst>
+                                      </p:cBhvr>
+                                      <p:to>
+                                        <p:strVal val="visible"/>
+                                      </p:to>
+                                    </p:set>
+                                    <p:animEffect transition="in" filter="fade">
+                                      <p:cBhvr>
+                                        <p:cTn id="10" dur="500"/>
+                                        <p:tgtEl>
+                                          <p:spTgt spid="17"/>
+                                        </p:tgtEl>
+                                      </p:cBhvr>
+                                    </p:animEffect>
+                                  </p:childTnLst>
+                                </p:cTn>
+                              </p:par>
+                              <p:par>
+                                <p:cTn id="11" presetID="10" presetClass="entr" presetSubtype="0" fill="hold" grpId="0" nodeType="withEffect">
+                                  <p:stCondLst>
+                                    <p:cond delay="0"/>
+                                  </p:stCondLst>
+                                  <p:childTnLst>
+                                    <p:set>
+                                      <p:cBhvr>
+                                        <p:cTn id="111" dur="1" fill="hold">
+                                          <p:stCondLst>
+                                            <p:cond delay="0"/>
+                                          </p:stCondLst>
+                                        </p:cTn>
+                                        <p:tgtEl>
+                                          <p:spTgt spid="18"/>
+                                        </p:tgtEl>
+                                        <p:attrNameLst>
+                                          <p:attrName>style.visibility</p:attrName>
+                                        </p:attrNameLst>
+                                      </p:cBhvr>
+                                      <p:to>
+                                        <p:strVal val="visible"/>
+                                      </p:to>
+                                    </p:set>
+                                    <p:animEffect transition="in" filter="fade">
+                                      <p:cBhvr>
+                                        <p:cTn id="12" dur="500"/>
+                                        <p:tgtEl>
+                                          <p:spTgt spid="18"/>
+                                        </p:tgtEl>
+                                      </p:cBhvr>
+                                    </p:animEffect>
+                                  </p:childTnLst>
+                                </p:cTn>
+                              </p:par>
+                            </p:childTnLst>
+                          </p:cTn>
+                        </p:par>
+                      </p:childTnLst>
+                    </p:cTn>
+                  </p:par>
+                </p:childTnLst>
+              </p:cTn>
+              <p:prevCondLst>
+                <p:cond evt="onPrev" delay="0">
+                  <p:tgtEl>
+                    <p:sldTgt/>
+                  </p:tgtEl>
+                </p:cond>
+              </p:prevCondLst>
+              <p:nextCondLst>
+                <p:cond evt="onNext" delay="0">
+                  <p:tgtEl>
+                    <p:sldTgt/>
+                  </p:tgtEl>
+                </p:cond>
+              </p:nextCondLst>
+            </p:seq>
+          </p:childTnLst>
+        </p:cTn>
+      </p:par>
+    </p:tnLst>
+    <p:bldLst>
+      <p:bldP spid="3" grpId="0" animBg="1"/>
+      <p:bldP spid="16" grpId="0" animBg="1"/>
+      <p:bldP spid="17" grpId="0" animBg="1"/>
+      <p:bldP spid="18" grpId="0" animBg="1"/>
+    </p:bldLst>
+  </p:timing>
 </p:sld>
 </file>
 
@@ -18230,12 +18618,12 @@
                     <a:p>
                       <a:pPr indent="0" marL="0">
                         <a:lnSpc>
-                          <a:spcPts val="1475"/>
+                          <a:spcPts val="1386"/>
                         </a:lnSpc>
                         <a:buNone/>
                       </a:pPr>
                       <a:r>
-                        <a:rPr lang="en-US" sz="1054" b="1" dirty="0">
+                        <a:rPr lang="en-US" sz="1000" b="1" dirty="0">
                           <a:solidFill>
                             <a:srgbClr val="F6F4EF"/>
                           </a:solidFill>
@@ -18245,7 +18633,7 @@
                         </a:rPr>
                         <a:t>Pair 1</a:t>
                       </a:r>
-                      <a:endParaRPr lang="en-US" sz="1054" dirty="0">
+                      <a:endParaRPr lang="en-US" sz="1000" dirty="0">
                         <a:latin typeface="Tahoma" charset="0"/>
                         <a:ea typeface="Tahoma" charset="0"/>
                         <a:cs typeface="Tahoma" charset="0"/>
@@ -18289,12 +18677,12 @@
                     <a:p>
                       <a:pPr algn="ctr" indent="0" marL="0">
                         <a:lnSpc>
-                          <a:spcPts val="1475"/>
+                          <a:spcPts val="1386"/>
                         </a:lnSpc>
                         <a:buNone/>
                       </a:pPr>
                       <a:r>
-                        <a:rPr lang="en-US" sz="1054" b="1" dirty="0">
+                        <a:rPr lang="en-US" sz="1000" b="1" dirty="0">
                           <a:solidFill>
                             <a:srgbClr val="F6F4EF"/>
                           </a:solidFill>
@@ -18304,7 +18692,7 @@
                         </a:rPr>
                         <a:t>Mean</a:t>
                       </a:r>
-                      <a:endParaRPr lang="en-US" sz="1054" dirty="0">
+                      <a:endParaRPr lang="en-US" sz="1000" dirty="0">
                         <a:latin typeface="Tahoma" charset="0"/>
                         <a:ea typeface="Tahoma" charset="0"/>
                         <a:cs typeface="Tahoma" charset="0"/>
@@ -18354,12 +18742,12 @@
                     <a:p>
                       <a:pPr algn="ctr" indent="0" marL="0">
                         <a:lnSpc>
-                          <a:spcPts val="1475"/>
+                          <a:spcPts val="1386"/>
                         </a:lnSpc>
                         <a:buNone/>
                       </a:pPr>
                       <a:r>
-                        <a:rPr lang="en-US" sz="1054" b="1" dirty="0">
+                        <a:rPr lang="en-US" sz="1000" b="1" dirty="0">
                           <a:solidFill>
                             <a:srgbClr val="F6F4EF"/>
                           </a:solidFill>
@@ -18369,7 +18757,7 @@
                         </a:rPr>
                         <a:t>N</a:t>
                       </a:r>
-                      <a:endParaRPr lang="en-US" sz="1054" dirty="0">
+                      <a:endParaRPr lang="en-US" sz="1000" dirty="0">
                         <a:latin typeface="Tahoma" charset="0"/>
                         <a:ea typeface="Tahoma" charset="0"/>
                         <a:cs typeface="Tahoma" charset="0"/>
@@ -18419,12 +18807,12 @@
                     <a:p>
                       <a:pPr algn="ctr" indent="0" marL="0">
                         <a:lnSpc>
-                          <a:spcPts val="1475"/>
+                          <a:spcPts val="1386"/>
                         </a:lnSpc>
                         <a:buNone/>
                       </a:pPr>
                       <a:r>
-                        <a:rPr lang="en-US" sz="1054" b="1" dirty="0">
+                        <a:rPr lang="en-US" sz="1000" b="1" dirty="0">
                           <a:solidFill>
                             <a:srgbClr val="F6F4EF"/>
                           </a:solidFill>
@@ -18434,7 +18822,7 @@
                         </a:rPr>
                         <a:t>Std. Deviation</a:t>
                       </a:r>
-                      <a:endParaRPr lang="en-US" sz="1054" dirty="0">
+                      <a:endParaRPr lang="en-US" sz="1000" dirty="0">
                         <a:latin typeface="Tahoma" charset="0"/>
                         <a:ea typeface="Tahoma" charset="0"/>
                         <a:cs typeface="Tahoma" charset="0"/>
@@ -18484,12 +18872,12 @@
                     <a:p>
                       <a:pPr algn="ctr" indent="0" marL="0">
                         <a:lnSpc>
-                          <a:spcPts val="1475"/>
+                          <a:spcPts val="1386"/>
                         </a:lnSpc>
                         <a:buNone/>
                       </a:pPr>
                       <a:r>
-                        <a:rPr lang="en-US" sz="1054" b="1" dirty="0">
+                        <a:rPr lang="en-US" sz="1000" b="1" dirty="0">
                           <a:solidFill>
                             <a:srgbClr val="F6F4EF"/>
                           </a:solidFill>
@@ -18499,7 +18887,7 @@
                         </a:rPr>
                         <a:t>Std. Error Mean</a:t>
                       </a:r>
-                      <a:endParaRPr lang="en-US" sz="1054" dirty="0">
+                      <a:endParaRPr lang="en-US" sz="1000" dirty="0">
                         <a:latin typeface="Tahoma" charset="0"/>
                         <a:ea typeface="Tahoma" charset="0"/>
                         <a:cs typeface="Tahoma" charset="0"/>
@@ -18551,12 +18939,12 @@
                     <a:p>
                       <a:pPr indent="0" marL="0">
                         <a:lnSpc>
-                          <a:spcPts val="1475"/>
+                          <a:spcPts val="1386"/>
                         </a:lnSpc>
                         <a:buNone/>
                       </a:pPr>
                       <a:r>
-                        <a:rPr lang="en-US" sz="1054" dirty="0">
+                        <a:rPr lang="en-US" sz="1000" dirty="0">
                           <a:solidFill>
                             <a:srgbClr val="14233A"/>
                           </a:solidFill>
@@ -18566,7 +18954,7 @@
                         </a:rPr>
                         <a:t>before</a:t>
                       </a:r>
-                      <a:endParaRPr lang="en-US" sz="1054" dirty="0">
+                      <a:endParaRPr lang="en-US" sz="1000" dirty="0">
                         <a:latin typeface="Tahoma" charset="0"/>
                         <a:ea typeface="Tahoma" charset="0"/>
                         <a:cs typeface="Tahoma" charset="0"/>
@@ -18616,12 +19004,12 @@
                     <a:p>
                       <a:pPr algn="ctr" indent="0" marL="0">
                         <a:lnSpc>
-                          <a:spcPts val="1475"/>
+                          <a:spcPts val="1386"/>
                         </a:lnSpc>
                         <a:buNone/>
                       </a:pPr>
                       <a:r>
-                        <a:rPr lang="en-US" sz="1054" dirty="0">
+                        <a:rPr lang="en-US" sz="1000" dirty="0">
                           <a:solidFill>
                             <a:srgbClr val="14233A"/>
                           </a:solidFill>
@@ -18631,7 +19019,7 @@
                         </a:rPr>
                         <a:t>20.17</a:t>
                       </a:r>
-                      <a:endParaRPr lang="en-US" sz="1054" dirty="0">
+                      <a:endParaRPr lang="en-US" sz="1000" dirty="0">
                         <a:latin typeface="Tahoma" charset="0"/>
                         <a:ea typeface="Tahoma" charset="0"/>
                         <a:cs typeface="Tahoma" charset="0"/>
@@ -18687,12 +19075,12 @@
                     <a:p>
                       <a:pPr algn="ctr" indent="0" marL="0">
                         <a:lnSpc>
-                          <a:spcPts val="1475"/>
+                          <a:spcPts val="1386"/>
                         </a:lnSpc>
                         <a:buNone/>
                       </a:pPr>
                       <a:r>
-                        <a:rPr lang="en-US" sz="1054" dirty="0">
+                        <a:rPr lang="en-US" sz="1000" dirty="0">
                           <a:solidFill>
                             <a:srgbClr val="14233A"/>
                           </a:solidFill>
@@ -18702,7 +19090,7 @@
                         </a:rPr>
                         <a:t>6</a:t>
                       </a:r>
-                      <a:endParaRPr lang="en-US" sz="1054" dirty="0">
+                      <a:endParaRPr lang="en-US" sz="1000" dirty="0">
                         <a:latin typeface="Tahoma" charset="0"/>
                         <a:ea typeface="Tahoma" charset="0"/>
                         <a:cs typeface="Tahoma" charset="0"/>
@@ -18758,12 +19146,12 @@
                     <a:p>
                       <a:pPr algn="ctr" indent="0" marL="0">
                         <a:lnSpc>
-                          <a:spcPts val="1475"/>
+                          <a:spcPts val="1386"/>
                         </a:lnSpc>
                         <a:buNone/>
                       </a:pPr>
                       <a:r>
-                        <a:rPr lang="en-US" sz="1054" dirty="0">
+                        <a:rPr lang="en-US" sz="1000" dirty="0">
                           <a:solidFill>
                             <a:srgbClr val="14233A"/>
                           </a:solidFill>
@@ -18773,7 +19161,7 @@
                         </a:rPr>
                         <a:t>4.070</a:t>
                       </a:r>
-                      <a:endParaRPr lang="en-US" sz="1054" dirty="0">
+                      <a:endParaRPr lang="en-US" sz="1000" dirty="0">
                         <a:latin typeface="Tahoma" charset="0"/>
                         <a:ea typeface="Tahoma" charset="0"/>
                         <a:cs typeface="Tahoma" charset="0"/>
@@ -18829,12 +19217,12 @@
                     <a:p>
                       <a:pPr algn="ctr" indent="0" marL="0">
                         <a:lnSpc>
-                          <a:spcPts val="1475"/>
+                          <a:spcPts val="1386"/>
                         </a:lnSpc>
                         <a:buNone/>
                       </a:pPr>
                       <a:r>
-                        <a:rPr lang="en-US" sz="1054" dirty="0">
+                        <a:rPr lang="en-US" sz="1000" dirty="0">
                           <a:solidFill>
                             <a:srgbClr val="14233A"/>
                           </a:solidFill>
@@ -18844,7 +19232,7 @@
                         </a:rPr>
                         <a:t>1.662</a:t>
                       </a:r>
-                      <a:endParaRPr lang="en-US" sz="1054" dirty="0">
+                      <a:endParaRPr lang="en-US" sz="1000" dirty="0">
                         <a:latin typeface="Tahoma" charset="0"/>
                         <a:ea typeface="Tahoma" charset="0"/>
                         <a:cs typeface="Tahoma" charset="0"/>
@@ -18902,12 +19290,12 @@
                     <a:p>
                       <a:pPr indent="0" marL="0">
                         <a:lnSpc>
-                          <a:spcPts val="1475"/>
+                          <a:spcPts val="1386"/>
                         </a:lnSpc>
                         <a:buNone/>
                       </a:pPr>
                       <a:r>
-                        <a:rPr lang="en-US" sz="1054" dirty="0">
+                        <a:rPr lang="en-US" sz="1000" dirty="0">
                           <a:solidFill>
                             <a:srgbClr val="14233A"/>
                           </a:solidFill>
@@ -18917,7 +19305,7 @@
                         </a:rPr>
                         <a:t>after</a:t>
                       </a:r>
-                      <a:endParaRPr lang="en-US" sz="1054" dirty="0">
+                      <a:endParaRPr lang="en-US" sz="1000" dirty="0">
                         <a:latin typeface="Tahoma" charset="0"/>
                         <a:ea typeface="Tahoma" charset="0"/>
                         <a:cs typeface="Tahoma" charset="0"/>
@@ -18967,12 +19355,12 @@
                     <a:p>
                       <a:pPr algn="ctr" indent="0" marL="0">
                         <a:lnSpc>
-                          <a:spcPts val="1475"/>
+                          <a:spcPts val="1386"/>
                         </a:lnSpc>
                         <a:buNone/>
                       </a:pPr>
                       <a:r>
-                        <a:rPr lang="en-US" sz="1054" dirty="0">
+                        <a:rPr lang="en-US" sz="1000" dirty="0">
                           <a:solidFill>
                             <a:srgbClr val="14233A"/>
                           </a:solidFill>
@@ -18982,7 +19370,7 @@
                         </a:rPr>
                         <a:t>18.67</a:t>
                       </a:r>
-                      <a:endParaRPr lang="en-US" sz="1054" dirty="0">
+                      <a:endParaRPr lang="en-US" sz="1000" dirty="0">
                         <a:latin typeface="Tahoma" charset="0"/>
                         <a:ea typeface="Tahoma" charset="0"/>
                         <a:cs typeface="Tahoma" charset="0"/>
@@ -19038,12 +19426,12 @@
                     <a:p>
                       <a:pPr algn="ctr" indent="0" marL="0">
                         <a:lnSpc>
-                          <a:spcPts val="1475"/>
+                          <a:spcPts val="1386"/>
                         </a:lnSpc>
                         <a:buNone/>
                       </a:pPr>
                       <a:r>
-                        <a:rPr lang="en-US" sz="1054" dirty="0">
+                        <a:rPr lang="en-US" sz="1000" dirty="0">
                           <a:solidFill>
                             <a:srgbClr val="14233A"/>
                           </a:solidFill>
@@ -19053,7 +19441,7 @@
                         </a:rPr>
                         <a:t>6</a:t>
                       </a:r>
-                      <a:endParaRPr lang="en-US" sz="1054" dirty="0">
+                      <a:endParaRPr lang="en-US" sz="1000" dirty="0">
                         <a:latin typeface="Tahoma" charset="0"/>
                         <a:ea typeface="Tahoma" charset="0"/>
                         <a:cs typeface="Tahoma" charset="0"/>
@@ -19109,12 +19497,12 @@
                     <a:p>
                       <a:pPr algn="ctr" indent="0" marL="0">
                         <a:lnSpc>
-                          <a:spcPts val="1475"/>
+                          <a:spcPts val="1386"/>
                         </a:lnSpc>
                         <a:buNone/>
                       </a:pPr>
                       <a:r>
-                        <a:rPr lang="en-US" sz="1054" dirty="0">
+                        <a:rPr lang="en-US" sz="1000" dirty="0">
                           <a:solidFill>
                             <a:srgbClr val="14233A"/>
                           </a:solidFill>
@@ -19124,7 +19512,7 @@
                         </a:rPr>
                         <a:t>4.719</a:t>
                       </a:r>
-                      <a:endParaRPr lang="en-US" sz="1054" dirty="0">
+                      <a:endParaRPr lang="en-US" sz="1000" dirty="0">
                         <a:latin typeface="Tahoma" charset="0"/>
                         <a:ea typeface="Tahoma" charset="0"/>
                         <a:cs typeface="Tahoma" charset="0"/>
@@ -19180,12 +19568,12 @@
                     <a:p>
                       <a:pPr algn="ctr" indent="0" marL="0">
                         <a:lnSpc>
-                          <a:spcPts val="1475"/>
+                          <a:spcPts val="1386"/>
                         </a:lnSpc>
                         <a:buNone/>
                       </a:pPr>
                       <a:r>
-                        <a:rPr lang="en-US" sz="1054" dirty="0">
+                        <a:rPr lang="en-US" sz="1000" dirty="0">
                           <a:solidFill>
                             <a:srgbClr val="14233A"/>
                           </a:solidFill>
@@ -19195,7 +19583,7 @@
                         </a:rPr>
                         <a:t>1.926</a:t>
                       </a:r>
-                      <a:endParaRPr lang="en-US" sz="1054" dirty="0">
+                      <a:endParaRPr lang="en-US" sz="1000" dirty="0">
                         <a:latin typeface="Tahoma" charset="0"/>
                         <a:ea typeface="Tahoma" charset="0"/>
                         <a:cs typeface="Tahoma" charset="0"/>
@@ -19459,12 +19847,12 @@
                     <a:p>
                       <a:pPr indent="0" marL="0">
                         <a:lnSpc>
-                          <a:spcPts val="1480"/>
+                          <a:spcPts val="1391"/>
                         </a:lnSpc>
                         <a:buNone/>
                       </a:pPr>
                       <a:r>
-                        <a:rPr lang="en-US" sz="1058" b="1" dirty="0">
+                        <a:rPr lang="en-US" sz="1000" b="1" dirty="0">
                           <a:solidFill>
                             <a:srgbClr val="F6F4EF"/>
                           </a:solidFill>
@@ -19474,7 +19862,7 @@
                         </a:rPr>
                         <a:t>Pair 1</a:t>
                       </a:r>
-                      <a:endParaRPr lang="en-US" sz="1058" dirty="0">
+                      <a:endParaRPr lang="en-US" sz="1000" dirty="0">
                         <a:latin typeface="Tahoma" charset="0"/>
                         <a:ea typeface="Tahoma" charset="0"/>
                         <a:cs typeface="Tahoma" charset="0"/>
@@ -19518,12 +19906,12 @@
                     <a:p>
                       <a:pPr algn="ctr" indent="0" marL="0">
                         <a:lnSpc>
-                          <a:spcPts val="1480"/>
+                          <a:spcPts val="1391"/>
                         </a:lnSpc>
                         <a:buNone/>
                       </a:pPr>
                       <a:r>
-                        <a:rPr lang="en-US" sz="1058" b="1" dirty="0">
+                        <a:rPr lang="en-US" sz="1000" b="1" dirty="0">
                           <a:solidFill>
                             <a:srgbClr val="F6F4EF"/>
                           </a:solidFill>
@@ -19533,7 +19921,7 @@
                         </a:rPr>
                         <a:t>Mean</a:t>
                       </a:r>
-                      <a:endParaRPr lang="en-US" sz="1058" dirty="0">
+                      <a:endParaRPr lang="en-US" sz="1000" dirty="0">
                         <a:latin typeface="Tahoma" charset="0"/>
                         <a:ea typeface="Tahoma" charset="0"/>
                         <a:cs typeface="Tahoma" charset="0"/>
@@ -19583,12 +19971,12 @@
                     <a:p>
                       <a:pPr algn="ctr" indent="0" marL="0">
                         <a:lnSpc>
-                          <a:spcPts val="1480"/>
+                          <a:spcPts val="1391"/>
                         </a:lnSpc>
                         <a:buNone/>
                       </a:pPr>
                       <a:r>
-                        <a:rPr lang="en-US" sz="1058" b="1" dirty="0">
+                        <a:rPr lang="en-US" sz="1000" b="1" dirty="0">
                           <a:solidFill>
                             <a:srgbClr val="F6F4EF"/>
                           </a:solidFill>
@@ -19598,7 +19986,7 @@
                         </a:rPr>
                         <a:t>Std. Deviation</a:t>
                       </a:r>
-                      <a:endParaRPr lang="en-US" sz="1058" dirty="0">
+                      <a:endParaRPr lang="en-US" sz="1000" dirty="0">
                         <a:latin typeface="Tahoma" charset="0"/>
                         <a:ea typeface="Tahoma" charset="0"/>
                         <a:cs typeface="Tahoma" charset="0"/>
@@ -19648,12 +20036,12 @@
                     <a:p>
                       <a:pPr algn="ctr" indent="0" marL="0">
                         <a:lnSpc>
-                          <a:spcPts val="1480"/>
+                          <a:spcPts val="1391"/>
                         </a:lnSpc>
                         <a:buNone/>
                       </a:pPr>
                       <a:r>
-                        <a:rPr lang="en-US" sz="1058" b="1" dirty="0">
+                        <a:rPr lang="en-US" sz="1000" b="1" dirty="0">
                           <a:solidFill>
                             <a:srgbClr val="F6F4EF"/>
                           </a:solidFill>
@@ -19663,7 +20051,7 @@
                         </a:rPr>
                         <a:t>Std. Error Mean</a:t>
                       </a:r>
-                      <a:endParaRPr lang="en-US" sz="1058" dirty="0">
+                      <a:endParaRPr lang="en-US" sz="1000" dirty="0">
                         <a:latin typeface="Tahoma" charset="0"/>
                         <a:ea typeface="Tahoma" charset="0"/>
                         <a:cs typeface="Tahoma" charset="0"/>
@@ -19713,12 +20101,12 @@
                     <a:p>
                       <a:pPr algn="ctr" indent="0" marL="0">
                         <a:lnSpc>
-                          <a:spcPts val="1480"/>
+                          <a:spcPts val="1391"/>
                         </a:lnSpc>
                         <a:buNone/>
                       </a:pPr>
                       <a:r>
-                        <a:rPr lang="en-US" sz="1058" b="1" dirty="0">
+                        <a:rPr lang="en-US" sz="1000" b="1" dirty="0">
                           <a:solidFill>
                             <a:srgbClr val="F6F4EF"/>
                           </a:solidFill>
@@ -19728,7 +20116,7 @@
                         </a:rPr>
                         <a:t>95% CI Lower</a:t>
                       </a:r>
-                      <a:endParaRPr lang="en-US" sz="1058" dirty="0">
+                      <a:endParaRPr lang="en-US" sz="1000" dirty="0">
                         <a:latin typeface="Tahoma" charset="0"/>
                         <a:ea typeface="Tahoma" charset="0"/>
                         <a:cs typeface="Tahoma" charset="0"/>
@@ -19778,12 +20166,12 @@
                     <a:p>
                       <a:pPr algn="ctr" indent="0" marL="0">
                         <a:lnSpc>
-                          <a:spcPts val="1480"/>
+                          <a:spcPts val="1391"/>
                         </a:lnSpc>
                         <a:buNone/>
                       </a:pPr>
                       <a:r>
-                        <a:rPr lang="en-US" sz="1058" b="1" dirty="0">
+                        <a:rPr lang="en-US" sz="1000" b="1" dirty="0">
                           <a:solidFill>
                             <a:srgbClr val="F6F4EF"/>
                           </a:solidFill>
@@ -19793,7 +20181,7 @@
                         </a:rPr>
                         <a:t>95% CI Upper</a:t>
                       </a:r>
-                      <a:endParaRPr lang="en-US" sz="1058" dirty="0">
+                      <a:endParaRPr lang="en-US" sz="1000" dirty="0">
                         <a:latin typeface="Tahoma" charset="0"/>
                         <a:ea typeface="Tahoma" charset="0"/>
                         <a:cs typeface="Tahoma" charset="0"/>
@@ -19843,12 +20231,12 @@
                     <a:p>
                       <a:pPr algn="ctr" indent="0" marL="0">
                         <a:lnSpc>
-                          <a:spcPts val="1480"/>
+                          <a:spcPts val="1391"/>
                         </a:lnSpc>
                         <a:buNone/>
                       </a:pPr>
                       <a:r>
-                        <a:rPr lang="en-US" sz="1058" b="1" dirty="0">
+                        <a:rPr lang="en-US" sz="1000" b="1" dirty="0">
                           <a:solidFill>
                             <a:srgbClr val="F6F4EF"/>
                           </a:solidFill>
@@ -19858,7 +20246,7 @@
                         </a:rPr>
                         <a:t>t</a:t>
                       </a:r>
-                      <a:endParaRPr lang="en-US" sz="1058" dirty="0">
+                      <a:endParaRPr lang="en-US" sz="1000" dirty="0">
                         <a:latin typeface="Tahoma" charset="0"/>
                         <a:ea typeface="Tahoma" charset="0"/>
                         <a:cs typeface="Tahoma" charset="0"/>
@@ -19908,12 +20296,12 @@
                     <a:p>
                       <a:pPr algn="ctr" indent="0" marL="0">
                         <a:lnSpc>
-                          <a:spcPts val="1480"/>
+                          <a:spcPts val="1391"/>
                         </a:lnSpc>
                         <a:buNone/>
                       </a:pPr>
                       <a:r>
-                        <a:rPr lang="en-US" sz="1058" b="1" dirty="0">
+                        <a:rPr lang="en-US" sz="1000" b="1" dirty="0">
                           <a:solidFill>
                             <a:srgbClr val="F6F4EF"/>
                           </a:solidFill>
@@ -19923,7 +20311,7 @@
                         </a:rPr>
                         <a:t>df</a:t>
                       </a:r>
-                      <a:endParaRPr lang="en-US" sz="1058" dirty="0">
+                      <a:endParaRPr lang="en-US" sz="1000" dirty="0">
                         <a:latin typeface="Tahoma" charset="0"/>
                         <a:ea typeface="Tahoma" charset="0"/>
                         <a:cs typeface="Tahoma" charset="0"/>
@@ -19973,12 +20361,12 @@
                     <a:p>
                       <a:pPr algn="ctr" indent="0" marL="0">
                         <a:lnSpc>
-                          <a:spcPts val="1480"/>
+                          <a:spcPts val="1391"/>
                         </a:lnSpc>
                         <a:buNone/>
                       </a:pPr>
                       <a:r>
-                        <a:rPr lang="en-US" sz="1058" b="1" dirty="0">
+                        <a:rPr lang="en-US" sz="1000" b="1" dirty="0">
                           <a:solidFill>
                             <a:srgbClr val="F6F4EF"/>
                           </a:solidFill>
@@ -19988,7 +20376,7 @@
                         </a:rPr>
                         <a:t>Sig. (2-tailed)</a:t>
                       </a:r>
-                      <a:endParaRPr lang="en-US" sz="1058" dirty="0">
+                      <a:endParaRPr lang="en-US" sz="1000" dirty="0">
                         <a:latin typeface="Tahoma" charset="0"/>
                         <a:ea typeface="Tahoma" charset="0"/>
                         <a:cs typeface="Tahoma" charset="0"/>
@@ -20040,12 +20428,12 @@
                     <a:p>
                       <a:pPr indent="0" marL="0">
                         <a:lnSpc>
-                          <a:spcPts val="1480"/>
+                          <a:spcPts val="1391"/>
                         </a:lnSpc>
                         <a:buNone/>
                       </a:pPr>
                       <a:r>
-                        <a:rPr lang="en-US" sz="1058" dirty="0">
+                        <a:rPr lang="en-US" sz="1000" dirty="0">
                           <a:solidFill>
                             <a:srgbClr val="14233A"/>
                           </a:solidFill>
@@ -20055,7 +20443,7 @@
                         </a:rPr>
                         <a:t>before - after</a:t>
                       </a:r>
-                      <a:endParaRPr lang="en-US" sz="1058" dirty="0">
+                      <a:endParaRPr lang="en-US" sz="1000" dirty="0">
                         <a:latin typeface="Tahoma" charset="0"/>
                         <a:ea typeface="Tahoma" charset="0"/>
                         <a:cs typeface="Tahoma" charset="0"/>
@@ -20105,12 +20493,12 @@
                     <a:p>
                       <a:pPr algn="ctr" indent="0" marL="0">
                         <a:lnSpc>
-                          <a:spcPts val="1480"/>
+                          <a:spcPts val="1391"/>
                         </a:lnSpc>
                         <a:buNone/>
                       </a:pPr>
                       <a:r>
-                        <a:rPr lang="en-US" sz="1058" dirty="0">
+                        <a:rPr lang="en-US" sz="1000" dirty="0">
                           <a:solidFill>
                             <a:srgbClr val="14233A"/>
                           </a:solidFill>
@@ -20120,7 +20508,7 @@
                         </a:rPr>
                         <a:t>1.500</a:t>
                       </a:r>
-                      <a:endParaRPr lang="en-US" sz="1058" dirty="0">
+                      <a:endParaRPr lang="en-US" sz="1000" dirty="0">
                         <a:latin typeface="Tahoma" charset="0"/>
                         <a:ea typeface="Tahoma" charset="0"/>
                         <a:cs typeface="Tahoma" charset="0"/>
@@ -20176,12 +20564,12 @@
                     <a:p>
                       <a:pPr algn="ctr" indent="0" marL="0">
                         <a:lnSpc>
-                          <a:spcPts val="1480"/>
+                          <a:spcPts val="1391"/>
                         </a:lnSpc>
                         <a:buNone/>
                       </a:pPr>
                       <a:r>
-                        <a:rPr lang="en-US" sz="1058" dirty="0">
+                        <a:rPr lang="en-US" sz="1000" dirty="0">
                           <a:solidFill>
                             <a:srgbClr val="14233A"/>
                           </a:solidFill>
@@ -20191,7 +20579,7 @@
                         </a:rPr>
                         <a:t>2.345</a:t>
                       </a:r>
-                      <a:endParaRPr lang="en-US" sz="1058" dirty="0">
+                      <a:endParaRPr lang="en-US" sz="1000" dirty="0">
                         <a:latin typeface="Tahoma" charset="0"/>
                         <a:ea typeface="Tahoma" charset="0"/>
                         <a:cs typeface="Tahoma" charset="0"/>
@@ -20247,12 +20635,12 @@
                     <a:p>
                       <a:pPr algn="ctr" indent="0" marL="0">
                         <a:lnSpc>
-                          <a:spcPts val="1480"/>
+                          <a:spcPts val="1391"/>
                         </a:lnSpc>
                         <a:buNone/>
                       </a:pPr>
                       <a:r>
-                        <a:rPr lang="en-US" sz="1058" dirty="0">
+                        <a:rPr lang="en-US" sz="1000" dirty="0">
                           <a:solidFill>
                             <a:srgbClr val="14233A"/>
                           </a:solidFill>
@@ -20262,7 +20650,7 @@
                         </a:rPr>
                         <a:t>.957</a:t>
                       </a:r>
-                      <a:endParaRPr lang="en-US" sz="1058" dirty="0">
+                      <a:endParaRPr lang="en-US" sz="1000" dirty="0">
                         <a:latin typeface="Tahoma" charset="0"/>
                         <a:ea typeface="Tahoma" charset="0"/>
                         <a:cs typeface="Tahoma" charset="0"/>
@@ -20318,12 +20706,12 @@
                     <a:p>
                       <a:pPr algn="ctr" indent="0" marL="0">
                         <a:lnSpc>
-                          <a:spcPts val="1480"/>
+                          <a:spcPts val="1391"/>
                         </a:lnSpc>
                         <a:buNone/>
                       </a:pPr>
                       <a:r>
-                        <a:rPr lang="en-US" sz="1058" dirty="0">
+                        <a:rPr lang="en-US" sz="1000" dirty="0">
                           <a:solidFill>
                             <a:srgbClr val="14233A"/>
                           </a:solidFill>
@@ -20333,7 +20721,7 @@
                         </a:rPr>
                         <a:t>-.961</a:t>
                       </a:r>
-                      <a:endParaRPr lang="en-US" sz="1058" dirty="0">
+                      <a:endParaRPr lang="en-US" sz="1000" dirty="0">
                         <a:latin typeface="Tahoma" charset="0"/>
                         <a:ea typeface="Tahoma" charset="0"/>
                         <a:cs typeface="Tahoma" charset="0"/>
@@ -20389,12 +20777,12 @@
                     <a:p>
                       <a:pPr algn="ctr" indent="0" marL="0">
                         <a:lnSpc>
-                          <a:spcPts val="1480"/>
+                          <a:spcPts val="1391"/>
                         </a:lnSpc>
                         <a:buNone/>
                       </a:pPr>
                       <a:r>
-                        <a:rPr lang="en-US" sz="1058" dirty="0">
+                        <a:rPr lang="en-US" sz="1000" dirty="0">
                           <a:solidFill>
                             <a:srgbClr val="14233A"/>
                           </a:solidFill>
@@ -20404,7 +20792,7 @@
                         </a:rPr>
                         <a:t>3.961</a:t>
                       </a:r>
-                      <a:endParaRPr lang="en-US" sz="1058" dirty="0">
+                      <a:endParaRPr lang="en-US" sz="1000" dirty="0">
                         <a:latin typeface="Tahoma" charset="0"/>
                         <a:ea typeface="Tahoma" charset="0"/>
                         <a:cs typeface="Tahoma" charset="0"/>
@@ -20460,12 +20848,12 @@
                     <a:p>
                       <a:pPr algn="ctr" indent="0" marL="0">
                         <a:lnSpc>
-                          <a:spcPts val="1480"/>
+                          <a:spcPts val="1391"/>
                         </a:lnSpc>
                         <a:buNone/>
                       </a:pPr>
                       <a:r>
-                        <a:rPr lang="en-US" sz="1058" dirty="0">
+                        <a:rPr lang="en-US" sz="1000" dirty="0">
                           <a:solidFill>
                             <a:srgbClr val="14233A"/>
                           </a:solidFill>
@@ -20475,7 +20863,7 @@
                         </a:rPr>
                         <a:t>1.567</a:t>
                       </a:r>
-                      <a:endParaRPr lang="en-US" sz="1058" dirty="0">
+                      <a:endParaRPr lang="en-US" sz="1000" dirty="0">
                         <a:latin typeface="Tahoma" charset="0"/>
                         <a:ea typeface="Tahoma" charset="0"/>
                         <a:cs typeface="Tahoma" charset="0"/>
@@ -20531,12 +20919,12 @@
                     <a:p>
                       <a:pPr algn="ctr" indent="0" marL="0">
                         <a:lnSpc>
-                          <a:spcPts val="1480"/>
+                          <a:spcPts val="1391"/>
                         </a:lnSpc>
                         <a:buNone/>
                       </a:pPr>
                       <a:r>
-                        <a:rPr lang="en-US" sz="1058" dirty="0">
+                        <a:rPr lang="en-US" sz="1000" dirty="0">
                           <a:solidFill>
                             <a:srgbClr val="14233A"/>
                           </a:solidFill>
@@ -20546,7 +20934,7 @@
                         </a:rPr>
                         <a:t>5</a:t>
                       </a:r>
-                      <a:endParaRPr lang="en-US" sz="1058" dirty="0">
+                      <a:endParaRPr lang="en-US" sz="1000" dirty="0">
                         <a:latin typeface="Tahoma" charset="0"/>
                         <a:ea typeface="Tahoma" charset="0"/>
                         <a:cs typeface="Tahoma" charset="0"/>
@@ -20602,12 +20990,12 @@
                     <a:p>
                       <a:pPr algn="ctr" indent="0" marL="0">
                         <a:lnSpc>
-                          <a:spcPts val="1480"/>
+                          <a:spcPts val="1391"/>
                         </a:lnSpc>
                         <a:buNone/>
                       </a:pPr>
                       <a:r>
-                        <a:rPr lang="en-US" sz="1058" dirty="0">
+                        <a:rPr lang="en-US" sz="1000" dirty="0">
                           <a:solidFill>
                             <a:srgbClr val="9A5B00"/>
                           </a:solidFill>
@@ -20617,7 +21005,7 @@
                         </a:rPr>
                         <a:t>.178</a:t>
                       </a:r>
-                      <a:endParaRPr lang="en-US" sz="1058" dirty="0">
+                      <a:endParaRPr lang="en-US" sz="1000" dirty="0">
                         <a:latin typeface="Tahoma" charset="0"/>
                         <a:ea typeface="Tahoma" charset="0"/>
                         <a:cs typeface="Tahoma" charset="0"/>
@@ -20874,6 +21262,200 @@
   <p:clrMapOvr>
     <a:masterClrMapping/>
   </p:clrMapOvr>
+  <p:timing>
+    <p:tnLst>
+      <p:par>
+        <p:cTn id="1" dur="indefinite" restart="never" nodeType="tmRoot">
+          <p:childTnLst>
+            <p:seq concurrent="1" nextAc="seek">
+              <p:cTn id="2" dur="indefinite" nodeType="mainSeq">
+                <p:childTnLst>
+                  <p:par>
+                    <p:cTn id="3" fill="hold">
+                      <p:stCondLst>
+                        <p:cond delay="indefinite"/>
+                      </p:stCondLst>
+                      <p:childTnLst>
+                        <p:par>
+                          <p:cTn id="4" fill="hold">
+                            <p:stCondLst>
+                              <p:cond delay="0"/>
+                            </p:stCondLst>
+                            <p:childTnLst>
+                              <p:par>
+                                <p:cTn id="5" presetID="10" presetClass="entr" presetSubtype="0" fill="hold" grpId="0" nodeType="clickEffect">
+                                  <p:stCondLst>
+                                    <p:cond delay="0"/>
+                                  </p:stCondLst>
+                                  <p:childTnLst>
+                                    <p:set>
+                                      <p:cBhvr>
+                                        <p:cTn id="105" dur="1" fill="hold">
+                                          <p:stCondLst>
+                                            <p:cond delay="0"/>
+                                          </p:stCondLst>
+                                        </p:cTn>
+                                        <p:tgtEl>
+                                          <p:spTgt spid="3"/>
+                                        </p:tgtEl>
+                                        <p:attrNameLst>
+                                          <p:attrName>style.visibility</p:attrName>
+                                        </p:attrNameLst>
+                                      </p:cBhvr>
+                                      <p:to>
+                                        <p:strVal val="visible"/>
+                                      </p:to>
+                                    </p:set>
+                                    <p:animEffect transition="in" filter="fade">
+                                      <p:cBhvr>
+                                        <p:cTn id="6" dur="500"/>
+                                        <p:tgtEl>
+                                          <p:spTgt spid="3"/>
+                                        </p:tgtEl>
+                                      </p:cBhvr>
+                                    </p:animEffect>
+                                  </p:childTnLst>
+                                </p:cTn>
+                              </p:par>
+                              <p:par>
+                                <p:cTn id="7" presetID="10" presetClass="entr" presetSubtype="0" fill="hold" grpId="0" nodeType="withEffect">
+                                  <p:stCondLst>
+                                    <p:cond delay="0"/>
+                                  </p:stCondLst>
+                                  <p:childTnLst>
+                                    <p:set>
+                                      <p:cBhvr>
+                                        <p:cTn id="107" dur="1" fill="hold">
+                                          <p:stCondLst>
+                                            <p:cond delay="0"/>
+                                          </p:stCondLst>
+                                        </p:cTn>
+                                        <p:tgtEl>
+                                          <p:spTgt spid="16"/>
+                                        </p:tgtEl>
+                                        <p:attrNameLst>
+                                          <p:attrName>style.visibility</p:attrName>
+                                        </p:attrNameLst>
+                                      </p:cBhvr>
+                                      <p:to>
+                                        <p:strVal val="visible"/>
+                                      </p:to>
+                                    </p:set>
+                                    <p:animEffect transition="in" filter="fade">
+                                      <p:cBhvr>
+                                        <p:cTn id="8" dur="500"/>
+                                        <p:tgtEl>
+                                          <p:spTgt spid="16"/>
+                                        </p:tgtEl>
+                                      </p:cBhvr>
+                                    </p:animEffect>
+                                  </p:childTnLst>
+                                </p:cTn>
+                              </p:par>
+                              <p:par>
+                                <p:cTn id="9" presetID="10" presetClass="entr" presetSubtype="0" fill="hold" grpId="0" nodeType="withEffect">
+                                  <p:stCondLst>
+                                    <p:cond delay="0"/>
+                                  </p:stCondLst>
+                                  <p:childTnLst>
+                                    <p:set>
+                                      <p:cBhvr>
+                                        <p:cTn id="109" dur="1" fill="hold">
+                                          <p:stCondLst>
+                                            <p:cond delay="0"/>
+                                          </p:stCondLst>
+                                        </p:cTn>
+                                        <p:tgtEl>
+                                          <p:spTgt spid="17"/>
+                                        </p:tgtEl>
+                                        <p:attrNameLst>
+                                          <p:attrName>style.visibility</p:attrName>
+                                        </p:attrNameLst>
+                                      </p:cBhvr>
+                                      <p:to>
+                                        <p:strVal val="visible"/>
+                                      </p:to>
+                                    </p:set>
+                                    <p:animEffect transition="in" filter="fade">
+                                      <p:cBhvr>
+                                        <p:cTn id="10" dur="500"/>
+                                        <p:tgtEl>
+                                          <p:spTgt spid="17"/>
+                                        </p:tgtEl>
+                                      </p:cBhvr>
+                                    </p:animEffect>
+                                  </p:childTnLst>
+                                </p:cTn>
+                              </p:par>
+                              <p:par>
+                                <p:cTn id="11" presetID="10" presetClass="entr" presetSubtype="0" fill="hold" grpId="0" nodeType="withEffect">
+                                  <p:stCondLst>
+                                    <p:cond delay="0"/>
+                                  </p:stCondLst>
+                                  <p:childTnLst>
+                                    <p:set>
+                                      <p:cBhvr>
+                                        <p:cTn id="111" dur="1" fill="hold">
+                                          <p:stCondLst>
+                                            <p:cond delay="0"/>
+                                          </p:stCondLst>
+                                        </p:cTn>
+                                        <p:tgtEl>
+                                          <p:spTgt spid="18"/>
+                                        </p:tgtEl>
+                                        <p:attrNameLst>
+                                          <p:attrName>style.visibility</p:attrName>
+                                        </p:attrNameLst>
+                                      </p:cBhvr>
+                                      <p:to>
+                                        <p:strVal val="visible"/>
+                                      </p:to>
+                                    </p:set>
+                                    <p:animEffect transition="in" filter="fade">
+                                      <p:cBhvr>
+                                        <p:cTn id="12" dur="500"/>
+                                        <p:tgtEl>
+                                          <p:spTgt spid="18"/>
+                                        </p:tgtEl>
+                                      </p:cBhvr>
+                                    </p:animEffect>
+                                  </p:childTnLst>
+                                </p:cTn>
+                              </p:par>
+                            </p:childTnLst>
+                          </p:cTn>
+                        </p:par>
+                      </p:childTnLst>
+                    </p:cTn>
+                  </p:par>
+                </p:childTnLst>
+              </p:cTn>
+              <p:prevCondLst>
+                <p:cond evt="onPrev" delay="0">
+                  <p:tgtEl>
+                    <p:sldTgt/>
+                  </p:tgtEl>
+                </p:cond>
+              </p:prevCondLst>
+              <p:nextCondLst>
+                <p:cond evt="onNext" delay="0">
+                  <p:tgtEl>
+                    <p:sldTgt/>
+                  </p:tgtEl>
+                </p:cond>
+              </p:nextCondLst>
+            </p:seq>
+          </p:childTnLst>
+        </p:cTn>
+      </p:par>
+    </p:tnLst>
+    <p:bldLst>
+      <p:bldP spid="3" grpId="0" animBg="1"/>
+      <p:bldP spid="16" grpId="0" animBg="1"/>
+      <p:bldP spid="17" grpId="0" animBg="1"/>
+      <p:bldP spid="18" grpId="0" animBg="1"/>
+    </p:bldLst>
+  </p:timing>
 </p:sld>
 </file>
 
@@ -24174,12 +24756,12 @@
                     <a:p>
                       <a:pPr indent="0" marL="0">
                         <a:lnSpc>
-                          <a:spcPts val="1475"/>
+                          <a:spcPts val="1386"/>
                         </a:lnSpc>
                         <a:buNone/>
                       </a:pPr>
                       <a:r>
-                        <a:rPr lang="en-US" sz="1054" b="1" dirty="0">
+                        <a:rPr lang="en-US" sz="1000" b="1" dirty="0">
                           <a:solidFill>
                             <a:srgbClr val="F6F4EF"/>
                           </a:solidFill>
@@ -24189,7 +24771,7 @@
                         </a:rPr>
                         <a:t>Pair 1</a:t>
                       </a:r>
-                      <a:endParaRPr lang="en-US" sz="1054" dirty="0">
+                      <a:endParaRPr lang="en-US" sz="1000" dirty="0">
                         <a:latin typeface="Tahoma" charset="0"/>
                         <a:ea typeface="Tahoma" charset="0"/>
                         <a:cs typeface="Tahoma" charset="0"/>
@@ -24233,12 +24815,12 @@
                     <a:p>
                       <a:pPr algn="ctr" indent="0" marL="0">
                         <a:lnSpc>
-                          <a:spcPts val="1475"/>
+                          <a:spcPts val="1386"/>
                         </a:lnSpc>
                         <a:buNone/>
                       </a:pPr>
                       <a:r>
-                        <a:rPr lang="en-US" sz="1054" b="1" dirty="0">
+                        <a:rPr lang="en-US" sz="1000" b="1" dirty="0">
                           <a:solidFill>
                             <a:srgbClr val="F6F4EF"/>
                           </a:solidFill>
@@ -24248,7 +24830,7 @@
                         </a:rPr>
                         <a:t>Mean</a:t>
                       </a:r>
-                      <a:endParaRPr lang="en-US" sz="1054" dirty="0">
+                      <a:endParaRPr lang="en-US" sz="1000" dirty="0">
                         <a:latin typeface="Tahoma" charset="0"/>
                         <a:ea typeface="Tahoma" charset="0"/>
                         <a:cs typeface="Tahoma" charset="0"/>
@@ -24298,12 +24880,12 @@
                     <a:p>
                       <a:pPr algn="ctr" indent="0" marL="0">
                         <a:lnSpc>
-                          <a:spcPts val="1475"/>
+                          <a:spcPts val="1386"/>
                         </a:lnSpc>
                         <a:buNone/>
                       </a:pPr>
                       <a:r>
-                        <a:rPr lang="en-US" sz="1054" b="1" dirty="0">
+                        <a:rPr lang="en-US" sz="1000" b="1" dirty="0">
                           <a:solidFill>
                             <a:srgbClr val="F6F4EF"/>
                           </a:solidFill>
@@ -24313,7 +24895,7 @@
                         </a:rPr>
                         <a:t>N</a:t>
                       </a:r>
-                      <a:endParaRPr lang="en-US" sz="1054" dirty="0">
+                      <a:endParaRPr lang="en-US" sz="1000" dirty="0">
                         <a:latin typeface="Tahoma" charset="0"/>
                         <a:ea typeface="Tahoma" charset="0"/>
                         <a:cs typeface="Tahoma" charset="0"/>
@@ -24363,12 +24945,12 @@
                     <a:p>
                       <a:pPr algn="ctr" indent="0" marL="0">
                         <a:lnSpc>
-                          <a:spcPts val="1475"/>
+                          <a:spcPts val="1386"/>
                         </a:lnSpc>
                         <a:buNone/>
                       </a:pPr>
                       <a:r>
-                        <a:rPr lang="en-US" sz="1054" b="1" dirty="0">
+                        <a:rPr lang="en-US" sz="1000" b="1" dirty="0">
                           <a:solidFill>
                             <a:srgbClr val="F6F4EF"/>
                           </a:solidFill>
@@ -24378,7 +24960,7 @@
                         </a:rPr>
                         <a:t>Std. Deviation</a:t>
                       </a:r>
-                      <a:endParaRPr lang="en-US" sz="1054" dirty="0">
+                      <a:endParaRPr lang="en-US" sz="1000" dirty="0">
                         <a:latin typeface="Tahoma" charset="0"/>
                         <a:ea typeface="Tahoma" charset="0"/>
                         <a:cs typeface="Tahoma" charset="0"/>
@@ -24428,12 +25010,12 @@
                     <a:p>
                       <a:pPr algn="ctr" indent="0" marL="0">
                         <a:lnSpc>
-                          <a:spcPts val="1475"/>
+                          <a:spcPts val="1386"/>
                         </a:lnSpc>
                         <a:buNone/>
                       </a:pPr>
                       <a:r>
-                        <a:rPr lang="en-US" sz="1054" b="1" dirty="0">
+                        <a:rPr lang="en-US" sz="1000" b="1" dirty="0">
                           <a:solidFill>
                             <a:srgbClr val="F6F4EF"/>
                           </a:solidFill>
@@ -24443,7 +25025,7 @@
                         </a:rPr>
                         <a:t>Std. Error Mean</a:t>
                       </a:r>
-                      <a:endParaRPr lang="en-US" sz="1054" dirty="0">
+                      <a:endParaRPr lang="en-US" sz="1000" dirty="0">
                         <a:latin typeface="Tahoma" charset="0"/>
                         <a:ea typeface="Tahoma" charset="0"/>
                         <a:cs typeface="Tahoma" charset="0"/>
@@ -24495,12 +25077,12 @@
                     <a:p>
                       <a:pPr indent="0" marL="0">
                         <a:lnSpc>
-                          <a:spcPts val="1475"/>
+                          <a:spcPts val="1386"/>
                         </a:lnSpc>
                         <a:buNone/>
                       </a:pPr>
                       <a:r>
-                        <a:rPr lang="en-US" sz="1054" dirty="0">
+                        <a:rPr lang="en-US" sz="1000" dirty="0">
                           <a:solidFill>
                             <a:srgbClr val="14233A"/>
                           </a:solidFill>
@@ -24510,7 +25092,7 @@
                         </a:rPr>
                         <a:t>att_before</a:t>
                       </a:r>
-                      <a:endParaRPr lang="en-US" sz="1054" dirty="0">
+                      <a:endParaRPr lang="en-US" sz="1000" dirty="0">
                         <a:latin typeface="Tahoma" charset="0"/>
                         <a:ea typeface="Tahoma" charset="0"/>
                         <a:cs typeface="Tahoma" charset="0"/>
@@ -24560,12 +25142,12 @@
                     <a:p>
                       <a:pPr algn="ctr" indent="0" marL="0">
                         <a:lnSpc>
-                          <a:spcPts val="1475"/>
+                          <a:spcPts val="1386"/>
                         </a:lnSpc>
                         <a:buNone/>
                       </a:pPr>
                       <a:r>
-                        <a:rPr lang="en-US" sz="1054" dirty="0">
+                        <a:rPr lang="en-US" sz="1000" dirty="0">
                           <a:solidFill>
                             <a:srgbClr val="14233A"/>
                           </a:solidFill>
@@ -24575,7 +25157,7 @@
                         </a:rPr>
                         <a:t>2.80</a:t>
                       </a:r>
-                      <a:endParaRPr lang="en-US" sz="1054" dirty="0">
+                      <a:endParaRPr lang="en-US" sz="1000" dirty="0">
                         <a:latin typeface="Tahoma" charset="0"/>
                         <a:ea typeface="Tahoma" charset="0"/>
                         <a:cs typeface="Tahoma" charset="0"/>
@@ -24631,12 +25213,12 @@
                     <a:p>
                       <a:pPr algn="ctr" indent="0" marL="0">
                         <a:lnSpc>
-                          <a:spcPts val="1475"/>
+                          <a:spcPts val="1386"/>
                         </a:lnSpc>
                         <a:buNone/>
                       </a:pPr>
                       <a:r>
-                        <a:rPr lang="en-US" sz="1054" dirty="0">
+                        <a:rPr lang="en-US" sz="1000" dirty="0">
                           <a:solidFill>
                             <a:srgbClr val="14233A"/>
                           </a:solidFill>
@@ -24646,7 +25228,7 @@
                         </a:rPr>
                         <a:t>8</a:t>
                       </a:r>
-                      <a:endParaRPr lang="en-US" sz="1054" dirty="0">
+                      <a:endParaRPr lang="en-US" sz="1000" dirty="0">
                         <a:latin typeface="Tahoma" charset="0"/>
                         <a:ea typeface="Tahoma" charset="0"/>
                         <a:cs typeface="Tahoma" charset="0"/>
@@ -24702,12 +25284,12 @@
                     <a:p>
                       <a:pPr algn="ctr" indent="0" marL="0">
                         <a:lnSpc>
-                          <a:spcPts val="1475"/>
+                          <a:spcPts val="1386"/>
                         </a:lnSpc>
                         <a:buNone/>
                       </a:pPr>
                       <a:r>
-                        <a:rPr lang="en-US" sz="1054" dirty="0">
+                        <a:rPr lang="en-US" sz="1000" dirty="0">
                           <a:solidFill>
                             <a:srgbClr val="14233A"/>
                           </a:solidFill>
@@ -24717,7 +25299,7 @@
                         </a:rPr>
                         <a:t>.400</a:t>
                       </a:r>
-                      <a:endParaRPr lang="en-US" sz="1054" dirty="0">
+                      <a:endParaRPr lang="en-US" sz="1000" dirty="0">
                         <a:latin typeface="Tahoma" charset="0"/>
                         <a:ea typeface="Tahoma" charset="0"/>
                         <a:cs typeface="Tahoma" charset="0"/>
@@ -24773,12 +25355,12 @@
                     <a:p>
                       <a:pPr algn="ctr" indent="0" marL="0">
                         <a:lnSpc>
-                          <a:spcPts val="1475"/>
+                          <a:spcPts val="1386"/>
                         </a:lnSpc>
                         <a:buNone/>
                       </a:pPr>
                       <a:r>
-                        <a:rPr lang="en-US" sz="1054" dirty="0">
+                        <a:rPr lang="en-US" sz="1000" dirty="0">
                           <a:solidFill>
                             <a:srgbClr val="14233A"/>
                           </a:solidFill>
@@ -24788,7 +25370,7 @@
                         </a:rPr>
                         <a:t>.141</a:t>
                       </a:r>
-                      <a:endParaRPr lang="en-US" sz="1054" dirty="0">
+                      <a:endParaRPr lang="en-US" sz="1000" dirty="0">
                         <a:latin typeface="Tahoma" charset="0"/>
                         <a:ea typeface="Tahoma" charset="0"/>
                         <a:cs typeface="Tahoma" charset="0"/>
@@ -24846,12 +25428,12 @@
                     <a:p>
                       <a:pPr indent="0" marL="0">
                         <a:lnSpc>
-                          <a:spcPts val="1475"/>
+                          <a:spcPts val="1386"/>
                         </a:lnSpc>
                         <a:buNone/>
                       </a:pPr>
                       <a:r>
-                        <a:rPr lang="en-US" sz="1054" dirty="0">
+                        <a:rPr lang="en-US" sz="1000" dirty="0">
                           <a:solidFill>
                             <a:srgbClr val="14233A"/>
                           </a:solidFill>
@@ -24861,7 +25443,7 @@
                         </a:rPr>
                         <a:t>att_after</a:t>
                       </a:r>
-                      <a:endParaRPr lang="en-US" sz="1054" dirty="0">
+                      <a:endParaRPr lang="en-US" sz="1000" dirty="0">
                         <a:latin typeface="Tahoma" charset="0"/>
                         <a:ea typeface="Tahoma" charset="0"/>
                         <a:cs typeface="Tahoma" charset="0"/>
@@ -24911,12 +25493,12 @@
                     <a:p>
                       <a:pPr algn="ctr" indent="0" marL="0">
                         <a:lnSpc>
-                          <a:spcPts val="1475"/>
+                          <a:spcPts val="1386"/>
                         </a:lnSpc>
                         <a:buNone/>
                       </a:pPr>
                       <a:r>
-                        <a:rPr lang="en-US" sz="1054" dirty="0">
+                        <a:rPr lang="en-US" sz="1000" dirty="0">
                           <a:solidFill>
                             <a:srgbClr val="14233A"/>
                           </a:solidFill>
@@ -24926,7 +25508,7 @@
                         </a:rPr>
                         <a:t>3.35</a:t>
                       </a:r>
-                      <a:endParaRPr lang="en-US" sz="1054" dirty="0">
+                      <a:endParaRPr lang="en-US" sz="1000" dirty="0">
                         <a:latin typeface="Tahoma" charset="0"/>
                         <a:ea typeface="Tahoma" charset="0"/>
                         <a:cs typeface="Tahoma" charset="0"/>
@@ -24982,12 +25564,12 @@
                     <a:p>
                       <a:pPr algn="ctr" indent="0" marL="0">
                         <a:lnSpc>
-                          <a:spcPts val="1475"/>
+                          <a:spcPts val="1386"/>
                         </a:lnSpc>
                         <a:buNone/>
                       </a:pPr>
                       <a:r>
-                        <a:rPr lang="en-US" sz="1054" dirty="0">
+                        <a:rPr lang="en-US" sz="1000" dirty="0">
                           <a:solidFill>
                             <a:srgbClr val="14233A"/>
                           </a:solidFill>
@@ -24997,7 +25579,7 @@
                         </a:rPr>
                         <a:t>8</a:t>
                       </a:r>
-                      <a:endParaRPr lang="en-US" sz="1054" dirty="0">
+                      <a:endParaRPr lang="en-US" sz="1000" dirty="0">
                         <a:latin typeface="Tahoma" charset="0"/>
                         <a:ea typeface="Tahoma" charset="0"/>
                         <a:cs typeface="Tahoma" charset="0"/>
@@ -25053,12 +25635,12 @@
                     <a:p>
                       <a:pPr algn="ctr" indent="0" marL="0">
                         <a:lnSpc>
-                          <a:spcPts val="1475"/>
+                          <a:spcPts val="1386"/>
                         </a:lnSpc>
                         <a:buNone/>
                       </a:pPr>
                       <a:r>
-                        <a:rPr lang="en-US" sz="1054" dirty="0">
+                        <a:rPr lang="en-US" sz="1000" dirty="0">
                           <a:solidFill>
                             <a:srgbClr val="14233A"/>
                           </a:solidFill>
@@ -25068,7 +25650,7 @@
                         </a:rPr>
                         <a:t>.298</a:t>
                       </a:r>
-                      <a:endParaRPr lang="en-US" sz="1054" dirty="0">
+                      <a:endParaRPr lang="en-US" sz="1000" dirty="0">
                         <a:latin typeface="Tahoma" charset="0"/>
                         <a:ea typeface="Tahoma" charset="0"/>
                         <a:cs typeface="Tahoma" charset="0"/>
@@ -25124,12 +25706,12 @@
                     <a:p>
                       <a:pPr algn="ctr" indent="0" marL="0">
                         <a:lnSpc>
-                          <a:spcPts val="1475"/>
+                          <a:spcPts val="1386"/>
                         </a:lnSpc>
                         <a:buNone/>
                       </a:pPr>
                       <a:r>
-                        <a:rPr lang="en-US" sz="1054" dirty="0">
+                        <a:rPr lang="en-US" sz="1000" dirty="0">
                           <a:solidFill>
                             <a:srgbClr val="14233A"/>
                           </a:solidFill>
@@ -25139,7 +25721,7 @@
                         </a:rPr>
                         <a:t>.105</a:t>
                       </a:r>
-                      <a:endParaRPr lang="en-US" sz="1054" dirty="0">
+                      <a:endParaRPr lang="en-US" sz="1000" dirty="0">
                         <a:latin typeface="Tahoma" charset="0"/>
                         <a:ea typeface="Tahoma" charset="0"/>
                         <a:cs typeface="Tahoma" charset="0"/>
@@ -25403,12 +25985,12 @@
                     <a:p>
                       <a:pPr indent="0" marL="0">
                         <a:lnSpc>
-                          <a:spcPts val="1480"/>
+                          <a:spcPts val="1391"/>
                         </a:lnSpc>
                         <a:buNone/>
                       </a:pPr>
                       <a:r>
-                        <a:rPr lang="en-US" sz="1058" b="1" dirty="0">
+                        <a:rPr lang="en-US" sz="1000" b="1" dirty="0">
                           <a:solidFill>
                             <a:srgbClr val="F6F4EF"/>
                           </a:solidFill>
@@ -25418,7 +26000,7 @@
                         </a:rPr>
                         <a:t>Pair 1</a:t>
                       </a:r>
-                      <a:endParaRPr lang="en-US" sz="1058" dirty="0">
+                      <a:endParaRPr lang="en-US" sz="1000" dirty="0">
                         <a:latin typeface="Tahoma" charset="0"/>
                         <a:ea typeface="Tahoma" charset="0"/>
                         <a:cs typeface="Tahoma" charset="0"/>
@@ -25462,12 +26044,12 @@
                     <a:p>
                       <a:pPr algn="ctr" indent="0" marL="0">
                         <a:lnSpc>
-                          <a:spcPts val="1480"/>
+                          <a:spcPts val="1391"/>
                         </a:lnSpc>
                         <a:buNone/>
                       </a:pPr>
                       <a:r>
-                        <a:rPr lang="en-US" sz="1058" b="1" dirty="0">
+                        <a:rPr lang="en-US" sz="1000" b="1" dirty="0">
                           <a:solidFill>
                             <a:srgbClr val="F6F4EF"/>
                           </a:solidFill>
@@ -25477,7 +26059,7 @@
                         </a:rPr>
                         <a:t>Mean</a:t>
                       </a:r>
-                      <a:endParaRPr lang="en-US" sz="1058" dirty="0">
+                      <a:endParaRPr lang="en-US" sz="1000" dirty="0">
                         <a:latin typeface="Tahoma" charset="0"/>
                         <a:ea typeface="Tahoma" charset="0"/>
                         <a:cs typeface="Tahoma" charset="0"/>
@@ -25527,12 +26109,12 @@
                     <a:p>
                       <a:pPr algn="ctr" indent="0" marL="0">
                         <a:lnSpc>
-                          <a:spcPts val="1480"/>
+                          <a:spcPts val="1391"/>
                         </a:lnSpc>
                         <a:buNone/>
                       </a:pPr>
                       <a:r>
-                        <a:rPr lang="en-US" sz="1058" b="1" dirty="0">
+                        <a:rPr lang="en-US" sz="1000" b="1" dirty="0">
                           <a:solidFill>
                             <a:srgbClr val="F6F4EF"/>
                           </a:solidFill>
@@ -25542,7 +26124,7 @@
                         </a:rPr>
                         <a:t>Std. Deviation</a:t>
                       </a:r>
-                      <a:endParaRPr lang="en-US" sz="1058" dirty="0">
+                      <a:endParaRPr lang="en-US" sz="1000" dirty="0">
                         <a:latin typeface="Tahoma" charset="0"/>
                         <a:ea typeface="Tahoma" charset="0"/>
                         <a:cs typeface="Tahoma" charset="0"/>
@@ -25592,12 +26174,12 @@
                     <a:p>
                       <a:pPr algn="ctr" indent="0" marL="0">
                         <a:lnSpc>
-                          <a:spcPts val="1480"/>
+                          <a:spcPts val="1391"/>
                         </a:lnSpc>
                         <a:buNone/>
                       </a:pPr>
                       <a:r>
-                        <a:rPr lang="en-US" sz="1058" b="1" dirty="0">
+                        <a:rPr lang="en-US" sz="1000" b="1" dirty="0">
                           <a:solidFill>
                             <a:srgbClr val="F6F4EF"/>
                           </a:solidFill>
@@ -25607,7 +26189,7 @@
                         </a:rPr>
                         <a:t>Std. Error Mean</a:t>
                       </a:r>
-                      <a:endParaRPr lang="en-US" sz="1058" dirty="0">
+                      <a:endParaRPr lang="en-US" sz="1000" dirty="0">
                         <a:latin typeface="Tahoma" charset="0"/>
                         <a:ea typeface="Tahoma" charset="0"/>
                         <a:cs typeface="Tahoma" charset="0"/>
@@ -25657,12 +26239,12 @@
                     <a:p>
                       <a:pPr algn="ctr" indent="0" marL="0">
                         <a:lnSpc>
-                          <a:spcPts val="1480"/>
+                          <a:spcPts val="1391"/>
                         </a:lnSpc>
                         <a:buNone/>
                       </a:pPr>
                       <a:r>
-                        <a:rPr lang="en-US" sz="1058" b="1" dirty="0">
+                        <a:rPr lang="en-US" sz="1000" b="1" dirty="0">
                           <a:solidFill>
                             <a:srgbClr val="F6F4EF"/>
                           </a:solidFill>
@@ -25672,7 +26254,7 @@
                         </a:rPr>
                         <a:t>99% CI Lower</a:t>
                       </a:r>
-                      <a:endParaRPr lang="en-US" sz="1058" dirty="0">
+                      <a:endParaRPr lang="en-US" sz="1000" dirty="0">
                         <a:latin typeface="Tahoma" charset="0"/>
                         <a:ea typeface="Tahoma" charset="0"/>
                         <a:cs typeface="Tahoma" charset="0"/>
@@ -25722,12 +26304,12 @@
                     <a:p>
                       <a:pPr algn="ctr" indent="0" marL="0">
                         <a:lnSpc>
-                          <a:spcPts val="1480"/>
+                          <a:spcPts val="1391"/>
                         </a:lnSpc>
                         <a:buNone/>
                       </a:pPr>
                       <a:r>
-                        <a:rPr lang="en-US" sz="1058" b="1" dirty="0">
+                        <a:rPr lang="en-US" sz="1000" b="1" dirty="0">
                           <a:solidFill>
                             <a:srgbClr val="F6F4EF"/>
                           </a:solidFill>
@@ -25737,7 +26319,7 @@
                         </a:rPr>
                         <a:t>99% CI Upper</a:t>
                       </a:r>
-                      <a:endParaRPr lang="en-US" sz="1058" dirty="0">
+                      <a:endParaRPr lang="en-US" sz="1000" dirty="0">
                         <a:latin typeface="Tahoma" charset="0"/>
                         <a:ea typeface="Tahoma" charset="0"/>
                         <a:cs typeface="Tahoma" charset="0"/>
@@ -25787,12 +26369,12 @@
                     <a:p>
                       <a:pPr algn="ctr" indent="0" marL="0">
                         <a:lnSpc>
-                          <a:spcPts val="1480"/>
+                          <a:spcPts val="1391"/>
                         </a:lnSpc>
                         <a:buNone/>
                       </a:pPr>
                       <a:r>
-                        <a:rPr lang="en-US" sz="1058" b="1" dirty="0">
+                        <a:rPr lang="en-US" sz="1000" b="1" dirty="0">
                           <a:solidFill>
                             <a:srgbClr val="F6F4EF"/>
                           </a:solidFill>
@@ -25802,7 +26384,7 @@
                         </a:rPr>
                         <a:t>t</a:t>
                       </a:r>
-                      <a:endParaRPr lang="en-US" sz="1058" dirty="0">
+                      <a:endParaRPr lang="en-US" sz="1000" dirty="0">
                         <a:latin typeface="Tahoma" charset="0"/>
                         <a:ea typeface="Tahoma" charset="0"/>
                         <a:cs typeface="Tahoma" charset="0"/>
@@ -25852,12 +26434,12 @@
                     <a:p>
                       <a:pPr algn="ctr" indent="0" marL="0">
                         <a:lnSpc>
-                          <a:spcPts val="1480"/>
+                          <a:spcPts val="1391"/>
                         </a:lnSpc>
                         <a:buNone/>
                       </a:pPr>
                       <a:r>
-                        <a:rPr lang="en-US" sz="1058" b="1" dirty="0">
+                        <a:rPr lang="en-US" sz="1000" b="1" dirty="0">
                           <a:solidFill>
                             <a:srgbClr val="F6F4EF"/>
                           </a:solidFill>
@@ -25867,7 +26449,7 @@
                         </a:rPr>
                         <a:t>df</a:t>
                       </a:r>
-                      <a:endParaRPr lang="en-US" sz="1058" dirty="0">
+                      <a:endParaRPr lang="en-US" sz="1000" dirty="0">
                         <a:latin typeface="Tahoma" charset="0"/>
                         <a:ea typeface="Tahoma" charset="0"/>
                         <a:cs typeface="Tahoma" charset="0"/>
@@ -25917,12 +26499,12 @@
                     <a:p>
                       <a:pPr algn="ctr" indent="0" marL="0">
                         <a:lnSpc>
-                          <a:spcPts val="1480"/>
+                          <a:spcPts val="1391"/>
                         </a:lnSpc>
                         <a:buNone/>
                       </a:pPr>
                       <a:r>
-                        <a:rPr lang="en-US" sz="1058" b="1" dirty="0">
+                        <a:rPr lang="en-US" sz="1000" b="1" dirty="0">
                           <a:solidFill>
                             <a:srgbClr val="F6F4EF"/>
                           </a:solidFill>
@@ -25932,7 +26514,7 @@
                         </a:rPr>
                         <a:t>Sig. (2-tailed)</a:t>
                       </a:r>
-                      <a:endParaRPr lang="en-US" sz="1058" dirty="0">
+                      <a:endParaRPr lang="en-US" sz="1000" dirty="0">
                         <a:latin typeface="Tahoma" charset="0"/>
                         <a:ea typeface="Tahoma" charset="0"/>
                         <a:cs typeface="Tahoma" charset="0"/>
@@ -25984,12 +26566,12 @@
                     <a:p>
                       <a:pPr indent="0" marL="0">
                         <a:lnSpc>
-                          <a:spcPts val="1480"/>
+                          <a:spcPts val="1391"/>
                         </a:lnSpc>
                         <a:buNone/>
                       </a:pPr>
                       <a:r>
-                        <a:rPr lang="en-US" sz="1058" dirty="0">
+                        <a:rPr lang="en-US" sz="1000" dirty="0">
                           <a:solidFill>
                             <a:srgbClr val="14233A"/>
                           </a:solidFill>
@@ -25999,7 +26581,7 @@
                         </a:rPr>
                         <a:t>att_before - att_after</a:t>
                       </a:r>
-                      <a:endParaRPr lang="en-US" sz="1058" dirty="0">
+                      <a:endParaRPr lang="en-US" sz="1000" dirty="0">
                         <a:latin typeface="Tahoma" charset="0"/>
                         <a:ea typeface="Tahoma" charset="0"/>
                         <a:cs typeface="Tahoma" charset="0"/>
@@ -26049,12 +26631,12 @@
                     <a:p>
                       <a:pPr algn="ctr" indent="0" marL="0">
                         <a:lnSpc>
-                          <a:spcPts val="1480"/>
+                          <a:spcPts val="1391"/>
                         </a:lnSpc>
                         <a:buNone/>
                       </a:pPr>
                       <a:r>
-                        <a:rPr lang="en-US" sz="1058" dirty="0">
+                        <a:rPr lang="en-US" sz="1000" dirty="0">
                           <a:solidFill>
                             <a:srgbClr val="14233A"/>
                           </a:solidFill>
@@ -26064,7 +26646,7 @@
                         </a:rPr>
                         <a:t>-.550</a:t>
                       </a:r>
-                      <a:endParaRPr lang="en-US" sz="1058" dirty="0">
+                      <a:endParaRPr lang="en-US" sz="1000" dirty="0">
                         <a:latin typeface="Tahoma" charset="0"/>
                         <a:ea typeface="Tahoma" charset="0"/>
                         <a:cs typeface="Tahoma" charset="0"/>
@@ -26120,12 +26702,12 @@
                     <a:p>
                       <a:pPr algn="ctr" indent="0" marL="0">
                         <a:lnSpc>
-                          <a:spcPts val="1480"/>
+                          <a:spcPts val="1391"/>
                         </a:lnSpc>
                         <a:buNone/>
                       </a:pPr>
                       <a:r>
-                        <a:rPr lang="en-US" sz="1058" dirty="0">
+                        <a:rPr lang="en-US" sz="1000" dirty="0">
                           <a:solidFill>
                             <a:srgbClr val="14233A"/>
                           </a:solidFill>
@@ -26135,7 +26717,7 @@
                         </a:rPr>
                         <a:t>.256</a:t>
                       </a:r>
-                      <a:endParaRPr lang="en-US" sz="1058" dirty="0">
+                      <a:endParaRPr lang="en-US" sz="1000" dirty="0">
                         <a:latin typeface="Tahoma" charset="0"/>
                         <a:ea typeface="Tahoma" charset="0"/>
                         <a:cs typeface="Tahoma" charset="0"/>
@@ -26191,12 +26773,12 @@
                     <a:p>
                       <a:pPr algn="ctr" indent="0" marL="0">
                         <a:lnSpc>
-                          <a:spcPts val="1480"/>
+                          <a:spcPts val="1391"/>
                         </a:lnSpc>
                         <a:buNone/>
                       </a:pPr>
                       <a:r>
-                        <a:rPr lang="en-US" sz="1058" dirty="0">
+                        <a:rPr lang="en-US" sz="1000" dirty="0">
                           <a:solidFill>
                             <a:srgbClr val="14233A"/>
                           </a:solidFill>
@@ -26206,7 +26788,7 @@
                         </a:rPr>
                         <a:t>.091</a:t>
                       </a:r>
-                      <a:endParaRPr lang="en-US" sz="1058" dirty="0">
+                      <a:endParaRPr lang="en-US" sz="1000" dirty="0">
                         <a:latin typeface="Tahoma" charset="0"/>
                         <a:ea typeface="Tahoma" charset="0"/>
                         <a:cs typeface="Tahoma" charset="0"/>
@@ -26262,12 +26844,12 @@
                     <a:p>
                       <a:pPr algn="ctr" indent="0" marL="0">
                         <a:lnSpc>
-                          <a:spcPts val="1480"/>
+                          <a:spcPts val="1391"/>
                         </a:lnSpc>
                         <a:buNone/>
                       </a:pPr>
                       <a:r>
-                        <a:rPr lang="en-US" sz="1058" dirty="0">
+                        <a:rPr lang="en-US" sz="1000" dirty="0">
                           <a:solidFill>
                             <a:srgbClr val="14233A"/>
                           </a:solidFill>
@@ -26277,7 +26859,7 @@
                         </a:rPr>
                         <a:t>-.867</a:t>
                       </a:r>
-                      <a:endParaRPr lang="en-US" sz="1058" dirty="0">
+                      <a:endParaRPr lang="en-US" sz="1000" dirty="0">
                         <a:latin typeface="Tahoma" charset="0"/>
                         <a:ea typeface="Tahoma" charset="0"/>
                         <a:cs typeface="Tahoma" charset="0"/>
@@ -26333,12 +26915,12 @@
                     <a:p>
                       <a:pPr algn="ctr" indent="0" marL="0">
                         <a:lnSpc>
-                          <a:spcPts val="1480"/>
+                          <a:spcPts val="1391"/>
                         </a:lnSpc>
                         <a:buNone/>
                       </a:pPr>
                       <a:r>
-                        <a:rPr lang="en-US" sz="1058" dirty="0">
+                        <a:rPr lang="en-US" sz="1000" dirty="0">
                           <a:solidFill>
                             <a:srgbClr val="14233A"/>
                           </a:solidFill>
@@ -26348,7 +26930,7 @@
                         </a:rPr>
                         <a:t>-.233</a:t>
                       </a:r>
-                      <a:endParaRPr lang="en-US" sz="1058" dirty="0">
+                      <a:endParaRPr lang="en-US" sz="1000" dirty="0">
                         <a:latin typeface="Tahoma" charset="0"/>
                         <a:ea typeface="Tahoma" charset="0"/>
                         <a:cs typeface="Tahoma" charset="0"/>
@@ -26404,12 +26986,12 @@
                     <a:p>
                       <a:pPr algn="ctr" indent="0" marL="0">
                         <a:lnSpc>
-                          <a:spcPts val="1480"/>
+                          <a:spcPts val="1391"/>
                         </a:lnSpc>
                         <a:buNone/>
                       </a:pPr>
                       <a:r>
-                        <a:rPr lang="en-US" sz="1058" dirty="0">
+                        <a:rPr lang="en-US" sz="1000" dirty="0">
                           <a:solidFill>
                             <a:srgbClr val="14233A"/>
                           </a:solidFill>
@@ -26419,7 +27001,7 @@
                         </a:rPr>
                         <a:t>-6.068</a:t>
                       </a:r>
-                      <a:endParaRPr lang="en-US" sz="1058" dirty="0">
+                      <a:endParaRPr lang="en-US" sz="1000" dirty="0">
                         <a:latin typeface="Tahoma" charset="0"/>
                         <a:ea typeface="Tahoma" charset="0"/>
                         <a:cs typeface="Tahoma" charset="0"/>
@@ -26475,12 +27057,12 @@
                     <a:p>
                       <a:pPr algn="ctr" indent="0" marL="0">
                         <a:lnSpc>
-                          <a:spcPts val="1480"/>
+                          <a:spcPts val="1391"/>
                         </a:lnSpc>
                         <a:buNone/>
                       </a:pPr>
                       <a:r>
-                        <a:rPr lang="en-US" sz="1058" dirty="0">
+                        <a:rPr lang="en-US" sz="1000" dirty="0">
                           <a:solidFill>
                             <a:srgbClr val="14233A"/>
                           </a:solidFill>
@@ -26490,7 +27072,7 @@
                         </a:rPr>
                         <a:t>7</a:t>
                       </a:r>
-                      <a:endParaRPr lang="en-US" sz="1058" dirty="0">
+                      <a:endParaRPr lang="en-US" sz="1000" dirty="0">
                         <a:latin typeface="Tahoma" charset="0"/>
                         <a:ea typeface="Tahoma" charset="0"/>
                         <a:cs typeface="Tahoma" charset="0"/>
@@ -26546,12 +27128,12 @@
                     <a:p>
                       <a:pPr algn="ctr" indent="0" marL="0">
                         <a:lnSpc>
-                          <a:spcPts val="1480"/>
+                          <a:spcPts val="1391"/>
                         </a:lnSpc>
                         <a:buNone/>
                       </a:pPr>
                       <a:r>
-                        <a:rPr lang="en-US" sz="1058" dirty="0">
+                        <a:rPr lang="en-US" sz="1000" dirty="0">
                           <a:solidFill>
                             <a:srgbClr val="9A5B00"/>
                           </a:solidFill>
@@ -26561,7 +27143,7 @@
                         </a:rPr>
                         <a:t>.001</a:t>
                       </a:r>
-                      <a:endParaRPr lang="en-US" sz="1058" dirty="0">
+                      <a:endParaRPr lang="en-US" sz="1000" dirty="0">
                         <a:latin typeface="Tahoma" charset="0"/>
                         <a:ea typeface="Tahoma" charset="0"/>
                         <a:cs typeface="Tahoma" charset="0"/>
@@ -26818,6 +27400,200 @@
   <p:clrMapOvr>
     <a:masterClrMapping/>
   </p:clrMapOvr>
+  <p:timing>
+    <p:tnLst>
+      <p:par>
+        <p:cTn id="1" dur="indefinite" restart="never" nodeType="tmRoot">
+          <p:childTnLst>
+            <p:seq concurrent="1" nextAc="seek">
+              <p:cTn id="2" dur="indefinite" nodeType="mainSeq">
+                <p:childTnLst>
+                  <p:par>
+                    <p:cTn id="3" fill="hold">
+                      <p:stCondLst>
+                        <p:cond delay="indefinite"/>
+                      </p:stCondLst>
+                      <p:childTnLst>
+                        <p:par>
+                          <p:cTn id="4" fill="hold">
+                            <p:stCondLst>
+                              <p:cond delay="0"/>
+                            </p:stCondLst>
+                            <p:childTnLst>
+                              <p:par>
+                                <p:cTn id="5" presetID="10" presetClass="entr" presetSubtype="0" fill="hold" grpId="0" nodeType="clickEffect">
+                                  <p:stCondLst>
+                                    <p:cond delay="0"/>
+                                  </p:stCondLst>
+                                  <p:childTnLst>
+                                    <p:set>
+                                      <p:cBhvr>
+                                        <p:cTn id="105" dur="1" fill="hold">
+                                          <p:stCondLst>
+                                            <p:cond delay="0"/>
+                                          </p:stCondLst>
+                                        </p:cTn>
+                                        <p:tgtEl>
+                                          <p:spTgt spid="3"/>
+                                        </p:tgtEl>
+                                        <p:attrNameLst>
+                                          <p:attrName>style.visibility</p:attrName>
+                                        </p:attrNameLst>
+                                      </p:cBhvr>
+                                      <p:to>
+                                        <p:strVal val="visible"/>
+                                      </p:to>
+                                    </p:set>
+                                    <p:animEffect transition="in" filter="fade">
+                                      <p:cBhvr>
+                                        <p:cTn id="6" dur="500"/>
+                                        <p:tgtEl>
+                                          <p:spTgt spid="3"/>
+                                        </p:tgtEl>
+                                      </p:cBhvr>
+                                    </p:animEffect>
+                                  </p:childTnLst>
+                                </p:cTn>
+                              </p:par>
+                              <p:par>
+                                <p:cTn id="7" presetID="10" presetClass="entr" presetSubtype="0" fill="hold" grpId="0" nodeType="withEffect">
+                                  <p:stCondLst>
+                                    <p:cond delay="0"/>
+                                  </p:stCondLst>
+                                  <p:childTnLst>
+                                    <p:set>
+                                      <p:cBhvr>
+                                        <p:cTn id="107" dur="1" fill="hold">
+                                          <p:stCondLst>
+                                            <p:cond delay="0"/>
+                                          </p:stCondLst>
+                                        </p:cTn>
+                                        <p:tgtEl>
+                                          <p:spTgt spid="16"/>
+                                        </p:tgtEl>
+                                        <p:attrNameLst>
+                                          <p:attrName>style.visibility</p:attrName>
+                                        </p:attrNameLst>
+                                      </p:cBhvr>
+                                      <p:to>
+                                        <p:strVal val="visible"/>
+                                      </p:to>
+                                    </p:set>
+                                    <p:animEffect transition="in" filter="fade">
+                                      <p:cBhvr>
+                                        <p:cTn id="8" dur="500"/>
+                                        <p:tgtEl>
+                                          <p:spTgt spid="16"/>
+                                        </p:tgtEl>
+                                      </p:cBhvr>
+                                    </p:animEffect>
+                                  </p:childTnLst>
+                                </p:cTn>
+                              </p:par>
+                              <p:par>
+                                <p:cTn id="9" presetID="10" presetClass="entr" presetSubtype="0" fill="hold" grpId="0" nodeType="withEffect">
+                                  <p:stCondLst>
+                                    <p:cond delay="0"/>
+                                  </p:stCondLst>
+                                  <p:childTnLst>
+                                    <p:set>
+                                      <p:cBhvr>
+                                        <p:cTn id="109" dur="1" fill="hold">
+                                          <p:stCondLst>
+                                            <p:cond delay="0"/>
+                                          </p:stCondLst>
+                                        </p:cTn>
+                                        <p:tgtEl>
+                                          <p:spTgt spid="17"/>
+                                        </p:tgtEl>
+                                        <p:attrNameLst>
+                                          <p:attrName>style.visibility</p:attrName>
+                                        </p:attrNameLst>
+                                      </p:cBhvr>
+                                      <p:to>
+                                        <p:strVal val="visible"/>
+                                      </p:to>
+                                    </p:set>
+                                    <p:animEffect transition="in" filter="fade">
+                                      <p:cBhvr>
+                                        <p:cTn id="10" dur="500"/>
+                                        <p:tgtEl>
+                                          <p:spTgt spid="17"/>
+                                        </p:tgtEl>
+                                      </p:cBhvr>
+                                    </p:animEffect>
+                                  </p:childTnLst>
+                                </p:cTn>
+                              </p:par>
+                              <p:par>
+                                <p:cTn id="11" presetID="10" presetClass="entr" presetSubtype="0" fill="hold" grpId="0" nodeType="withEffect">
+                                  <p:stCondLst>
+                                    <p:cond delay="0"/>
+                                  </p:stCondLst>
+                                  <p:childTnLst>
+                                    <p:set>
+                                      <p:cBhvr>
+                                        <p:cTn id="111" dur="1" fill="hold">
+                                          <p:stCondLst>
+                                            <p:cond delay="0"/>
+                                          </p:stCondLst>
+                                        </p:cTn>
+                                        <p:tgtEl>
+                                          <p:spTgt spid="18"/>
+                                        </p:tgtEl>
+                                        <p:attrNameLst>
+                                          <p:attrName>style.visibility</p:attrName>
+                                        </p:attrNameLst>
+                                      </p:cBhvr>
+                                      <p:to>
+                                        <p:strVal val="visible"/>
+                                      </p:to>
+                                    </p:set>
+                                    <p:animEffect transition="in" filter="fade">
+                                      <p:cBhvr>
+                                        <p:cTn id="12" dur="500"/>
+                                        <p:tgtEl>
+                                          <p:spTgt spid="18"/>
+                                        </p:tgtEl>
+                                      </p:cBhvr>
+                                    </p:animEffect>
+                                  </p:childTnLst>
+                                </p:cTn>
+                              </p:par>
+                            </p:childTnLst>
+                          </p:cTn>
+                        </p:par>
+                      </p:childTnLst>
+                    </p:cTn>
+                  </p:par>
+                </p:childTnLst>
+              </p:cTn>
+              <p:prevCondLst>
+                <p:cond evt="onPrev" delay="0">
+                  <p:tgtEl>
+                    <p:sldTgt/>
+                  </p:tgtEl>
+                </p:cond>
+              </p:prevCondLst>
+              <p:nextCondLst>
+                <p:cond evt="onNext" delay="0">
+                  <p:tgtEl>
+                    <p:sldTgt/>
+                  </p:tgtEl>
+                </p:cond>
+              </p:nextCondLst>
+            </p:seq>
+          </p:childTnLst>
+        </p:cTn>
+      </p:par>
+    </p:tnLst>
+    <p:bldLst>
+      <p:bldP spid="3" grpId="0" animBg="1"/>
+      <p:bldP spid="16" grpId="0" animBg="1"/>
+      <p:bldP spid="17" grpId="0" animBg="1"/>
+      <p:bldP spid="18" grpId="0" animBg="1"/>
+    </p:bldLst>
+  </p:timing>
 </p:sld>
 </file>
 
@@ -27655,11 +28431,11 @@
                     <a:p>
                       <a:pPr indent="0" marL="0">
                         <a:lnSpc>
-                          <a:spcPts val="1680"/>
+                          <a:spcPts val="1579"/>
                         </a:lnSpc>
                         <a:buNone/>
                       </a:pPr>
-                      <a:endParaRPr lang="en-US" sz="1200" dirty="0">
+                      <a:endParaRPr lang="en-US" sz="1150" dirty="0">
                         <a:latin typeface="Tahoma" charset="0"/>
                         <a:ea typeface="Tahoma" charset="0"/>
                         <a:cs typeface="Tahoma" charset="0"/>
@@ -27703,12 +28479,12 @@
                     <a:p>
                       <a:pPr algn="ctr" indent="0" marL="0">
                         <a:lnSpc>
-                          <a:spcPts val="1680"/>
+                          <a:spcPts val="1579"/>
                         </a:lnSpc>
                         <a:buNone/>
                       </a:pPr>
                       <a:r>
-                        <a:rPr lang="en-US" sz="1200" b="1" dirty="0">
+                        <a:rPr lang="en-US" sz="1150" b="1" dirty="0">
                           <a:solidFill>
                             <a:srgbClr val="F6F4EF"/>
                           </a:solidFill>
@@ -27718,7 +28494,7 @@
                         </a:rPr>
                         <a:t>N</a:t>
                       </a:r>
-                      <a:endParaRPr lang="en-US" sz="1200" dirty="0">
+                      <a:endParaRPr lang="en-US" sz="1150" dirty="0">
                         <a:latin typeface="Tahoma" charset="0"/>
                         <a:ea typeface="Tahoma" charset="0"/>
                         <a:cs typeface="Tahoma" charset="0"/>
@@ -27768,12 +28544,12 @@
                     <a:p>
                       <a:pPr algn="ctr" indent="0" marL="0">
                         <a:lnSpc>
-                          <a:spcPts val="1680"/>
+                          <a:spcPts val="1579"/>
                         </a:lnSpc>
                         <a:buNone/>
                       </a:pPr>
                       <a:r>
-                        <a:rPr lang="en-US" sz="1200" b="1" dirty="0">
+                        <a:rPr lang="en-US" sz="1150" b="1" dirty="0">
                           <a:solidFill>
                             <a:srgbClr val="F6F4EF"/>
                           </a:solidFill>
@@ -27783,7 +28559,7 @@
                         </a:rPr>
                         <a:t>Mean</a:t>
                       </a:r>
-                      <a:endParaRPr lang="en-US" sz="1200" dirty="0">
+                      <a:endParaRPr lang="en-US" sz="1150" dirty="0">
                         <a:latin typeface="Tahoma" charset="0"/>
                         <a:ea typeface="Tahoma" charset="0"/>
                         <a:cs typeface="Tahoma" charset="0"/>
@@ -27833,12 +28609,12 @@
                     <a:p>
                       <a:pPr algn="ctr" indent="0" marL="0">
                         <a:lnSpc>
-                          <a:spcPts val="1680"/>
+                          <a:spcPts val="1579"/>
                         </a:lnSpc>
                         <a:buNone/>
                       </a:pPr>
                       <a:r>
-                        <a:rPr lang="en-US" sz="1200" b="1" dirty="0">
+                        <a:rPr lang="en-US" sz="1150" b="1" dirty="0">
                           <a:solidFill>
                             <a:srgbClr val="F6F4EF"/>
                           </a:solidFill>
@@ -27848,7 +28624,7 @@
                         </a:rPr>
                         <a:t>Std. Deviation</a:t>
                       </a:r>
-                      <a:endParaRPr lang="en-US" sz="1200" dirty="0">
+                      <a:endParaRPr lang="en-US" sz="1150" dirty="0">
                         <a:latin typeface="Tahoma" charset="0"/>
                         <a:ea typeface="Tahoma" charset="0"/>
                         <a:cs typeface="Tahoma" charset="0"/>
@@ -27898,12 +28674,12 @@
                     <a:p>
                       <a:pPr algn="ctr" indent="0" marL="0">
                         <a:lnSpc>
-                          <a:spcPts val="1680"/>
+                          <a:spcPts val="1579"/>
                         </a:lnSpc>
                         <a:buNone/>
                       </a:pPr>
                       <a:r>
-                        <a:rPr lang="en-US" sz="1200" b="1" dirty="0">
+                        <a:rPr lang="en-US" sz="1150" b="1" dirty="0">
                           <a:solidFill>
                             <a:srgbClr val="F6F4EF"/>
                           </a:solidFill>
@@ -27913,7 +28689,7 @@
                         </a:rPr>
                         <a:t>Std. Error Mean</a:t>
                       </a:r>
-                      <a:endParaRPr lang="en-US" sz="1200" dirty="0">
+                      <a:endParaRPr lang="en-US" sz="1150" dirty="0">
                         <a:latin typeface="Tahoma" charset="0"/>
                         <a:ea typeface="Tahoma" charset="0"/>
                         <a:cs typeface="Tahoma" charset="0"/>
@@ -27965,12 +28741,12 @@
                     <a:p>
                       <a:pPr indent="0" marL="0">
                         <a:lnSpc>
-                          <a:spcPts val="1680"/>
+                          <a:spcPts val="1579"/>
                         </a:lnSpc>
                         <a:buNone/>
                       </a:pPr>
                       <a:r>
-                        <a:rPr lang="en-US" sz="1200" dirty="0">
+                        <a:rPr lang="en-US" sz="1150" dirty="0">
                           <a:solidFill>
                             <a:srgbClr val="14233A"/>
                           </a:solidFill>
@@ -27980,7 +28756,7 @@
                         </a:rPr>
                         <a:t>wage</a:t>
                       </a:r>
-                      <a:endParaRPr lang="en-US" sz="1200" dirty="0">
+                      <a:endParaRPr lang="en-US" sz="1150" dirty="0">
                         <a:latin typeface="Tahoma" charset="0"/>
                         <a:ea typeface="Tahoma" charset="0"/>
                         <a:cs typeface="Tahoma" charset="0"/>
@@ -28030,12 +28806,12 @@
                     <a:p>
                       <a:pPr algn="ctr" indent="0" marL="0">
                         <a:lnSpc>
-                          <a:spcPts val="1680"/>
+                          <a:spcPts val="1579"/>
                         </a:lnSpc>
                         <a:buNone/>
                       </a:pPr>
                       <a:r>
-                        <a:rPr lang="en-US" sz="1200" dirty="0">
+                        <a:rPr lang="en-US" sz="1150" dirty="0">
                           <a:solidFill>
                             <a:srgbClr val="14233A"/>
                           </a:solidFill>
@@ -28045,7 +28821,7 @@
                         </a:rPr>
                         <a:t>10</a:t>
                       </a:r>
-                      <a:endParaRPr lang="en-US" sz="1200" dirty="0">
+                      <a:endParaRPr lang="en-US" sz="1150" dirty="0">
                         <a:latin typeface="Tahoma" charset="0"/>
                         <a:ea typeface="Tahoma" charset="0"/>
                         <a:cs typeface="Tahoma" charset="0"/>
@@ -28101,12 +28877,12 @@
                     <a:p>
                       <a:pPr algn="ctr" indent="0" marL="0">
                         <a:lnSpc>
-                          <a:spcPts val="1680"/>
+                          <a:spcPts val="1579"/>
                         </a:lnSpc>
                         <a:buNone/>
                       </a:pPr>
                       <a:r>
-                        <a:rPr lang="en-US" sz="1200" dirty="0">
+                        <a:rPr lang="en-US" sz="1150" dirty="0">
                           <a:solidFill>
                             <a:srgbClr val="14233A"/>
                           </a:solidFill>
@@ -28116,7 +28892,7 @@
                         </a:rPr>
                         <a:t>407.80</a:t>
                       </a:r>
-                      <a:endParaRPr lang="en-US" sz="1200" dirty="0">
+                      <a:endParaRPr lang="en-US" sz="1150" dirty="0">
                         <a:latin typeface="Tahoma" charset="0"/>
                         <a:ea typeface="Tahoma" charset="0"/>
                         <a:cs typeface="Tahoma" charset="0"/>
@@ -28172,12 +28948,12 @@
                     <a:p>
                       <a:pPr algn="ctr" indent="0" marL="0">
                         <a:lnSpc>
-                          <a:spcPts val="1680"/>
+                          <a:spcPts val="1579"/>
                         </a:lnSpc>
                         <a:buNone/>
                       </a:pPr>
                       <a:r>
-                        <a:rPr lang="en-US" sz="1200" dirty="0">
+                        <a:rPr lang="en-US" sz="1150" dirty="0">
                           <a:solidFill>
                             <a:srgbClr val="14233A"/>
                           </a:solidFill>
@@ -28187,7 +28963,7 @@
                         </a:rPr>
                         <a:t>161.560</a:t>
                       </a:r>
-                      <a:endParaRPr lang="en-US" sz="1200" dirty="0">
+                      <a:endParaRPr lang="en-US" sz="1150" dirty="0">
                         <a:latin typeface="Tahoma" charset="0"/>
                         <a:ea typeface="Tahoma" charset="0"/>
                         <a:cs typeface="Tahoma" charset="0"/>
@@ -28243,12 +29019,12 @@
                     <a:p>
                       <a:pPr algn="ctr" indent="0" marL="0">
                         <a:lnSpc>
-                          <a:spcPts val="1680"/>
+                          <a:spcPts val="1579"/>
                         </a:lnSpc>
                         <a:buNone/>
                       </a:pPr>
                       <a:r>
-                        <a:rPr lang="en-US" sz="1200" dirty="0">
+                        <a:rPr lang="en-US" sz="1150" dirty="0">
                           <a:solidFill>
                             <a:srgbClr val="14233A"/>
                           </a:solidFill>
@@ -28258,7 +29034,7 @@
                         </a:rPr>
                         <a:t>51.090</a:t>
                       </a:r>
-                      <a:endParaRPr lang="en-US" sz="1200" dirty="0">
+                      <a:endParaRPr lang="en-US" sz="1150" dirty="0">
                         <a:latin typeface="Tahoma" charset="0"/>
                         <a:ea typeface="Tahoma" charset="0"/>
                         <a:cs typeface="Tahoma" charset="0"/>
@@ -28520,11 +29296,11 @@
                     <a:p>
                       <a:pPr indent="0" marL="0">
                         <a:lnSpc>
-                          <a:spcPts val="1680"/>
+                          <a:spcPts val="1579"/>
                         </a:lnSpc>
                         <a:buNone/>
                       </a:pPr>
-                      <a:endParaRPr lang="en-US" sz="1200" dirty="0">
+                      <a:endParaRPr lang="en-US" sz="1150" dirty="0">
                         <a:latin typeface="Tahoma" charset="0"/>
                         <a:ea typeface="Tahoma" charset="0"/>
                         <a:cs typeface="Tahoma" charset="0"/>
@@ -28568,12 +29344,12 @@
                     <a:p>
                       <a:pPr algn="ctr" indent="0" marL="0">
                         <a:lnSpc>
-                          <a:spcPts val="1680"/>
+                          <a:spcPts val="1579"/>
                         </a:lnSpc>
                         <a:buNone/>
                       </a:pPr>
                       <a:r>
-                        <a:rPr lang="en-US" sz="1200" b="1" dirty="0">
+                        <a:rPr lang="en-US" sz="1150" b="1" dirty="0">
                           <a:solidFill>
                             <a:srgbClr val="F6F4EF"/>
                           </a:solidFill>
@@ -28583,7 +29359,7 @@
                         </a:rPr>
                         <a:t>t</a:t>
                       </a:r>
-                      <a:endParaRPr lang="en-US" sz="1200" dirty="0">
+                      <a:endParaRPr lang="en-US" sz="1150" dirty="0">
                         <a:latin typeface="Tahoma" charset="0"/>
                         <a:ea typeface="Tahoma" charset="0"/>
                         <a:cs typeface="Tahoma" charset="0"/>
@@ -28633,12 +29409,12 @@
                     <a:p>
                       <a:pPr algn="ctr" indent="0" marL="0">
                         <a:lnSpc>
-                          <a:spcPts val="1680"/>
+                          <a:spcPts val="1579"/>
                         </a:lnSpc>
                         <a:buNone/>
                       </a:pPr>
                       <a:r>
-                        <a:rPr lang="en-US" sz="1200" b="1" dirty="0">
+                        <a:rPr lang="en-US" sz="1150" b="1" dirty="0">
                           <a:solidFill>
                             <a:srgbClr val="F6F4EF"/>
                           </a:solidFill>
@@ -28648,7 +29424,7 @@
                         </a:rPr>
                         <a:t>df</a:t>
                       </a:r>
-                      <a:endParaRPr lang="en-US" sz="1200" dirty="0">
+                      <a:endParaRPr lang="en-US" sz="1150" dirty="0">
                         <a:latin typeface="Tahoma" charset="0"/>
                         <a:ea typeface="Tahoma" charset="0"/>
                         <a:cs typeface="Tahoma" charset="0"/>
@@ -28698,12 +29474,12 @@
                     <a:p>
                       <a:pPr algn="ctr" indent="0" marL="0">
                         <a:lnSpc>
-                          <a:spcPts val="1680"/>
+                          <a:spcPts val="1579"/>
                         </a:lnSpc>
                         <a:buNone/>
                       </a:pPr>
                       <a:r>
-                        <a:rPr lang="en-US" sz="1200" b="1" dirty="0">
+                        <a:rPr lang="en-US" sz="1150" b="1" dirty="0">
                           <a:solidFill>
                             <a:srgbClr val="F6F4EF"/>
                           </a:solidFill>
@@ -28713,7 +29489,7 @@
                         </a:rPr>
                         <a:t>Sig. (2-tailed)</a:t>
                       </a:r>
-                      <a:endParaRPr lang="en-US" sz="1200" dirty="0">
+                      <a:endParaRPr lang="en-US" sz="1150" dirty="0">
                         <a:latin typeface="Tahoma" charset="0"/>
                         <a:ea typeface="Tahoma" charset="0"/>
                         <a:cs typeface="Tahoma" charset="0"/>
@@ -28763,12 +29539,12 @@
                     <a:p>
                       <a:pPr algn="ctr" indent="0" marL="0">
                         <a:lnSpc>
-                          <a:spcPts val="1680"/>
+                          <a:spcPts val="1579"/>
                         </a:lnSpc>
                         <a:buNone/>
                       </a:pPr>
                       <a:r>
-                        <a:rPr lang="en-US" sz="1200" b="1" dirty="0">
+                        <a:rPr lang="en-US" sz="1150" b="1" dirty="0">
                           <a:solidFill>
                             <a:srgbClr val="F6F4EF"/>
                           </a:solidFill>
@@ -28778,7 +29554,7 @@
                         </a:rPr>
                         <a:t>Mean Difference</a:t>
                       </a:r>
-                      <a:endParaRPr lang="en-US" sz="1200" dirty="0">
+                      <a:endParaRPr lang="en-US" sz="1150" dirty="0">
                         <a:latin typeface="Tahoma" charset="0"/>
                         <a:ea typeface="Tahoma" charset="0"/>
                         <a:cs typeface="Tahoma" charset="0"/>
@@ -28828,12 +29604,12 @@
                     <a:p>
                       <a:pPr algn="ctr" indent="0" marL="0">
                         <a:lnSpc>
-                          <a:spcPts val="1680"/>
+                          <a:spcPts val="1579"/>
                         </a:lnSpc>
                         <a:buNone/>
                       </a:pPr>
                       <a:r>
-                        <a:rPr lang="en-US" sz="1200" b="1" dirty="0">
+                        <a:rPr lang="en-US" sz="1150" b="1" dirty="0">
                           <a:solidFill>
                             <a:srgbClr val="F6F4EF"/>
                           </a:solidFill>
@@ -28843,7 +29619,7 @@
                         </a:rPr>
                         <a:t>99% CI Lower</a:t>
                       </a:r>
-                      <a:endParaRPr lang="en-US" sz="1200" dirty="0">
+                      <a:endParaRPr lang="en-US" sz="1150" dirty="0">
                         <a:latin typeface="Tahoma" charset="0"/>
                         <a:ea typeface="Tahoma" charset="0"/>
                         <a:cs typeface="Tahoma" charset="0"/>
@@ -28893,12 +29669,12 @@
                     <a:p>
                       <a:pPr algn="ctr" indent="0" marL="0">
                         <a:lnSpc>
-                          <a:spcPts val="1680"/>
+                          <a:spcPts val="1579"/>
                         </a:lnSpc>
                         <a:buNone/>
                       </a:pPr>
                       <a:r>
-                        <a:rPr lang="en-US" sz="1200" b="1" dirty="0">
+                        <a:rPr lang="en-US" sz="1150" b="1" dirty="0">
                           <a:solidFill>
                             <a:srgbClr val="F6F4EF"/>
                           </a:solidFill>
@@ -28908,7 +29684,7 @@
                         </a:rPr>
                         <a:t>99% CI Upper</a:t>
                       </a:r>
-                      <a:endParaRPr lang="en-US" sz="1200" dirty="0">
+                      <a:endParaRPr lang="en-US" sz="1150" dirty="0">
                         <a:latin typeface="Tahoma" charset="0"/>
                         <a:ea typeface="Tahoma" charset="0"/>
                         <a:cs typeface="Tahoma" charset="0"/>
@@ -28960,12 +29736,12 @@
                     <a:p>
                       <a:pPr indent="0" marL="0">
                         <a:lnSpc>
-                          <a:spcPts val="1680"/>
+                          <a:spcPts val="1579"/>
                         </a:lnSpc>
                         <a:buNone/>
                       </a:pPr>
                       <a:r>
-                        <a:rPr lang="en-US" sz="1200" dirty="0">
+                        <a:rPr lang="en-US" sz="1150" dirty="0">
                           <a:solidFill>
                             <a:srgbClr val="14233A"/>
                           </a:solidFill>
@@ -28975,7 +29751,7 @@
                         </a:rPr>
                         <a:t>wage</a:t>
                       </a:r>
-                      <a:endParaRPr lang="en-US" sz="1200" dirty="0">
+                      <a:endParaRPr lang="en-US" sz="1150" dirty="0">
                         <a:latin typeface="Tahoma" charset="0"/>
                         <a:ea typeface="Tahoma" charset="0"/>
                         <a:cs typeface="Tahoma" charset="0"/>
@@ -29025,12 +29801,12 @@
                     <a:p>
                       <a:pPr algn="ctr" indent="0" marL="0">
                         <a:lnSpc>
-                          <a:spcPts val="1680"/>
+                          <a:spcPts val="1579"/>
                         </a:lnSpc>
                         <a:buNone/>
                       </a:pPr>
                       <a:r>
-                        <a:rPr lang="en-US" sz="1200" dirty="0">
+                        <a:rPr lang="en-US" sz="1150" dirty="0">
                           <a:solidFill>
                             <a:srgbClr val="14233A"/>
                           </a:solidFill>
@@ -29040,7 +29816,7 @@
                         </a:rPr>
                         <a:t>2.110</a:t>
                       </a:r>
-                      <a:endParaRPr lang="en-US" sz="1200" dirty="0">
+                      <a:endParaRPr lang="en-US" sz="1150" dirty="0">
                         <a:latin typeface="Tahoma" charset="0"/>
                         <a:ea typeface="Tahoma" charset="0"/>
                         <a:cs typeface="Tahoma" charset="0"/>
@@ -29096,12 +29872,12 @@
                     <a:p>
                       <a:pPr algn="ctr" indent="0" marL="0">
                         <a:lnSpc>
-                          <a:spcPts val="1680"/>
+                          <a:spcPts val="1579"/>
                         </a:lnSpc>
                         <a:buNone/>
                       </a:pPr>
                       <a:r>
-                        <a:rPr lang="en-US" sz="1200" dirty="0">
+                        <a:rPr lang="en-US" sz="1150" dirty="0">
                           <a:solidFill>
                             <a:srgbClr val="14233A"/>
                           </a:solidFill>
@@ -29111,7 +29887,7 @@
                         </a:rPr>
                         <a:t>9</a:t>
                       </a:r>
-                      <a:endParaRPr lang="en-US" sz="1200" dirty="0">
+                      <a:endParaRPr lang="en-US" sz="1150" dirty="0">
                         <a:latin typeface="Tahoma" charset="0"/>
                         <a:ea typeface="Tahoma" charset="0"/>
                         <a:cs typeface="Tahoma" charset="0"/>
@@ -29167,12 +29943,12 @@
                     <a:p>
                       <a:pPr algn="ctr" indent="0" marL="0">
                         <a:lnSpc>
-                          <a:spcPts val="1680"/>
+                          <a:spcPts val="1579"/>
                         </a:lnSpc>
                         <a:buNone/>
                       </a:pPr>
                       <a:r>
-                        <a:rPr lang="en-US" sz="1200" dirty="0">
+                        <a:rPr lang="en-US" sz="1150" dirty="0">
                           <a:solidFill>
                             <a:srgbClr val="9A5B00"/>
                           </a:solidFill>
@@ -29182,7 +29958,7 @@
                         </a:rPr>
                         <a:t>.064</a:t>
                       </a:r>
-                      <a:endParaRPr lang="en-US" sz="1200" dirty="0">
+                      <a:endParaRPr lang="en-US" sz="1150" dirty="0">
                         <a:latin typeface="Tahoma" charset="0"/>
                         <a:ea typeface="Tahoma" charset="0"/>
                         <a:cs typeface="Tahoma" charset="0"/>
@@ -29238,12 +30014,12 @@
                     <a:p>
                       <a:pPr algn="ctr" indent="0" marL="0">
                         <a:lnSpc>
-                          <a:spcPts val="1680"/>
+                          <a:spcPts val="1579"/>
                         </a:lnSpc>
                         <a:buNone/>
                       </a:pPr>
                       <a:r>
-                        <a:rPr lang="en-US" sz="1200" dirty="0">
+                        <a:rPr lang="en-US" sz="1150" dirty="0">
                           <a:solidFill>
                             <a:srgbClr val="14233A"/>
                           </a:solidFill>
@@ -29253,7 +30029,7 @@
                         </a:rPr>
                         <a:t>107.800</a:t>
                       </a:r>
-                      <a:endParaRPr lang="en-US" sz="1200" dirty="0">
+                      <a:endParaRPr lang="en-US" sz="1150" dirty="0">
                         <a:latin typeface="Tahoma" charset="0"/>
                         <a:ea typeface="Tahoma" charset="0"/>
                         <a:cs typeface="Tahoma" charset="0"/>
@@ -29309,12 +30085,12 @@
                     <a:p>
                       <a:pPr algn="ctr" indent="0" marL="0">
                         <a:lnSpc>
-                          <a:spcPts val="1680"/>
+                          <a:spcPts val="1579"/>
                         </a:lnSpc>
                         <a:buNone/>
                       </a:pPr>
                       <a:r>
-                        <a:rPr lang="en-US" sz="1200" dirty="0">
+                        <a:rPr lang="en-US" sz="1150" dirty="0">
                           <a:solidFill>
                             <a:srgbClr val="14233A"/>
                           </a:solidFill>
@@ -29324,7 +30100,7 @@
                         </a:rPr>
                         <a:t>-58.23</a:t>
                       </a:r>
-                      <a:endParaRPr lang="en-US" sz="1200" dirty="0">
+                      <a:endParaRPr lang="en-US" sz="1150" dirty="0">
                         <a:latin typeface="Tahoma" charset="0"/>
                         <a:ea typeface="Tahoma" charset="0"/>
                         <a:cs typeface="Tahoma" charset="0"/>
@@ -29380,12 +30156,12 @@
                     <a:p>
                       <a:pPr algn="ctr" indent="0" marL="0">
                         <a:lnSpc>
-                          <a:spcPts val="1680"/>
+                          <a:spcPts val="1579"/>
                         </a:lnSpc>
                         <a:buNone/>
                       </a:pPr>
                       <a:r>
-                        <a:rPr lang="en-US" sz="1200" dirty="0">
+                        <a:rPr lang="en-US" sz="1150" dirty="0">
                           <a:solidFill>
                             <a:srgbClr val="14233A"/>
                           </a:solidFill>
@@ -29395,7 +30171,7 @@
                         </a:rPr>
                         <a:t>273.83</a:t>
                       </a:r>
-                      <a:endParaRPr lang="en-US" sz="1200" dirty="0">
+                      <a:endParaRPr lang="en-US" sz="1150" dirty="0">
                         <a:latin typeface="Tahoma" charset="0"/>
                         <a:ea typeface="Tahoma" charset="0"/>
                         <a:cs typeface="Tahoma" charset="0"/>
@@ -29641,12 +30417,12 @@
           <a:p>
             <a:pPr algn="l" indent="0" marL="0">
               <a:lnSpc>
-                <a:spcPts val="1820"/>
+                <a:spcPts val="1765"/>
               </a:lnSpc>
               <a:buNone/>
             </a:pPr>
             <a:r>
-              <a:rPr lang="en-US" sz="1400" dirty="0">
+              <a:rPr lang="en-US" sz="1350" dirty="0">
                 <a:solidFill>
                   <a:srgbClr val="14233A"/>
                 </a:solidFill>
@@ -29656,7 +30432,7 @@
               </a:rPr>
               <a:t>Quantitative, Scale</a:t>
             </a:r>
-            <a:endParaRPr lang="en-US" sz="1400" dirty="0"/>
+            <a:endParaRPr lang="en-US" sz="1350" dirty="0"/>
           </a:p>
         </p:txBody>
       </p:sp>
@@ -29786,12 +30562,12 @@
           <a:p>
             <a:pPr algn="l" indent="0" marL="0">
               <a:lnSpc>
-                <a:spcPts val="1820"/>
+                <a:spcPts val="1711"/>
               </a:lnSpc>
               <a:buNone/>
             </a:pPr>
             <a:r>
-              <a:rPr lang="en-US" sz="1400" dirty="0">
+              <a:rPr lang="en-US" sz="1300" dirty="0">
                 <a:solidFill>
                   <a:srgbClr val="14233A"/>
                 </a:solidFill>
@@ -29801,7 +30577,7 @@
               </a:rPr>
               <a:t>Qualitative, Nominal</a:t>
             </a:r>
-            <a:endParaRPr lang="en-US" sz="1400" dirty="0"/>
+            <a:endParaRPr lang="en-US" sz="1300" dirty="0"/>
           </a:p>
         </p:txBody>
       </p:sp>
@@ -29905,12 +30681,12 @@
           <a:p>
             <a:pPr algn="l" indent="0" marL="0">
               <a:lnSpc>
-                <a:spcPts val="1820"/>
+                <a:spcPts val="1711"/>
               </a:lnSpc>
               <a:buNone/>
             </a:pPr>
             <a:r>
-              <a:rPr lang="en-US" sz="1400" dirty="0">
+              <a:rPr lang="en-US" sz="1300" dirty="0">
                 <a:solidFill>
                   <a:srgbClr val="14233A"/>
                 </a:solidFill>
@@ -29920,7 +30696,7 @@
               </a:rPr>
               <a:t>Qualitative, Ordinal</a:t>
             </a:r>
-            <a:endParaRPr lang="en-US" sz="1400" dirty="0"/>
+            <a:endParaRPr lang="en-US" sz="1300" dirty="0"/>
           </a:p>
         </p:txBody>
       </p:sp>
@@ -30050,12 +30826,12 @@
           <a:p>
             <a:pPr algn="l" indent="0" marL="0">
               <a:lnSpc>
-                <a:spcPts val="1820"/>
+                <a:spcPts val="1711"/>
               </a:lnSpc>
               <a:buNone/>
             </a:pPr>
             <a:r>
-              <a:rPr lang="en-US" sz="1400" dirty="0">
+              <a:rPr lang="en-US" sz="1300" dirty="0">
                 <a:solidFill>
                   <a:srgbClr val="14233A"/>
                 </a:solidFill>
@@ -30065,7 +30841,7 @@
               </a:rPr>
               <a:t>Quantitative, Nominal</a:t>
             </a:r>
-            <a:endParaRPr lang="en-US" sz="1400" dirty="0"/>
+            <a:endParaRPr lang="en-US" sz="1300" dirty="0"/>
           </a:p>
         </p:txBody>
       </p:sp>
@@ -32692,11 +33468,11 @@
                     <a:p>
                       <a:pPr indent="0" marL="0">
                         <a:lnSpc>
-                          <a:spcPts val="1680"/>
+                          <a:spcPts val="1579"/>
                         </a:lnSpc>
                         <a:buNone/>
                       </a:pPr>
-                      <a:endParaRPr lang="en-US" sz="1200" dirty="0">
+                      <a:endParaRPr lang="en-US" sz="1150" dirty="0">
                         <a:latin typeface="Tahoma" charset="0"/>
                         <a:ea typeface="Tahoma" charset="0"/>
                         <a:cs typeface="Tahoma" charset="0"/>
@@ -32740,12 +33516,12 @@
                     <a:p>
                       <a:pPr algn="ctr" indent="0" marL="0">
                         <a:lnSpc>
-                          <a:spcPts val="1680"/>
+                          <a:spcPts val="1579"/>
                         </a:lnSpc>
                         <a:buNone/>
                       </a:pPr>
                       <a:r>
-                        <a:rPr lang="en-US" sz="1200" b="1" dirty="0">
+                        <a:rPr lang="en-US" sz="1150" b="1" dirty="0">
                           <a:solidFill>
                             <a:srgbClr val="F6F4EF"/>
                           </a:solidFill>
@@ -32755,7 +33531,7 @@
                         </a:rPr>
                         <a:t>N</a:t>
                       </a:r>
-                      <a:endParaRPr lang="en-US" sz="1200" dirty="0">
+                      <a:endParaRPr lang="en-US" sz="1150" dirty="0">
                         <a:latin typeface="Tahoma" charset="0"/>
                         <a:ea typeface="Tahoma" charset="0"/>
                         <a:cs typeface="Tahoma" charset="0"/>
@@ -32805,12 +33581,12 @@
                     <a:p>
                       <a:pPr algn="ctr" indent="0" marL="0">
                         <a:lnSpc>
-                          <a:spcPts val="1680"/>
+                          <a:spcPts val="1579"/>
                         </a:lnSpc>
                         <a:buNone/>
                       </a:pPr>
                       <a:r>
-                        <a:rPr lang="en-US" sz="1200" b="1" dirty="0">
+                        <a:rPr lang="en-US" sz="1150" b="1" dirty="0">
                           <a:solidFill>
                             <a:srgbClr val="F6F4EF"/>
                           </a:solidFill>
@@ -32820,7 +33596,7 @@
                         </a:rPr>
                         <a:t>Mean</a:t>
                       </a:r>
-                      <a:endParaRPr lang="en-US" sz="1200" dirty="0">
+                      <a:endParaRPr lang="en-US" sz="1150" dirty="0">
                         <a:latin typeface="Tahoma" charset="0"/>
                         <a:ea typeface="Tahoma" charset="0"/>
                         <a:cs typeface="Tahoma" charset="0"/>
@@ -32870,12 +33646,12 @@
                     <a:p>
                       <a:pPr algn="ctr" indent="0" marL="0">
                         <a:lnSpc>
-                          <a:spcPts val="1680"/>
+                          <a:spcPts val="1579"/>
                         </a:lnSpc>
                         <a:buNone/>
                       </a:pPr>
                       <a:r>
-                        <a:rPr lang="en-US" sz="1200" b="1" dirty="0">
+                        <a:rPr lang="en-US" sz="1150" b="1" dirty="0">
                           <a:solidFill>
                             <a:srgbClr val="F6F4EF"/>
                           </a:solidFill>
@@ -32885,7 +33661,7 @@
                         </a:rPr>
                         <a:t>Std. Deviation</a:t>
                       </a:r>
-                      <a:endParaRPr lang="en-US" sz="1200" dirty="0">
+                      <a:endParaRPr lang="en-US" sz="1150" dirty="0">
                         <a:latin typeface="Tahoma" charset="0"/>
                         <a:ea typeface="Tahoma" charset="0"/>
                         <a:cs typeface="Tahoma" charset="0"/>
@@ -32935,12 +33711,12 @@
                     <a:p>
                       <a:pPr algn="ctr" indent="0" marL="0">
                         <a:lnSpc>
-                          <a:spcPts val="1680"/>
+                          <a:spcPts val="1579"/>
                         </a:lnSpc>
                         <a:buNone/>
                       </a:pPr>
                       <a:r>
-                        <a:rPr lang="en-US" sz="1200" b="1" dirty="0">
+                        <a:rPr lang="en-US" sz="1150" b="1" dirty="0">
                           <a:solidFill>
                             <a:srgbClr val="F6F4EF"/>
                           </a:solidFill>
@@ -32950,7 +33726,7 @@
                         </a:rPr>
                         <a:t>Std. Error Mean</a:t>
                       </a:r>
-                      <a:endParaRPr lang="en-US" sz="1200" dirty="0">
+                      <a:endParaRPr lang="en-US" sz="1150" dirty="0">
                         <a:latin typeface="Tahoma" charset="0"/>
                         <a:ea typeface="Tahoma" charset="0"/>
                         <a:cs typeface="Tahoma" charset="0"/>
@@ -33002,12 +33778,12 @@
                     <a:p>
                       <a:pPr indent="0" marL="0">
                         <a:lnSpc>
-                          <a:spcPts val="1680"/>
+                          <a:spcPts val="1579"/>
                         </a:lnSpc>
                         <a:buNone/>
                       </a:pPr>
                       <a:r>
-                        <a:rPr lang="en-US" sz="1200" dirty="0">
+                        <a:rPr lang="en-US" sz="1150" dirty="0">
                           <a:solidFill>
                             <a:srgbClr val="14233A"/>
                           </a:solidFill>
@@ -33017,7 +33793,7 @@
                         </a:rPr>
                         <a:t>wage</a:t>
                       </a:r>
-                      <a:endParaRPr lang="en-US" sz="1200" dirty="0">
+                      <a:endParaRPr lang="en-US" sz="1150" dirty="0">
                         <a:latin typeface="Tahoma" charset="0"/>
                         <a:ea typeface="Tahoma" charset="0"/>
                         <a:cs typeface="Tahoma" charset="0"/>
@@ -33067,12 +33843,12 @@
                     <a:p>
                       <a:pPr algn="ctr" indent="0" marL="0">
                         <a:lnSpc>
-                          <a:spcPts val="1680"/>
+                          <a:spcPts val="1579"/>
                         </a:lnSpc>
                         <a:buNone/>
                       </a:pPr>
                       <a:r>
-                        <a:rPr lang="en-US" sz="1200" dirty="0">
+                        <a:rPr lang="en-US" sz="1150" dirty="0">
                           <a:solidFill>
                             <a:srgbClr val="14233A"/>
                           </a:solidFill>
@@ -33082,7 +33858,7 @@
                         </a:rPr>
                         <a:t>10</a:t>
                       </a:r>
-                      <a:endParaRPr lang="en-US" sz="1200" dirty="0">
+                      <a:endParaRPr lang="en-US" sz="1150" dirty="0">
                         <a:latin typeface="Tahoma" charset="0"/>
                         <a:ea typeface="Tahoma" charset="0"/>
                         <a:cs typeface="Tahoma" charset="0"/>
@@ -33138,12 +33914,12 @@
                     <a:p>
                       <a:pPr algn="ctr" indent="0" marL="0">
                         <a:lnSpc>
-                          <a:spcPts val="1680"/>
+                          <a:spcPts val="1579"/>
                         </a:lnSpc>
                         <a:buNone/>
                       </a:pPr>
                       <a:r>
-                        <a:rPr lang="en-US" sz="1200" dirty="0">
+                        <a:rPr lang="en-US" sz="1150" dirty="0">
                           <a:solidFill>
                             <a:srgbClr val="14233A"/>
                           </a:solidFill>
@@ -33153,7 +33929,7 @@
                         </a:rPr>
                         <a:t>407.80</a:t>
                       </a:r>
-                      <a:endParaRPr lang="en-US" sz="1200" dirty="0">
+                      <a:endParaRPr lang="en-US" sz="1150" dirty="0">
                         <a:latin typeface="Tahoma" charset="0"/>
                         <a:ea typeface="Tahoma" charset="0"/>
                         <a:cs typeface="Tahoma" charset="0"/>
@@ -33209,12 +33985,12 @@
                     <a:p>
                       <a:pPr algn="ctr" indent="0" marL="0">
                         <a:lnSpc>
-                          <a:spcPts val="1680"/>
+                          <a:spcPts val="1579"/>
                         </a:lnSpc>
                         <a:buNone/>
                       </a:pPr>
                       <a:r>
-                        <a:rPr lang="en-US" sz="1200" dirty="0">
+                        <a:rPr lang="en-US" sz="1150" dirty="0">
                           <a:solidFill>
                             <a:srgbClr val="14233A"/>
                           </a:solidFill>
@@ -33224,7 +34000,7 @@
                         </a:rPr>
                         <a:t>161.560</a:t>
                       </a:r>
-                      <a:endParaRPr lang="en-US" sz="1200" dirty="0">
+                      <a:endParaRPr lang="en-US" sz="1150" dirty="0">
                         <a:latin typeface="Tahoma" charset="0"/>
                         <a:ea typeface="Tahoma" charset="0"/>
                         <a:cs typeface="Tahoma" charset="0"/>
@@ -33280,12 +34056,12 @@
                     <a:p>
                       <a:pPr algn="ctr" indent="0" marL="0">
                         <a:lnSpc>
-                          <a:spcPts val="1680"/>
+                          <a:spcPts val="1579"/>
                         </a:lnSpc>
                         <a:buNone/>
                       </a:pPr>
                       <a:r>
-                        <a:rPr lang="en-US" sz="1200" dirty="0">
+                        <a:rPr lang="en-US" sz="1150" dirty="0">
                           <a:solidFill>
                             <a:srgbClr val="14233A"/>
                           </a:solidFill>
@@ -33295,7 +34071,7 @@
                         </a:rPr>
                         <a:t>51.090</a:t>
                       </a:r>
-                      <a:endParaRPr lang="en-US" sz="1200" dirty="0">
+                      <a:endParaRPr lang="en-US" sz="1150" dirty="0">
                         <a:latin typeface="Tahoma" charset="0"/>
                         <a:ea typeface="Tahoma" charset="0"/>
                         <a:cs typeface="Tahoma" charset="0"/>
@@ -33557,11 +34333,11 @@
                     <a:p>
                       <a:pPr indent="0" marL="0">
                         <a:lnSpc>
-                          <a:spcPts val="1680"/>
+                          <a:spcPts val="1579"/>
                         </a:lnSpc>
                         <a:buNone/>
                       </a:pPr>
-                      <a:endParaRPr lang="en-US" sz="1200" dirty="0">
+                      <a:endParaRPr lang="en-US" sz="1150" dirty="0">
                         <a:latin typeface="Tahoma" charset="0"/>
                         <a:ea typeface="Tahoma" charset="0"/>
                         <a:cs typeface="Tahoma" charset="0"/>
@@ -33605,12 +34381,12 @@
                     <a:p>
                       <a:pPr algn="ctr" indent="0" marL="0">
                         <a:lnSpc>
-                          <a:spcPts val="1680"/>
+                          <a:spcPts val="1579"/>
                         </a:lnSpc>
                         <a:buNone/>
                       </a:pPr>
                       <a:r>
-                        <a:rPr lang="en-US" sz="1200" b="1" dirty="0">
+                        <a:rPr lang="en-US" sz="1150" b="1" dirty="0">
                           <a:solidFill>
                             <a:srgbClr val="F6F4EF"/>
                           </a:solidFill>
@@ -33620,7 +34396,7 @@
                         </a:rPr>
                         <a:t>t</a:t>
                       </a:r>
-                      <a:endParaRPr lang="en-US" sz="1200" dirty="0">
+                      <a:endParaRPr lang="en-US" sz="1150" dirty="0">
                         <a:latin typeface="Tahoma" charset="0"/>
                         <a:ea typeface="Tahoma" charset="0"/>
                         <a:cs typeface="Tahoma" charset="0"/>
@@ -33670,12 +34446,12 @@
                     <a:p>
                       <a:pPr algn="ctr" indent="0" marL="0">
                         <a:lnSpc>
-                          <a:spcPts val="1680"/>
+                          <a:spcPts val="1579"/>
                         </a:lnSpc>
                         <a:buNone/>
                       </a:pPr>
                       <a:r>
-                        <a:rPr lang="en-US" sz="1200" b="1" dirty="0">
+                        <a:rPr lang="en-US" sz="1150" b="1" dirty="0">
                           <a:solidFill>
                             <a:srgbClr val="F6F4EF"/>
                           </a:solidFill>
@@ -33685,7 +34461,7 @@
                         </a:rPr>
                         <a:t>df</a:t>
                       </a:r>
-                      <a:endParaRPr lang="en-US" sz="1200" dirty="0">
+                      <a:endParaRPr lang="en-US" sz="1150" dirty="0">
                         <a:latin typeface="Tahoma" charset="0"/>
                         <a:ea typeface="Tahoma" charset="0"/>
                         <a:cs typeface="Tahoma" charset="0"/>
@@ -33735,12 +34511,12 @@
                     <a:p>
                       <a:pPr algn="ctr" indent="0" marL="0">
                         <a:lnSpc>
-                          <a:spcPts val="1680"/>
+                          <a:spcPts val="1579"/>
                         </a:lnSpc>
                         <a:buNone/>
                       </a:pPr>
                       <a:r>
-                        <a:rPr lang="en-US" sz="1200" b="1" dirty="0">
+                        <a:rPr lang="en-US" sz="1150" b="1" dirty="0">
                           <a:solidFill>
                             <a:srgbClr val="F6F4EF"/>
                           </a:solidFill>
@@ -33750,7 +34526,7 @@
                         </a:rPr>
                         <a:t>Sig. (2-tailed)</a:t>
                       </a:r>
-                      <a:endParaRPr lang="en-US" sz="1200" dirty="0">
+                      <a:endParaRPr lang="en-US" sz="1150" dirty="0">
                         <a:latin typeface="Tahoma" charset="0"/>
                         <a:ea typeface="Tahoma" charset="0"/>
                         <a:cs typeface="Tahoma" charset="0"/>
@@ -33800,12 +34576,12 @@
                     <a:p>
                       <a:pPr algn="ctr" indent="0" marL="0">
                         <a:lnSpc>
-                          <a:spcPts val="1680"/>
+                          <a:spcPts val="1579"/>
                         </a:lnSpc>
                         <a:buNone/>
                       </a:pPr>
                       <a:r>
-                        <a:rPr lang="en-US" sz="1200" b="1" dirty="0">
+                        <a:rPr lang="en-US" sz="1150" b="1" dirty="0">
                           <a:solidFill>
                             <a:srgbClr val="F6F4EF"/>
                           </a:solidFill>
@@ -33815,7 +34591,7 @@
                         </a:rPr>
                         <a:t>Mean Difference</a:t>
                       </a:r>
-                      <a:endParaRPr lang="en-US" sz="1200" dirty="0">
+                      <a:endParaRPr lang="en-US" sz="1150" dirty="0">
                         <a:latin typeface="Tahoma" charset="0"/>
                         <a:ea typeface="Tahoma" charset="0"/>
                         <a:cs typeface="Tahoma" charset="0"/>
@@ -33865,12 +34641,12 @@
                     <a:p>
                       <a:pPr algn="ctr" indent="0" marL="0">
                         <a:lnSpc>
-                          <a:spcPts val="1680"/>
+                          <a:spcPts val="1579"/>
                         </a:lnSpc>
                         <a:buNone/>
                       </a:pPr>
                       <a:r>
-                        <a:rPr lang="en-US" sz="1200" b="1" dirty="0">
+                        <a:rPr lang="en-US" sz="1150" b="1" dirty="0">
                           <a:solidFill>
                             <a:srgbClr val="F6F4EF"/>
                           </a:solidFill>
@@ -33880,7 +34656,7 @@
                         </a:rPr>
                         <a:t>99% CI Lower</a:t>
                       </a:r>
-                      <a:endParaRPr lang="en-US" sz="1200" dirty="0">
+                      <a:endParaRPr lang="en-US" sz="1150" dirty="0">
                         <a:latin typeface="Tahoma" charset="0"/>
                         <a:ea typeface="Tahoma" charset="0"/>
                         <a:cs typeface="Tahoma" charset="0"/>
@@ -33930,12 +34706,12 @@
                     <a:p>
                       <a:pPr algn="ctr" indent="0" marL="0">
                         <a:lnSpc>
-                          <a:spcPts val="1680"/>
+                          <a:spcPts val="1579"/>
                         </a:lnSpc>
                         <a:buNone/>
                       </a:pPr>
                       <a:r>
-                        <a:rPr lang="en-US" sz="1200" b="1" dirty="0">
+                        <a:rPr lang="en-US" sz="1150" b="1" dirty="0">
                           <a:solidFill>
                             <a:srgbClr val="F6F4EF"/>
                           </a:solidFill>
@@ -33945,7 +34721,7 @@
                         </a:rPr>
                         <a:t>99% CI Upper</a:t>
                       </a:r>
-                      <a:endParaRPr lang="en-US" sz="1200" dirty="0">
+                      <a:endParaRPr lang="en-US" sz="1150" dirty="0">
                         <a:latin typeface="Tahoma" charset="0"/>
                         <a:ea typeface="Tahoma" charset="0"/>
                         <a:cs typeface="Tahoma" charset="0"/>
@@ -33997,12 +34773,12 @@
                     <a:p>
                       <a:pPr indent="0" marL="0">
                         <a:lnSpc>
-                          <a:spcPts val="1680"/>
+                          <a:spcPts val="1579"/>
                         </a:lnSpc>
                         <a:buNone/>
                       </a:pPr>
                       <a:r>
-                        <a:rPr lang="en-US" sz="1200" dirty="0">
+                        <a:rPr lang="en-US" sz="1150" dirty="0">
                           <a:solidFill>
                             <a:srgbClr val="14233A"/>
                           </a:solidFill>
@@ -34012,7 +34788,7 @@
                         </a:rPr>
                         <a:t>wage</a:t>
                       </a:r>
-                      <a:endParaRPr lang="en-US" sz="1200" dirty="0">
+                      <a:endParaRPr lang="en-US" sz="1150" dirty="0">
                         <a:latin typeface="Tahoma" charset="0"/>
                         <a:ea typeface="Tahoma" charset="0"/>
                         <a:cs typeface="Tahoma" charset="0"/>
@@ -34062,12 +34838,12 @@
                     <a:p>
                       <a:pPr algn="ctr" indent="0" marL="0">
                         <a:lnSpc>
-                          <a:spcPts val="1680"/>
+                          <a:spcPts val="1579"/>
                         </a:lnSpc>
                         <a:buNone/>
                       </a:pPr>
                       <a:r>
-                        <a:rPr lang="en-US" sz="1200" dirty="0">
+                        <a:rPr lang="en-US" sz="1150" dirty="0">
                           <a:solidFill>
                             <a:srgbClr val="14233A"/>
                           </a:solidFill>
@@ -34077,7 +34853,7 @@
                         </a:rPr>
                         <a:t>2.110</a:t>
                       </a:r>
-                      <a:endParaRPr lang="en-US" sz="1200" dirty="0">
+                      <a:endParaRPr lang="en-US" sz="1150" dirty="0">
                         <a:latin typeface="Tahoma" charset="0"/>
                         <a:ea typeface="Tahoma" charset="0"/>
                         <a:cs typeface="Tahoma" charset="0"/>
@@ -34133,12 +34909,12 @@
                     <a:p>
                       <a:pPr algn="ctr" indent="0" marL="0">
                         <a:lnSpc>
-                          <a:spcPts val="1680"/>
+                          <a:spcPts val="1579"/>
                         </a:lnSpc>
                         <a:buNone/>
                       </a:pPr>
                       <a:r>
-                        <a:rPr lang="en-US" sz="1200" dirty="0">
+                        <a:rPr lang="en-US" sz="1150" dirty="0">
                           <a:solidFill>
                             <a:srgbClr val="14233A"/>
                           </a:solidFill>
@@ -34148,7 +34924,7 @@
                         </a:rPr>
                         <a:t>9</a:t>
                       </a:r>
-                      <a:endParaRPr lang="en-US" sz="1200" dirty="0">
+                      <a:endParaRPr lang="en-US" sz="1150" dirty="0">
                         <a:latin typeface="Tahoma" charset="0"/>
                         <a:ea typeface="Tahoma" charset="0"/>
                         <a:cs typeface="Tahoma" charset="0"/>
@@ -34204,12 +34980,12 @@
                     <a:p>
                       <a:pPr algn="ctr" indent="0" marL="0">
                         <a:lnSpc>
-                          <a:spcPts val="1680"/>
+                          <a:spcPts val="1579"/>
                         </a:lnSpc>
                         <a:buNone/>
                       </a:pPr>
                       <a:r>
-                        <a:rPr lang="en-US" sz="1200" dirty="0">
+                        <a:rPr lang="en-US" sz="1150" dirty="0">
                           <a:solidFill>
                             <a:srgbClr val="9A5B00"/>
                           </a:solidFill>
@@ -34219,7 +34995,7 @@
                         </a:rPr>
                         <a:t>.064</a:t>
                       </a:r>
-                      <a:endParaRPr lang="en-US" sz="1200" dirty="0">
+                      <a:endParaRPr lang="en-US" sz="1150" dirty="0">
                         <a:latin typeface="Tahoma" charset="0"/>
                         <a:ea typeface="Tahoma" charset="0"/>
                         <a:cs typeface="Tahoma" charset="0"/>
@@ -34275,12 +35051,12 @@
                     <a:p>
                       <a:pPr algn="ctr" indent="0" marL="0">
                         <a:lnSpc>
-                          <a:spcPts val="1680"/>
+                          <a:spcPts val="1579"/>
                         </a:lnSpc>
                         <a:buNone/>
                       </a:pPr>
                       <a:r>
-                        <a:rPr lang="en-US" sz="1200" dirty="0">
+                        <a:rPr lang="en-US" sz="1150" dirty="0">
                           <a:solidFill>
                             <a:srgbClr val="14233A"/>
                           </a:solidFill>
@@ -34290,7 +35066,7 @@
                         </a:rPr>
                         <a:t>107.800</a:t>
                       </a:r>
-                      <a:endParaRPr lang="en-US" sz="1200" dirty="0">
+                      <a:endParaRPr lang="en-US" sz="1150" dirty="0">
                         <a:latin typeface="Tahoma" charset="0"/>
                         <a:ea typeface="Tahoma" charset="0"/>
                         <a:cs typeface="Tahoma" charset="0"/>
@@ -34346,12 +35122,12 @@
                     <a:p>
                       <a:pPr algn="ctr" indent="0" marL="0">
                         <a:lnSpc>
-                          <a:spcPts val="1680"/>
+                          <a:spcPts val="1579"/>
                         </a:lnSpc>
                         <a:buNone/>
                       </a:pPr>
                       <a:r>
-                        <a:rPr lang="en-US" sz="1200" dirty="0">
+                        <a:rPr lang="en-US" sz="1150" dirty="0">
                           <a:solidFill>
                             <a:srgbClr val="14233A"/>
                           </a:solidFill>
@@ -34361,7 +35137,7 @@
                         </a:rPr>
                         <a:t>-58.23</a:t>
                       </a:r>
-                      <a:endParaRPr lang="en-US" sz="1200" dirty="0">
+                      <a:endParaRPr lang="en-US" sz="1150" dirty="0">
                         <a:latin typeface="Tahoma" charset="0"/>
                         <a:ea typeface="Tahoma" charset="0"/>
                         <a:cs typeface="Tahoma" charset="0"/>
@@ -34417,12 +35193,12 @@
                     <a:p>
                       <a:pPr algn="ctr" indent="0" marL="0">
                         <a:lnSpc>
-                          <a:spcPts val="1680"/>
+                          <a:spcPts val="1579"/>
                         </a:lnSpc>
                         <a:buNone/>
                       </a:pPr>
                       <a:r>
-                        <a:rPr lang="en-US" sz="1200" dirty="0">
+                        <a:rPr lang="en-US" sz="1150" dirty="0">
                           <a:solidFill>
                             <a:srgbClr val="14233A"/>
                           </a:solidFill>
@@ -34432,7 +35208,7 @@
                         </a:rPr>
                         <a:t>273.83</a:t>
                       </a:r>
-                      <a:endParaRPr lang="en-US" sz="1200" dirty="0">
+                      <a:endParaRPr lang="en-US" sz="1150" dirty="0">
                         <a:latin typeface="Tahoma" charset="0"/>
                         <a:ea typeface="Tahoma" charset="0"/>
                         <a:cs typeface="Tahoma" charset="0"/>
@@ -35654,12 +36430,12 @@
           <a:p>
             <a:pPr algn="l" indent="0" marL="0">
               <a:lnSpc>
-                <a:spcPts val="1820"/>
+                <a:spcPts val="1711"/>
               </a:lnSpc>
               <a:buNone/>
             </a:pPr>
             <a:r>
-              <a:rPr lang="en-US" sz="1400" dirty="0">
+              <a:rPr lang="en-US" sz="1300" dirty="0">
                 <a:solidFill>
                   <a:srgbClr val="14233A"/>
                 </a:solidFill>
@@ -35669,7 +36445,7 @@
               </a:rPr>
               <a:t>Accept H0, reject H1</a:t>
             </a:r>
-            <a:endParaRPr lang="en-US" sz="1400" dirty="0"/>
+            <a:endParaRPr lang="en-US" sz="1300" dirty="0"/>
           </a:p>
         </p:txBody>
       </p:sp>
@@ -35799,12 +36575,12 @@
           <a:p>
             <a:pPr algn="l" indent="0" marL="0">
               <a:lnSpc>
-                <a:spcPts val="1820"/>
+                <a:spcPts val="1711"/>
               </a:lnSpc>
               <a:buNone/>
             </a:pPr>
             <a:r>
-              <a:rPr lang="en-US" sz="1400" dirty="0">
+              <a:rPr lang="en-US" sz="1300" dirty="0">
                 <a:solidFill>
                   <a:srgbClr val="14233A"/>
                 </a:solidFill>
@@ -35814,7 +36590,7 @@
               </a:rPr>
               <a:t>Reject H0, accept H1</a:t>
             </a:r>
-            <a:endParaRPr lang="en-US" sz="1400" dirty="0"/>
+            <a:endParaRPr lang="en-US" sz="1300" dirty="0"/>
           </a:p>
         </p:txBody>
       </p:sp>
@@ -36499,12 +37275,12 @@
                     <a:p>
                       <a:pPr indent="0" marL="0">
                         <a:lnSpc>
-                          <a:spcPts val="1543"/>
+                          <a:spcPts val="1450"/>
                         </a:lnSpc>
                         <a:buNone/>
                       </a:pPr>
                       <a:r>
-                        <a:rPr lang="en-US" sz="1103" b="1" dirty="0">
+                        <a:rPr lang="en-US" sz="1050" b="1" dirty="0">
                           <a:solidFill>
                             <a:srgbClr val="F6F4EF"/>
                           </a:solidFill>
@@ -36514,7 +37290,7 @@
                         </a:rPr>
                         <a:t>Pair 1</a:t>
                       </a:r>
-                      <a:endParaRPr lang="en-US" sz="1103" dirty="0">
+                      <a:endParaRPr lang="en-US" sz="1050" dirty="0">
                         <a:latin typeface="Tahoma" charset="0"/>
                         <a:ea typeface="Tahoma" charset="0"/>
                         <a:cs typeface="Tahoma" charset="0"/>
@@ -36558,12 +37334,12 @@
                     <a:p>
                       <a:pPr algn="ctr" indent="0" marL="0">
                         <a:lnSpc>
-                          <a:spcPts val="1543"/>
+                          <a:spcPts val="1450"/>
                         </a:lnSpc>
                         <a:buNone/>
                       </a:pPr>
                       <a:r>
-                        <a:rPr lang="en-US" sz="1103" b="1" dirty="0">
+                        <a:rPr lang="en-US" sz="1050" b="1" dirty="0">
                           <a:solidFill>
                             <a:srgbClr val="F6F4EF"/>
                           </a:solidFill>
@@ -36573,7 +37349,7 @@
                         </a:rPr>
                         <a:t>Mean</a:t>
                       </a:r>
-                      <a:endParaRPr lang="en-US" sz="1103" dirty="0">
+                      <a:endParaRPr lang="en-US" sz="1050" dirty="0">
                         <a:latin typeface="Tahoma" charset="0"/>
                         <a:ea typeface="Tahoma" charset="0"/>
                         <a:cs typeface="Tahoma" charset="0"/>
@@ -36623,12 +37399,12 @@
                     <a:p>
                       <a:pPr algn="ctr" indent="0" marL="0">
                         <a:lnSpc>
-                          <a:spcPts val="1543"/>
+                          <a:spcPts val="1450"/>
                         </a:lnSpc>
                         <a:buNone/>
                       </a:pPr>
                       <a:r>
-                        <a:rPr lang="en-US" sz="1103" b="1" dirty="0">
+                        <a:rPr lang="en-US" sz="1050" b="1" dirty="0">
                           <a:solidFill>
                             <a:srgbClr val="F6F4EF"/>
                           </a:solidFill>
@@ -36638,7 +37414,7 @@
                         </a:rPr>
                         <a:t>N</a:t>
                       </a:r>
-                      <a:endParaRPr lang="en-US" sz="1103" dirty="0">
+                      <a:endParaRPr lang="en-US" sz="1050" dirty="0">
                         <a:latin typeface="Tahoma" charset="0"/>
                         <a:ea typeface="Tahoma" charset="0"/>
                         <a:cs typeface="Tahoma" charset="0"/>
@@ -36688,12 +37464,12 @@
                     <a:p>
                       <a:pPr algn="ctr" indent="0" marL="0">
                         <a:lnSpc>
-                          <a:spcPts val="1543"/>
+                          <a:spcPts val="1450"/>
                         </a:lnSpc>
                         <a:buNone/>
                       </a:pPr>
                       <a:r>
-                        <a:rPr lang="en-US" sz="1103" b="1" dirty="0">
+                        <a:rPr lang="en-US" sz="1050" b="1" dirty="0">
                           <a:solidFill>
                             <a:srgbClr val="F6F4EF"/>
                           </a:solidFill>
@@ -36703,7 +37479,7 @@
                         </a:rPr>
                         <a:t>Std. Deviation</a:t>
                       </a:r>
-                      <a:endParaRPr lang="en-US" sz="1103" dirty="0">
+                      <a:endParaRPr lang="en-US" sz="1050" dirty="0">
                         <a:latin typeface="Tahoma" charset="0"/>
                         <a:ea typeface="Tahoma" charset="0"/>
                         <a:cs typeface="Tahoma" charset="0"/>
@@ -36753,12 +37529,12 @@
                     <a:p>
                       <a:pPr algn="ctr" indent="0" marL="0">
                         <a:lnSpc>
-                          <a:spcPts val="1543"/>
+                          <a:spcPts val="1450"/>
                         </a:lnSpc>
                         <a:buNone/>
                       </a:pPr>
                       <a:r>
-                        <a:rPr lang="en-US" sz="1103" b="1" dirty="0">
+                        <a:rPr lang="en-US" sz="1050" b="1" dirty="0">
                           <a:solidFill>
                             <a:srgbClr val="F6F4EF"/>
                           </a:solidFill>
@@ -36768,7 +37544,7 @@
                         </a:rPr>
                         <a:t>Std. Error Mean</a:t>
                       </a:r>
-                      <a:endParaRPr lang="en-US" sz="1103" dirty="0">
+                      <a:endParaRPr lang="en-US" sz="1050" dirty="0">
                         <a:latin typeface="Tahoma" charset="0"/>
                         <a:ea typeface="Tahoma" charset="0"/>
                         <a:cs typeface="Tahoma" charset="0"/>
@@ -36820,12 +37596,12 @@
                     <a:p>
                       <a:pPr indent="0" marL="0">
                         <a:lnSpc>
-                          <a:spcPts val="1543"/>
+                          <a:spcPts val="1450"/>
                         </a:lnSpc>
                         <a:buNone/>
                       </a:pPr>
                       <a:r>
-                        <a:rPr lang="en-US" sz="1103" dirty="0">
+                        <a:rPr lang="en-US" sz="1050" dirty="0">
                           <a:solidFill>
                             <a:srgbClr val="14233A"/>
                           </a:solidFill>
@@ -36835,7 +37611,7 @@
                         </a:rPr>
                         <a:t>before</a:t>
                       </a:r>
-                      <a:endParaRPr lang="en-US" sz="1103" dirty="0">
+                      <a:endParaRPr lang="en-US" sz="1050" dirty="0">
                         <a:latin typeface="Tahoma" charset="0"/>
                         <a:ea typeface="Tahoma" charset="0"/>
                         <a:cs typeface="Tahoma" charset="0"/>
@@ -36885,12 +37661,12 @@
                     <a:p>
                       <a:pPr algn="ctr" indent="0" marL="0">
                         <a:lnSpc>
-                          <a:spcPts val="1543"/>
+                          <a:spcPts val="1450"/>
                         </a:lnSpc>
                         <a:buNone/>
                       </a:pPr>
                       <a:r>
-                        <a:rPr lang="en-US" sz="1103" dirty="0">
+                        <a:rPr lang="en-US" sz="1050" dirty="0">
                           <a:solidFill>
                             <a:srgbClr val="14233A"/>
                           </a:solidFill>
@@ -36900,7 +37676,7 @@
                         </a:rPr>
                         <a:t>15.67</a:t>
                       </a:r>
-                      <a:endParaRPr lang="en-US" sz="1103" dirty="0">
+                      <a:endParaRPr lang="en-US" sz="1050" dirty="0">
                         <a:latin typeface="Tahoma" charset="0"/>
                         <a:ea typeface="Tahoma" charset="0"/>
                         <a:cs typeface="Tahoma" charset="0"/>
@@ -36956,12 +37732,12 @@
                     <a:p>
                       <a:pPr algn="ctr" indent="0" marL="0">
                         <a:lnSpc>
-                          <a:spcPts val="1543"/>
+                          <a:spcPts val="1450"/>
                         </a:lnSpc>
                         <a:buNone/>
                       </a:pPr>
                       <a:r>
-                        <a:rPr lang="en-US" sz="1103" dirty="0">
+                        <a:rPr lang="en-US" sz="1050" dirty="0">
                           <a:solidFill>
                             <a:srgbClr val="14233A"/>
                           </a:solidFill>
@@ -36971,7 +37747,7 @@
                         </a:rPr>
                         <a:t>6</a:t>
                       </a:r>
-                      <a:endParaRPr lang="en-US" sz="1103" dirty="0">
+                      <a:endParaRPr lang="en-US" sz="1050" dirty="0">
                         <a:latin typeface="Tahoma" charset="0"/>
                         <a:ea typeface="Tahoma" charset="0"/>
                         <a:cs typeface="Tahoma" charset="0"/>
@@ -37027,12 +37803,12 @@
                     <a:p>
                       <a:pPr algn="ctr" indent="0" marL="0">
                         <a:lnSpc>
-                          <a:spcPts val="1543"/>
+                          <a:spcPts val="1450"/>
                         </a:lnSpc>
                         <a:buNone/>
                       </a:pPr>
                       <a:r>
-                        <a:rPr lang="en-US" sz="1103" dirty="0">
+                        <a:rPr lang="en-US" sz="1050" dirty="0">
                           <a:solidFill>
                             <a:srgbClr val="14233A"/>
                           </a:solidFill>
@@ -37042,7 +37818,7 @@
                         </a:rPr>
                         <a:t>5.538</a:t>
                       </a:r>
-                      <a:endParaRPr lang="en-US" sz="1103" dirty="0">
+                      <a:endParaRPr lang="en-US" sz="1050" dirty="0">
                         <a:latin typeface="Tahoma" charset="0"/>
                         <a:ea typeface="Tahoma" charset="0"/>
                         <a:cs typeface="Tahoma" charset="0"/>
@@ -37098,12 +37874,12 @@
                     <a:p>
                       <a:pPr algn="ctr" indent="0" marL="0">
                         <a:lnSpc>
-                          <a:spcPts val="1543"/>
+                          <a:spcPts val="1450"/>
                         </a:lnSpc>
                         <a:buNone/>
                       </a:pPr>
                       <a:r>
-                        <a:rPr lang="en-US" sz="1103" dirty="0">
+                        <a:rPr lang="en-US" sz="1050" dirty="0">
                           <a:solidFill>
                             <a:srgbClr val="14233A"/>
                           </a:solidFill>
@@ -37113,7 +37889,7 @@
                         </a:rPr>
                         <a:t>2.261</a:t>
                       </a:r>
-                      <a:endParaRPr lang="en-US" sz="1103" dirty="0">
+                      <a:endParaRPr lang="en-US" sz="1050" dirty="0">
                         <a:latin typeface="Tahoma" charset="0"/>
                         <a:ea typeface="Tahoma" charset="0"/>
                         <a:cs typeface="Tahoma" charset="0"/>
@@ -37171,12 +37947,12 @@
                     <a:p>
                       <a:pPr indent="0" marL="0">
                         <a:lnSpc>
-                          <a:spcPts val="1543"/>
+                          <a:spcPts val="1450"/>
                         </a:lnSpc>
                         <a:buNone/>
                       </a:pPr>
                       <a:r>
-                        <a:rPr lang="en-US" sz="1103" dirty="0">
+                        <a:rPr lang="en-US" sz="1050" dirty="0">
                           <a:solidFill>
                             <a:srgbClr val="14233A"/>
                           </a:solidFill>
@@ -37186,7 +37962,7 @@
                         </a:rPr>
                         <a:t>after</a:t>
                       </a:r>
-                      <a:endParaRPr lang="en-US" sz="1103" dirty="0">
+                      <a:endParaRPr lang="en-US" sz="1050" dirty="0">
                         <a:latin typeface="Tahoma" charset="0"/>
                         <a:ea typeface="Tahoma" charset="0"/>
                         <a:cs typeface="Tahoma" charset="0"/>
@@ -37236,12 +38012,12 @@
                     <a:p>
                       <a:pPr algn="ctr" indent="0" marL="0">
                         <a:lnSpc>
-                          <a:spcPts val="1543"/>
+                          <a:spcPts val="1450"/>
                         </a:lnSpc>
                         <a:buNone/>
                       </a:pPr>
                       <a:r>
-                        <a:rPr lang="en-US" sz="1103" dirty="0">
+                        <a:rPr lang="en-US" sz="1050" dirty="0">
                           <a:solidFill>
                             <a:srgbClr val="14233A"/>
                           </a:solidFill>
@@ -37251,7 +38027,7 @@
                         </a:rPr>
                         <a:t>19.83</a:t>
                       </a:r>
-                      <a:endParaRPr lang="en-US" sz="1103" dirty="0">
+                      <a:endParaRPr lang="en-US" sz="1050" dirty="0">
                         <a:latin typeface="Tahoma" charset="0"/>
                         <a:ea typeface="Tahoma" charset="0"/>
                         <a:cs typeface="Tahoma" charset="0"/>
@@ -37307,12 +38083,12 @@
                     <a:p>
                       <a:pPr algn="ctr" indent="0" marL="0">
                         <a:lnSpc>
-                          <a:spcPts val="1543"/>
+                          <a:spcPts val="1450"/>
                         </a:lnSpc>
                         <a:buNone/>
                       </a:pPr>
                       <a:r>
-                        <a:rPr lang="en-US" sz="1103" dirty="0">
+                        <a:rPr lang="en-US" sz="1050" dirty="0">
                           <a:solidFill>
                             <a:srgbClr val="14233A"/>
                           </a:solidFill>
@@ -37322,7 +38098,7 @@
                         </a:rPr>
                         <a:t>6</a:t>
                       </a:r>
-                      <a:endParaRPr lang="en-US" sz="1103" dirty="0">
+                      <a:endParaRPr lang="en-US" sz="1050" dirty="0">
                         <a:latin typeface="Tahoma" charset="0"/>
                         <a:ea typeface="Tahoma" charset="0"/>
                         <a:cs typeface="Tahoma" charset="0"/>
@@ -37378,12 +38154,12 @@
                     <a:p>
                       <a:pPr algn="ctr" indent="0" marL="0">
                         <a:lnSpc>
-                          <a:spcPts val="1543"/>
+                          <a:spcPts val="1450"/>
                         </a:lnSpc>
                         <a:buNone/>
                       </a:pPr>
                       <a:r>
-                        <a:rPr lang="en-US" sz="1103" dirty="0">
+                        <a:rPr lang="en-US" sz="1050" dirty="0">
                           <a:solidFill>
                             <a:srgbClr val="14233A"/>
                           </a:solidFill>
@@ -37393,7 +38169,7 @@
                         </a:rPr>
                         <a:t>3.817</a:t>
                       </a:r>
-                      <a:endParaRPr lang="en-US" sz="1103" dirty="0">
+                      <a:endParaRPr lang="en-US" sz="1050" dirty="0">
                         <a:latin typeface="Tahoma" charset="0"/>
                         <a:ea typeface="Tahoma" charset="0"/>
                         <a:cs typeface="Tahoma" charset="0"/>
@@ -37449,12 +38225,12 @@
                     <a:p>
                       <a:pPr algn="ctr" indent="0" marL="0">
                         <a:lnSpc>
-                          <a:spcPts val="1543"/>
+                          <a:spcPts val="1450"/>
                         </a:lnSpc>
                         <a:buNone/>
                       </a:pPr>
                       <a:r>
-                        <a:rPr lang="en-US" sz="1103" dirty="0">
+                        <a:rPr lang="en-US" sz="1050" dirty="0">
                           <a:solidFill>
                             <a:srgbClr val="14233A"/>
                           </a:solidFill>
@@ -37464,7 +38240,7 @@
                         </a:rPr>
                         <a:t>1.558</a:t>
                       </a:r>
-                      <a:endParaRPr lang="en-US" sz="1103" dirty="0">
+                      <a:endParaRPr lang="en-US" sz="1050" dirty="0">
                         <a:latin typeface="Tahoma" charset="0"/>
                         <a:ea typeface="Tahoma" charset="0"/>
                         <a:cs typeface="Tahoma" charset="0"/>
@@ -37728,12 +38504,12 @@
                     <a:p>
                       <a:pPr indent="0" marL="0">
                         <a:lnSpc>
-                          <a:spcPts val="1554"/>
+                          <a:spcPts val="1461"/>
                         </a:lnSpc>
                         <a:buNone/>
                       </a:pPr>
                       <a:r>
-                        <a:rPr lang="en-US" sz="1110" b="1" dirty="0">
+                        <a:rPr lang="en-US" sz="1050" b="1" dirty="0">
                           <a:solidFill>
                             <a:srgbClr val="F6F4EF"/>
                           </a:solidFill>
@@ -37743,7 +38519,7 @@
                         </a:rPr>
                         <a:t>Pair 1</a:t>
                       </a:r>
-                      <a:endParaRPr lang="en-US" sz="1110" dirty="0">
+                      <a:endParaRPr lang="en-US" sz="1050" dirty="0">
                         <a:latin typeface="Tahoma" charset="0"/>
                         <a:ea typeface="Tahoma" charset="0"/>
                         <a:cs typeface="Tahoma" charset="0"/>
@@ -37787,12 +38563,12 @@
                     <a:p>
                       <a:pPr algn="ctr" indent="0" marL="0">
                         <a:lnSpc>
-                          <a:spcPts val="1554"/>
+                          <a:spcPts val="1461"/>
                         </a:lnSpc>
                         <a:buNone/>
                       </a:pPr>
                       <a:r>
-                        <a:rPr lang="en-US" sz="1110" b="1" dirty="0">
+                        <a:rPr lang="en-US" sz="1050" b="1" dirty="0">
                           <a:solidFill>
                             <a:srgbClr val="F6F4EF"/>
                           </a:solidFill>
@@ -37802,7 +38578,7 @@
                         </a:rPr>
                         <a:t>Mean</a:t>
                       </a:r>
-                      <a:endParaRPr lang="en-US" sz="1110" dirty="0">
+                      <a:endParaRPr lang="en-US" sz="1050" dirty="0">
                         <a:latin typeface="Tahoma" charset="0"/>
                         <a:ea typeface="Tahoma" charset="0"/>
                         <a:cs typeface="Tahoma" charset="0"/>
@@ -37852,12 +38628,12 @@
                     <a:p>
                       <a:pPr algn="ctr" indent="0" marL="0">
                         <a:lnSpc>
-                          <a:spcPts val="1554"/>
+                          <a:spcPts val="1461"/>
                         </a:lnSpc>
                         <a:buNone/>
                       </a:pPr>
                       <a:r>
-                        <a:rPr lang="en-US" sz="1110" b="1" dirty="0">
+                        <a:rPr lang="en-US" sz="1050" b="1" dirty="0">
                           <a:solidFill>
                             <a:srgbClr val="F6F4EF"/>
                           </a:solidFill>
@@ -37867,7 +38643,7 @@
                         </a:rPr>
                         <a:t>Std. Deviation</a:t>
                       </a:r>
-                      <a:endParaRPr lang="en-US" sz="1110" dirty="0">
+                      <a:endParaRPr lang="en-US" sz="1050" dirty="0">
                         <a:latin typeface="Tahoma" charset="0"/>
                         <a:ea typeface="Tahoma" charset="0"/>
                         <a:cs typeface="Tahoma" charset="0"/>
@@ -37917,12 +38693,12 @@
                     <a:p>
                       <a:pPr algn="ctr" indent="0" marL="0">
                         <a:lnSpc>
-                          <a:spcPts val="1554"/>
+                          <a:spcPts val="1461"/>
                         </a:lnSpc>
                         <a:buNone/>
                       </a:pPr>
                       <a:r>
-                        <a:rPr lang="en-US" sz="1110" b="1" dirty="0">
+                        <a:rPr lang="en-US" sz="1050" b="1" dirty="0">
                           <a:solidFill>
                             <a:srgbClr val="F6F4EF"/>
                           </a:solidFill>
@@ -37932,7 +38708,7 @@
                         </a:rPr>
                         <a:t>Std. Error Mean</a:t>
                       </a:r>
-                      <a:endParaRPr lang="en-US" sz="1110" dirty="0">
+                      <a:endParaRPr lang="en-US" sz="1050" dirty="0">
                         <a:latin typeface="Tahoma" charset="0"/>
                         <a:ea typeface="Tahoma" charset="0"/>
                         <a:cs typeface="Tahoma" charset="0"/>
@@ -37982,12 +38758,12 @@
                     <a:p>
                       <a:pPr algn="ctr" indent="0" marL="0">
                         <a:lnSpc>
-                          <a:spcPts val="1554"/>
+                          <a:spcPts val="1461"/>
                         </a:lnSpc>
                         <a:buNone/>
                       </a:pPr>
                       <a:r>
-                        <a:rPr lang="en-US" sz="1110" b="1" dirty="0">
+                        <a:rPr lang="en-US" sz="1050" b="1" dirty="0">
                           <a:solidFill>
                             <a:srgbClr val="F6F4EF"/>
                           </a:solidFill>
@@ -37997,7 +38773,7 @@
                         </a:rPr>
                         <a:t>95% CI Lower</a:t>
                       </a:r>
-                      <a:endParaRPr lang="en-US" sz="1110" dirty="0">
+                      <a:endParaRPr lang="en-US" sz="1050" dirty="0">
                         <a:latin typeface="Tahoma" charset="0"/>
                         <a:ea typeface="Tahoma" charset="0"/>
                         <a:cs typeface="Tahoma" charset="0"/>
@@ -38047,12 +38823,12 @@
                     <a:p>
                       <a:pPr algn="ctr" indent="0" marL="0">
                         <a:lnSpc>
-                          <a:spcPts val="1554"/>
+                          <a:spcPts val="1461"/>
                         </a:lnSpc>
                         <a:buNone/>
                       </a:pPr>
                       <a:r>
-                        <a:rPr lang="en-US" sz="1110" b="1" dirty="0">
+                        <a:rPr lang="en-US" sz="1050" b="1" dirty="0">
                           <a:solidFill>
                             <a:srgbClr val="F6F4EF"/>
                           </a:solidFill>
@@ -38062,7 +38838,7 @@
                         </a:rPr>
                         <a:t>95% CI Upper</a:t>
                       </a:r>
-                      <a:endParaRPr lang="en-US" sz="1110" dirty="0">
+                      <a:endParaRPr lang="en-US" sz="1050" dirty="0">
                         <a:latin typeface="Tahoma" charset="0"/>
                         <a:ea typeface="Tahoma" charset="0"/>
                         <a:cs typeface="Tahoma" charset="0"/>
@@ -38112,12 +38888,12 @@
                     <a:p>
                       <a:pPr algn="ctr" indent="0" marL="0">
                         <a:lnSpc>
-                          <a:spcPts val="1554"/>
+                          <a:spcPts val="1461"/>
                         </a:lnSpc>
                         <a:buNone/>
                       </a:pPr>
                       <a:r>
-                        <a:rPr lang="en-US" sz="1110" b="1" dirty="0">
+                        <a:rPr lang="en-US" sz="1050" b="1" dirty="0">
                           <a:solidFill>
                             <a:srgbClr val="F6F4EF"/>
                           </a:solidFill>
@@ -38127,7 +38903,7 @@
                         </a:rPr>
                         <a:t>t</a:t>
                       </a:r>
-                      <a:endParaRPr lang="en-US" sz="1110" dirty="0">
+                      <a:endParaRPr lang="en-US" sz="1050" dirty="0">
                         <a:latin typeface="Tahoma" charset="0"/>
                         <a:ea typeface="Tahoma" charset="0"/>
                         <a:cs typeface="Tahoma" charset="0"/>
@@ -38177,12 +38953,12 @@
                     <a:p>
                       <a:pPr algn="ctr" indent="0" marL="0">
                         <a:lnSpc>
-                          <a:spcPts val="1554"/>
+                          <a:spcPts val="1461"/>
                         </a:lnSpc>
                         <a:buNone/>
                       </a:pPr>
                       <a:r>
-                        <a:rPr lang="en-US" sz="1110" b="1" dirty="0">
+                        <a:rPr lang="en-US" sz="1050" b="1" dirty="0">
                           <a:solidFill>
                             <a:srgbClr val="F6F4EF"/>
                           </a:solidFill>
@@ -38192,7 +38968,7 @@
                         </a:rPr>
                         <a:t>df</a:t>
                       </a:r>
-                      <a:endParaRPr lang="en-US" sz="1110" dirty="0">
+                      <a:endParaRPr lang="en-US" sz="1050" dirty="0">
                         <a:latin typeface="Tahoma" charset="0"/>
                         <a:ea typeface="Tahoma" charset="0"/>
                         <a:cs typeface="Tahoma" charset="0"/>
@@ -38242,12 +39018,12 @@
                     <a:p>
                       <a:pPr algn="ctr" indent="0" marL="0">
                         <a:lnSpc>
-                          <a:spcPts val="1554"/>
+                          <a:spcPts val="1461"/>
                         </a:lnSpc>
                         <a:buNone/>
                       </a:pPr>
                       <a:r>
-                        <a:rPr lang="en-US" sz="1110" b="1" dirty="0">
+                        <a:rPr lang="en-US" sz="1050" b="1" dirty="0">
                           <a:solidFill>
                             <a:srgbClr val="F6F4EF"/>
                           </a:solidFill>
@@ -38257,7 +39033,7 @@
                         </a:rPr>
                         <a:t>Sig. (2-tailed)</a:t>
                       </a:r>
-                      <a:endParaRPr lang="en-US" sz="1110" dirty="0">
+                      <a:endParaRPr lang="en-US" sz="1050" dirty="0">
                         <a:latin typeface="Tahoma" charset="0"/>
                         <a:ea typeface="Tahoma" charset="0"/>
                         <a:cs typeface="Tahoma" charset="0"/>
@@ -38309,12 +39085,12 @@
                     <a:p>
                       <a:pPr indent="0" marL="0">
                         <a:lnSpc>
-                          <a:spcPts val="1554"/>
+                          <a:spcPts val="1461"/>
                         </a:lnSpc>
                         <a:buNone/>
                       </a:pPr>
                       <a:r>
-                        <a:rPr lang="en-US" sz="1110" dirty="0">
+                        <a:rPr lang="en-US" sz="1050" dirty="0">
                           <a:solidFill>
                             <a:srgbClr val="14233A"/>
                           </a:solidFill>
@@ -38324,7 +39100,7 @@
                         </a:rPr>
                         <a:t>before - after</a:t>
                       </a:r>
-                      <a:endParaRPr lang="en-US" sz="1110" dirty="0">
+                      <a:endParaRPr lang="en-US" sz="1050" dirty="0">
                         <a:latin typeface="Tahoma" charset="0"/>
                         <a:ea typeface="Tahoma" charset="0"/>
                         <a:cs typeface="Tahoma" charset="0"/>
@@ -38374,12 +39150,12 @@
                     <a:p>
                       <a:pPr algn="ctr" indent="0" marL="0">
                         <a:lnSpc>
-                          <a:spcPts val="1554"/>
+                          <a:spcPts val="1461"/>
                         </a:lnSpc>
                         <a:buNone/>
                       </a:pPr>
                       <a:r>
-                        <a:rPr lang="en-US" sz="1110" dirty="0">
+                        <a:rPr lang="en-US" sz="1050" dirty="0">
                           <a:solidFill>
                             <a:srgbClr val="14233A"/>
                           </a:solidFill>
@@ -38389,7 +39165,7 @@
                         </a:rPr>
                         <a:t>-4.167</a:t>
                       </a:r>
-                      <a:endParaRPr lang="en-US" sz="1110" dirty="0">
+                      <a:endParaRPr lang="en-US" sz="1050" dirty="0">
                         <a:latin typeface="Tahoma" charset="0"/>
                         <a:ea typeface="Tahoma" charset="0"/>
                         <a:cs typeface="Tahoma" charset="0"/>
@@ -38445,12 +39221,12 @@
                     <a:p>
                       <a:pPr algn="ctr" indent="0" marL="0">
                         <a:lnSpc>
-                          <a:spcPts val="1554"/>
+                          <a:spcPts val="1461"/>
                         </a:lnSpc>
                         <a:buNone/>
                       </a:pPr>
                       <a:r>
-                        <a:rPr lang="en-US" sz="1110" dirty="0">
+                        <a:rPr lang="en-US" sz="1050" dirty="0">
                           <a:solidFill>
                             <a:srgbClr val="14233A"/>
                           </a:solidFill>
@@ -38460,7 +39236,7 @@
                         </a:rPr>
                         <a:t>2.639</a:t>
                       </a:r>
-                      <a:endParaRPr lang="en-US" sz="1110" dirty="0">
+                      <a:endParaRPr lang="en-US" sz="1050" dirty="0">
                         <a:latin typeface="Tahoma" charset="0"/>
                         <a:ea typeface="Tahoma" charset="0"/>
                         <a:cs typeface="Tahoma" charset="0"/>
@@ -38516,12 +39292,12 @@
                     <a:p>
                       <a:pPr algn="ctr" indent="0" marL="0">
                         <a:lnSpc>
-                          <a:spcPts val="1554"/>
+                          <a:spcPts val="1461"/>
                         </a:lnSpc>
                         <a:buNone/>
                       </a:pPr>
                       <a:r>
-                        <a:rPr lang="en-US" sz="1110" dirty="0">
+                        <a:rPr lang="en-US" sz="1050" dirty="0">
                           <a:solidFill>
                             <a:srgbClr val="14233A"/>
                           </a:solidFill>
@@ -38531,7 +39307,7 @@
                         </a:rPr>
                         <a:t>1.078</a:t>
                       </a:r>
-                      <a:endParaRPr lang="en-US" sz="1110" dirty="0">
+                      <a:endParaRPr lang="en-US" sz="1050" dirty="0">
                         <a:latin typeface="Tahoma" charset="0"/>
                         <a:ea typeface="Tahoma" charset="0"/>
                         <a:cs typeface="Tahoma" charset="0"/>
@@ -38587,12 +39363,12 @@
                     <a:p>
                       <a:pPr algn="ctr" indent="0" marL="0">
                         <a:lnSpc>
-                          <a:spcPts val="1554"/>
+                          <a:spcPts val="1461"/>
                         </a:lnSpc>
                         <a:buNone/>
                       </a:pPr>
                       <a:r>
-                        <a:rPr lang="en-US" sz="1110" dirty="0">
+                        <a:rPr lang="en-US" sz="1050" dirty="0">
                           <a:solidFill>
                             <a:srgbClr val="14233A"/>
                           </a:solidFill>
@@ -38602,7 +39378,7 @@
                         </a:rPr>
                         <a:t>-6.937</a:t>
                       </a:r>
-                      <a:endParaRPr lang="en-US" sz="1110" dirty="0">
+                      <a:endParaRPr lang="en-US" sz="1050" dirty="0">
                         <a:latin typeface="Tahoma" charset="0"/>
                         <a:ea typeface="Tahoma" charset="0"/>
                         <a:cs typeface="Tahoma" charset="0"/>
@@ -38658,12 +39434,12 @@
                     <a:p>
                       <a:pPr algn="ctr" indent="0" marL="0">
                         <a:lnSpc>
-                          <a:spcPts val="1554"/>
+                          <a:spcPts val="1461"/>
                         </a:lnSpc>
                         <a:buNone/>
                       </a:pPr>
                       <a:r>
-                        <a:rPr lang="en-US" sz="1110" dirty="0">
+                        <a:rPr lang="en-US" sz="1050" dirty="0">
                           <a:solidFill>
                             <a:srgbClr val="14233A"/>
                           </a:solidFill>
@@ -38673,7 +39449,7 @@
                         </a:rPr>
                         <a:t>-1.397</a:t>
                       </a:r>
-                      <a:endParaRPr lang="en-US" sz="1110" dirty="0">
+                      <a:endParaRPr lang="en-US" sz="1050" dirty="0">
                         <a:latin typeface="Tahoma" charset="0"/>
                         <a:ea typeface="Tahoma" charset="0"/>
                         <a:cs typeface="Tahoma" charset="0"/>
@@ -38729,12 +39505,12 @@
                     <a:p>
                       <a:pPr algn="ctr" indent="0" marL="0">
                         <a:lnSpc>
-                          <a:spcPts val="1554"/>
+                          <a:spcPts val="1461"/>
                         </a:lnSpc>
                         <a:buNone/>
                       </a:pPr>
                       <a:r>
-                        <a:rPr lang="en-US" sz="1110" dirty="0">
+                        <a:rPr lang="en-US" sz="1050" dirty="0">
                           <a:solidFill>
                             <a:srgbClr val="14233A"/>
                           </a:solidFill>
@@ -38744,7 +39520,7 @@
                         </a:rPr>
                         <a:t>-3.867</a:t>
                       </a:r>
-                      <a:endParaRPr lang="en-US" sz="1110" dirty="0">
+                      <a:endParaRPr lang="en-US" sz="1050" dirty="0">
                         <a:latin typeface="Tahoma" charset="0"/>
                         <a:ea typeface="Tahoma" charset="0"/>
                         <a:cs typeface="Tahoma" charset="0"/>
@@ -38800,12 +39576,12 @@
                     <a:p>
                       <a:pPr algn="ctr" indent="0" marL="0">
                         <a:lnSpc>
-                          <a:spcPts val="1554"/>
+                          <a:spcPts val="1461"/>
                         </a:lnSpc>
                         <a:buNone/>
                       </a:pPr>
                       <a:r>
-                        <a:rPr lang="en-US" sz="1110" dirty="0">
+                        <a:rPr lang="en-US" sz="1050" dirty="0">
                           <a:solidFill>
                             <a:srgbClr val="14233A"/>
                           </a:solidFill>
@@ -38815,7 +39591,7 @@
                         </a:rPr>
                         <a:t>5</a:t>
                       </a:r>
-                      <a:endParaRPr lang="en-US" sz="1110" dirty="0">
+                      <a:endParaRPr lang="en-US" sz="1050" dirty="0">
                         <a:latin typeface="Tahoma" charset="0"/>
                         <a:ea typeface="Tahoma" charset="0"/>
                         <a:cs typeface="Tahoma" charset="0"/>
@@ -38871,12 +39647,12 @@
                     <a:p>
                       <a:pPr algn="ctr" indent="0" marL="0">
                         <a:lnSpc>
-                          <a:spcPts val="1554"/>
+                          <a:spcPts val="1461"/>
                         </a:lnSpc>
                         <a:buNone/>
                       </a:pPr>
                       <a:r>
-                        <a:rPr lang="en-US" sz="1110" dirty="0">
+                        <a:rPr lang="en-US" sz="1050" dirty="0">
                           <a:solidFill>
                             <a:srgbClr val="9A5B00"/>
                           </a:solidFill>
@@ -38886,7 +39662,7 @@
                         </a:rPr>
                         <a:t>.012</a:t>
                       </a:r>
-                      <a:endParaRPr lang="en-US" sz="1110" dirty="0">
+                      <a:endParaRPr lang="en-US" sz="1050" dirty="0">
                         <a:latin typeface="Tahoma" charset="0"/>
                         <a:ea typeface="Tahoma" charset="0"/>
                         <a:cs typeface="Tahoma" charset="0"/>
@@ -41481,12 +42257,12 @@
                     <a:p>
                       <a:pPr indent="0" marL="0">
                         <a:lnSpc>
-                          <a:spcPts val="1680"/>
+                          <a:spcPts val="1579"/>
                         </a:lnSpc>
                         <a:buNone/>
                       </a:pPr>
                       <a:r>
-                        <a:rPr lang="en-US" sz="1200" b="1" dirty="0">
+                        <a:rPr lang="en-US" sz="1150" b="1" dirty="0">
                           <a:solidFill>
                             <a:srgbClr val="F6F4EF"/>
                           </a:solidFill>
@@ -41496,7 +42272,7 @@
                         </a:rPr>
                         <a:t>Pair 1</a:t>
                       </a:r>
-                      <a:endParaRPr lang="en-US" sz="1200" dirty="0">
+                      <a:endParaRPr lang="en-US" sz="1150" dirty="0">
                         <a:latin typeface="Tahoma" charset="0"/>
                         <a:ea typeface="Tahoma" charset="0"/>
                         <a:cs typeface="Tahoma" charset="0"/>
@@ -41540,12 +42316,12 @@
                     <a:p>
                       <a:pPr algn="ctr" indent="0" marL="0">
                         <a:lnSpc>
-                          <a:spcPts val="1680"/>
+                          <a:spcPts val="1579"/>
                         </a:lnSpc>
                         <a:buNone/>
                       </a:pPr>
                       <a:r>
-                        <a:rPr lang="en-US" sz="1200" b="1" dirty="0">
+                        <a:rPr lang="en-US" sz="1150" b="1" dirty="0">
                           <a:solidFill>
                             <a:srgbClr val="F6F4EF"/>
                           </a:solidFill>
@@ -41555,7 +42331,7 @@
                         </a:rPr>
                         <a:t>Mean</a:t>
                       </a:r>
-                      <a:endParaRPr lang="en-US" sz="1200" dirty="0">
+                      <a:endParaRPr lang="en-US" sz="1150" dirty="0">
                         <a:latin typeface="Tahoma" charset="0"/>
                         <a:ea typeface="Tahoma" charset="0"/>
                         <a:cs typeface="Tahoma" charset="0"/>
@@ -41605,12 +42381,12 @@
                     <a:p>
                       <a:pPr algn="ctr" indent="0" marL="0">
                         <a:lnSpc>
-                          <a:spcPts val="1680"/>
+                          <a:spcPts val="1579"/>
                         </a:lnSpc>
                         <a:buNone/>
                       </a:pPr>
                       <a:r>
-                        <a:rPr lang="en-US" sz="1200" b="1" dirty="0">
+                        <a:rPr lang="en-US" sz="1150" b="1" dirty="0">
                           <a:solidFill>
                             <a:srgbClr val="F6F4EF"/>
                           </a:solidFill>
@@ -41620,7 +42396,7 @@
                         </a:rPr>
                         <a:t>N</a:t>
                       </a:r>
-                      <a:endParaRPr lang="en-US" sz="1200" dirty="0">
+                      <a:endParaRPr lang="en-US" sz="1150" dirty="0">
                         <a:latin typeface="Tahoma" charset="0"/>
                         <a:ea typeface="Tahoma" charset="0"/>
                         <a:cs typeface="Tahoma" charset="0"/>
@@ -41670,12 +42446,12 @@
                     <a:p>
                       <a:pPr algn="ctr" indent="0" marL="0">
                         <a:lnSpc>
-                          <a:spcPts val="1680"/>
+                          <a:spcPts val="1579"/>
                         </a:lnSpc>
                         <a:buNone/>
                       </a:pPr>
                       <a:r>
-                        <a:rPr lang="en-US" sz="1200" b="1" dirty="0">
+                        <a:rPr lang="en-US" sz="1150" b="1" dirty="0">
                           <a:solidFill>
                             <a:srgbClr val="F6F4EF"/>
                           </a:solidFill>
@@ -41685,7 +42461,7 @@
                         </a:rPr>
                         <a:t>Std. Deviation</a:t>
                       </a:r>
-                      <a:endParaRPr lang="en-US" sz="1200" dirty="0">
+                      <a:endParaRPr lang="en-US" sz="1150" dirty="0">
                         <a:latin typeface="Tahoma" charset="0"/>
                         <a:ea typeface="Tahoma" charset="0"/>
                         <a:cs typeface="Tahoma" charset="0"/>
@@ -41735,12 +42511,12 @@
                     <a:p>
                       <a:pPr algn="ctr" indent="0" marL="0">
                         <a:lnSpc>
-                          <a:spcPts val="1680"/>
+                          <a:spcPts val="1579"/>
                         </a:lnSpc>
                         <a:buNone/>
                       </a:pPr>
                       <a:r>
-                        <a:rPr lang="en-US" sz="1200" b="1" dirty="0">
+                        <a:rPr lang="en-US" sz="1150" b="1" dirty="0">
                           <a:solidFill>
                             <a:srgbClr val="F6F4EF"/>
                           </a:solidFill>
@@ -41750,7 +42526,7 @@
                         </a:rPr>
                         <a:t>Std. Error Mean</a:t>
                       </a:r>
-                      <a:endParaRPr lang="en-US" sz="1200" dirty="0">
+                      <a:endParaRPr lang="en-US" sz="1150" dirty="0">
                         <a:latin typeface="Tahoma" charset="0"/>
                         <a:ea typeface="Tahoma" charset="0"/>
                         <a:cs typeface="Tahoma" charset="0"/>
@@ -41802,12 +42578,12 @@
                     <a:p>
                       <a:pPr indent="0" marL="0">
                         <a:lnSpc>
-                          <a:spcPts val="1680"/>
+                          <a:spcPts val="1579"/>
                         </a:lnSpc>
                         <a:buNone/>
                       </a:pPr>
                       <a:r>
-                        <a:rPr lang="en-US" sz="1200" dirty="0">
+                        <a:rPr lang="en-US" sz="1150" dirty="0">
                           <a:solidFill>
                             <a:srgbClr val="14233A"/>
                           </a:solidFill>
@@ -41817,7 +42593,7 @@
                         </a:rPr>
                         <a:t>before</a:t>
                       </a:r>
-                      <a:endParaRPr lang="en-US" sz="1200" dirty="0">
+                      <a:endParaRPr lang="en-US" sz="1150" dirty="0">
                         <a:latin typeface="Tahoma" charset="0"/>
                         <a:ea typeface="Tahoma" charset="0"/>
                         <a:cs typeface="Tahoma" charset="0"/>
@@ -41867,12 +42643,12 @@
                     <a:p>
                       <a:pPr algn="ctr" indent="0" marL="0">
                         <a:lnSpc>
-                          <a:spcPts val="1680"/>
+                          <a:spcPts val="1579"/>
                         </a:lnSpc>
                         <a:buNone/>
                       </a:pPr>
                       <a:r>
-                        <a:rPr lang="en-US" sz="1200" dirty="0">
+                        <a:rPr lang="en-US" sz="1150" dirty="0">
                           <a:solidFill>
                             <a:srgbClr val="14233A"/>
                           </a:solidFill>
@@ -41882,7 +42658,7 @@
                         </a:rPr>
                         <a:t>15.67</a:t>
                       </a:r>
-                      <a:endParaRPr lang="en-US" sz="1200" dirty="0">
+                      <a:endParaRPr lang="en-US" sz="1150" dirty="0">
                         <a:latin typeface="Tahoma" charset="0"/>
                         <a:ea typeface="Tahoma" charset="0"/>
                         <a:cs typeface="Tahoma" charset="0"/>
@@ -41938,12 +42714,12 @@
                     <a:p>
                       <a:pPr algn="ctr" indent="0" marL="0">
                         <a:lnSpc>
-                          <a:spcPts val="1680"/>
+                          <a:spcPts val="1579"/>
                         </a:lnSpc>
                         <a:buNone/>
                       </a:pPr>
                       <a:r>
-                        <a:rPr lang="en-US" sz="1200" dirty="0">
+                        <a:rPr lang="en-US" sz="1150" dirty="0">
                           <a:solidFill>
                             <a:srgbClr val="14233A"/>
                           </a:solidFill>
@@ -41953,7 +42729,7 @@
                         </a:rPr>
                         <a:t>6</a:t>
                       </a:r>
-                      <a:endParaRPr lang="en-US" sz="1200" dirty="0">
+                      <a:endParaRPr lang="en-US" sz="1150" dirty="0">
                         <a:latin typeface="Tahoma" charset="0"/>
                         <a:ea typeface="Tahoma" charset="0"/>
                         <a:cs typeface="Tahoma" charset="0"/>
@@ -42009,12 +42785,12 @@
                     <a:p>
                       <a:pPr algn="ctr" indent="0" marL="0">
                         <a:lnSpc>
-                          <a:spcPts val="1680"/>
+                          <a:spcPts val="1579"/>
                         </a:lnSpc>
                         <a:buNone/>
                       </a:pPr>
                       <a:r>
-                        <a:rPr lang="en-US" sz="1200" dirty="0">
+                        <a:rPr lang="en-US" sz="1150" dirty="0">
                           <a:solidFill>
                             <a:srgbClr val="14233A"/>
                           </a:solidFill>
@@ -42024,7 +42800,7 @@
                         </a:rPr>
                         <a:t>5.538</a:t>
                       </a:r>
-                      <a:endParaRPr lang="en-US" sz="1200" dirty="0">
+                      <a:endParaRPr lang="en-US" sz="1150" dirty="0">
                         <a:latin typeface="Tahoma" charset="0"/>
                         <a:ea typeface="Tahoma" charset="0"/>
                         <a:cs typeface="Tahoma" charset="0"/>
@@ -42080,12 +42856,12 @@
                     <a:p>
                       <a:pPr algn="ctr" indent="0" marL="0">
                         <a:lnSpc>
-                          <a:spcPts val="1680"/>
+                          <a:spcPts val="1579"/>
                         </a:lnSpc>
                         <a:buNone/>
                       </a:pPr>
                       <a:r>
-                        <a:rPr lang="en-US" sz="1200" dirty="0">
+                        <a:rPr lang="en-US" sz="1150" dirty="0">
                           <a:solidFill>
                             <a:srgbClr val="14233A"/>
                           </a:solidFill>
@@ -42095,7 +42871,7 @@
                         </a:rPr>
                         <a:t>2.261</a:t>
                       </a:r>
-                      <a:endParaRPr lang="en-US" sz="1200" dirty="0">
+                      <a:endParaRPr lang="en-US" sz="1150" dirty="0">
                         <a:latin typeface="Tahoma" charset="0"/>
                         <a:ea typeface="Tahoma" charset="0"/>
                         <a:cs typeface="Tahoma" charset="0"/>
@@ -42153,12 +42929,12 @@
                     <a:p>
                       <a:pPr indent="0" marL="0">
                         <a:lnSpc>
-                          <a:spcPts val="1680"/>
+                          <a:spcPts val="1579"/>
                         </a:lnSpc>
                         <a:buNone/>
                       </a:pPr>
                       <a:r>
-                        <a:rPr lang="en-US" sz="1200" dirty="0">
+                        <a:rPr lang="en-US" sz="1150" dirty="0">
                           <a:solidFill>
                             <a:srgbClr val="14233A"/>
                           </a:solidFill>
@@ -42168,7 +42944,7 @@
                         </a:rPr>
                         <a:t>after</a:t>
                       </a:r>
-                      <a:endParaRPr lang="en-US" sz="1200" dirty="0">
+                      <a:endParaRPr lang="en-US" sz="1150" dirty="0">
                         <a:latin typeface="Tahoma" charset="0"/>
                         <a:ea typeface="Tahoma" charset="0"/>
                         <a:cs typeface="Tahoma" charset="0"/>
@@ -42218,12 +42994,12 @@
                     <a:p>
                       <a:pPr algn="ctr" indent="0" marL="0">
                         <a:lnSpc>
-                          <a:spcPts val="1680"/>
+                          <a:spcPts val="1579"/>
                         </a:lnSpc>
                         <a:buNone/>
                       </a:pPr>
                       <a:r>
-                        <a:rPr lang="en-US" sz="1200" dirty="0">
+                        <a:rPr lang="en-US" sz="1150" dirty="0">
                           <a:solidFill>
                             <a:srgbClr val="14233A"/>
                           </a:solidFill>
@@ -42233,7 +43009,7 @@
                         </a:rPr>
                         <a:t>19.83</a:t>
                       </a:r>
-                      <a:endParaRPr lang="en-US" sz="1200" dirty="0">
+                      <a:endParaRPr lang="en-US" sz="1150" dirty="0">
                         <a:latin typeface="Tahoma" charset="0"/>
                         <a:ea typeface="Tahoma" charset="0"/>
                         <a:cs typeface="Tahoma" charset="0"/>
@@ -42289,12 +43065,12 @@
                     <a:p>
                       <a:pPr algn="ctr" indent="0" marL="0">
                         <a:lnSpc>
-                          <a:spcPts val="1680"/>
+                          <a:spcPts val="1579"/>
                         </a:lnSpc>
                         <a:buNone/>
                       </a:pPr>
                       <a:r>
-                        <a:rPr lang="en-US" sz="1200" dirty="0">
+                        <a:rPr lang="en-US" sz="1150" dirty="0">
                           <a:solidFill>
                             <a:srgbClr val="14233A"/>
                           </a:solidFill>
@@ -42304,7 +43080,7 @@
                         </a:rPr>
                         <a:t>6</a:t>
                       </a:r>
-                      <a:endParaRPr lang="en-US" sz="1200" dirty="0">
+                      <a:endParaRPr lang="en-US" sz="1150" dirty="0">
                         <a:latin typeface="Tahoma" charset="0"/>
                         <a:ea typeface="Tahoma" charset="0"/>
                         <a:cs typeface="Tahoma" charset="0"/>
@@ -42360,12 +43136,12 @@
                     <a:p>
                       <a:pPr algn="ctr" indent="0" marL="0">
                         <a:lnSpc>
-                          <a:spcPts val="1680"/>
+                          <a:spcPts val="1579"/>
                         </a:lnSpc>
                         <a:buNone/>
                       </a:pPr>
                       <a:r>
-                        <a:rPr lang="en-US" sz="1200" dirty="0">
+                        <a:rPr lang="en-US" sz="1150" dirty="0">
                           <a:solidFill>
                             <a:srgbClr val="14233A"/>
                           </a:solidFill>
@@ -42375,7 +43151,7 @@
                         </a:rPr>
                         <a:t>3.817</a:t>
                       </a:r>
-                      <a:endParaRPr lang="en-US" sz="1200" dirty="0">
+                      <a:endParaRPr lang="en-US" sz="1150" dirty="0">
                         <a:latin typeface="Tahoma" charset="0"/>
                         <a:ea typeface="Tahoma" charset="0"/>
                         <a:cs typeface="Tahoma" charset="0"/>
@@ -42431,12 +43207,12 @@
                     <a:p>
                       <a:pPr algn="ctr" indent="0" marL="0">
                         <a:lnSpc>
-                          <a:spcPts val="1680"/>
+                          <a:spcPts val="1579"/>
                         </a:lnSpc>
                         <a:buNone/>
                       </a:pPr>
                       <a:r>
-                        <a:rPr lang="en-US" sz="1200" dirty="0">
+                        <a:rPr lang="en-US" sz="1150" dirty="0">
                           <a:solidFill>
                             <a:srgbClr val="14233A"/>
                           </a:solidFill>
@@ -42446,7 +43222,7 @@
                         </a:rPr>
                         <a:t>1.558</a:t>
                       </a:r>
-                      <a:endParaRPr lang="en-US" sz="1200" dirty="0">
+                      <a:endParaRPr lang="en-US" sz="1150" dirty="0">
                         <a:latin typeface="Tahoma" charset="0"/>
                         <a:ea typeface="Tahoma" charset="0"/>
                         <a:cs typeface="Tahoma" charset="0"/>
@@ -42710,12 +43486,12 @@
                     <a:p>
                       <a:pPr indent="0" marL="0">
                         <a:lnSpc>
-                          <a:spcPts val="1680"/>
+                          <a:spcPts val="1579"/>
                         </a:lnSpc>
                         <a:buNone/>
                       </a:pPr>
                       <a:r>
-                        <a:rPr lang="en-US" sz="1200" b="1" dirty="0">
+                        <a:rPr lang="en-US" sz="1150" b="1" dirty="0">
                           <a:solidFill>
                             <a:srgbClr val="F6F4EF"/>
                           </a:solidFill>
@@ -42725,7 +43501,7 @@
                         </a:rPr>
                         <a:t>Pair 1</a:t>
                       </a:r>
-                      <a:endParaRPr lang="en-US" sz="1200" dirty="0">
+                      <a:endParaRPr lang="en-US" sz="1150" dirty="0">
                         <a:latin typeface="Tahoma" charset="0"/>
                         <a:ea typeface="Tahoma" charset="0"/>
                         <a:cs typeface="Tahoma" charset="0"/>
@@ -42769,12 +43545,12 @@
                     <a:p>
                       <a:pPr algn="ctr" indent="0" marL="0">
                         <a:lnSpc>
-                          <a:spcPts val="1680"/>
+                          <a:spcPts val="1579"/>
                         </a:lnSpc>
                         <a:buNone/>
                       </a:pPr>
                       <a:r>
-                        <a:rPr lang="en-US" sz="1200" b="1" dirty="0">
+                        <a:rPr lang="en-US" sz="1150" b="1" dirty="0">
                           <a:solidFill>
                             <a:srgbClr val="F6F4EF"/>
                           </a:solidFill>
@@ -42784,7 +43560,7 @@
                         </a:rPr>
                         <a:t>Mean</a:t>
                       </a:r>
-                      <a:endParaRPr lang="en-US" sz="1200" dirty="0">
+                      <a:endParaRPr lang="en-US" sz="1150" dirty="0">
                         <a:latin typeface="Tahoma" charset="0"/>
                         <a:ea typeface="Tahoma" charset="0"/>
                         <a:cs typeface="Tahoma" charset="0"/>
@@ -42834,12 +43610,12 @@
                     <a:p>
                       <a:pPr algn="ctr" indent="0" marL="0">
                         <a:lnSpc>
-                          <a:spcPts val="1680"/>
+                          <a:spcPts val="1579"/>
                         </a:lnSpc>
                         <a:buNone/>
                       </a:pPr>
                       <a:r>
-                        <a:rPr lang="en-US" sz="1200" b="1" dirty="0">
+                        <a:rPr lang="en-US" sz="1150" b="1" dirty="0">
                           <a:solidFill>
                             <a:srgbClr val="F6F4EF"/>
                           </a:solidFill>
@@ -42849,7 +43625,7 @@
                         </a:rPr>
                         <a:t>Std. Deviation</a:t>
                       </a:r>
-                      <a:endParaRPr lang="en-US" sz="1200" dirty="0">
+                      <a:endParaRPr lang="en-US" sz="1150" dirty="0">
                         <a:latin typeface="Tahoma" charset="0"/>
                         <a:ea typeface="Tahoma" charset="0"/>
                         <a:cs typeface="Tahoma" charset="0"/>
@@ -42899,12 +43675,12 @@
                     <a:p>
                       <a:pPr algn="ctr" indent="0" marL="0">
                         <a:lnSpc>
-                          <a:spcPts val="1680"/>
+                          <a:spcPts val="1579"/>
                         </a:lnSpc>
                         <a:buNone/>
                       </a:pPr>
                       <a:r>
-                        <a:rPr lang="en-US" sz="1200" b="1" dirty="0">
+                        <a:rPr lang="en-US" sz="1150" b="1" dirty="0">
                           <a:solidFill>
                             <a:srgbClr val="F6F4EF"/>
                           </a:solidFill>
@@ -42914,7 +43690,7 @@
                         </a:rPr>
                         <a:t>Std. Error Mean</a:t>
                       </a:r>
-                      <a:endParaRPr lang="en-US" sz="1200" dirty="0">
+                      <a:endParaRPr lang="en-US" sz="1150" dirty="0">
                         <a:latin typeface="Tahoma" charset="0"/>
                         <a:ea typeface="Tahoma" charset="0"/>
                         <a:cs typeface="Tahoma" charset="0"/>
@@ -42964,12 +43740,12 @@
                     <a:p>
                       <a:pPr algn="ctr" indent="0" marL="0">
                         <a:lnSpc>
-                          <a:spcPts val="1680"/>
+                          <a:spcPts val="1579"/>
                         </a:lnSpc>
                         <a:buNone/>
                       </a:pPr>
                       <a:r>
-                        <a:rPr lang="en-US" sz="1200" b="1" dirty="0">
+                        <a:rPr lang="en-US" sz="1150" b="1" dirty="0">
                           <a:solidFill>
                             <a:srgbClr val="F6F4EF"/>
                           </a:solidFill>
@@ -42979,7 +43755,7 @@
                         </a:rPr>
                         <a:t>95% CI Lower</a:t>
                       </a:r>
-                      <a:endParaRPr lang="en-US" sz="1200" dirty="0">
+                      <a:endParaRPr lang="en-US" sz="1150" dirty="0">
                         <a:latin typeface="Tahoma" charset="0"/>
                         <a:ea typeface="Tahoma" charset="0"/>
                         <a:cs typeface="Tahoma" charset="0"/>
@@ -43029,12 +43805,12 @@
                     <a:p>
                       <a:pPr algn="ctr" indent="0" marL="0">
                         <a:lnSpc>
-                          <a:spcPts val="1680"/>
+                          <a:spcPts val="1579"/>
                         </a:lnSpc>
                         <a:buNone/>
                       </a:pPr>
                       <a:r>
-                        <a:rPr lang="en-US" sz="1200" b="1" dirty="0">
+                        <a:rPr lang="en-US" sz="1150" b="1" dirty="0">
                           <a:solidFill>
                             <a:srgbClr val="F6F4EF"/>
                           </a:solidFill>
@@ -43044,7 +43820,7 @@
                         </a:rPr>
                         <a:t>95% CI Upper</a:t>
                       </a:r>
-                      <a:endParaRPr lang="en-US" sz="1200" dirty="0">
+                      <a:endParaRPr lang="en-US" sz="1150" dirty="0">
                         <a:latin typeface="Tahoma" charset="0"/>
                         <a:ea typeface="Tahoma" charset="0"/>
                         <a:cs typeface="Tahoma" charset="0"/>
@@ -43094,12 +43870,12 @@
                     <a:p>
                       <a:pPr algn="ctr" indent="0" marL="0">
                         <a:lnSpc>
-                          <a:spcPts val="1680"/>
+                          <a:spcPts val="1579"/>
                         </a:lnSpc>
                         <a:buNone/>
                       </a:pPr>
                       <a:r>
-                        <a:rPr lang="en-US" sz="1200" b="1" dirty="0">
+                        <a:rPr lang="en-US" sz="1150" b="1" dirty="0">
                           <a:solidFill>
                             <a:srgbClr val="F6F4EF"/>
                           </a:solidFill>
@@ -43109,7 +43885,7 @@
                         </a:rPr>
                         <a:t>t</a:t>
                       </a:r>
-                      <a:endParaRPr lang="en-US" sz="1200" dirty="0">
+                      <a:endParaRPr lang="en-US" sz="1150" dirty="0">
                         <a:latin typeface="Tahoma" charset="0"/>
                         <a:ea typeface="Tahoma" charset="0"/>
                         <a:cs typeface="Tahoma" charset="0"/>
@@ -43159,12 +43935,12 @@
                     <a:p>
                       <a:pPr algn="ctr" indent="0" marL="0">
                         <a:lnSpc>
-                          <a:spcPts val="1680"/>
+                          <a:spcPts val="1579"/>
                         </a:lnSpc>
                         <a:buNone/>
                       </a:pPr>
                       <a:r>
-                        <a:rPr lang="en-US" sz="1200" b="1" dirty="0">
+                        <a:rPr lang="en-US" sz="1150" b="1" dirty="0">
                           <a:solidFill>
                             <a:srgbClr val="F6F4EF"/>
                           </a:solidFill>
@@ -43174,7 +43950,7 @@
                         </a:rPr>
                         <a:t>df</a:t>
                       </a:r>
-                      <a:endParaRPr lang="en-US" sz="1200" dirty="0">
+                      <a:endParaRPr lang="en-US" sz="1150" dirty="0">
                         <a:latin typeface="Tahoma" charset="0"/>
                         <a:ea typeface="Tahoma" charset="0"/>
                         <a:cs typeface="Tahoma" charset="0"/>
@@ -43224,12 +44000,12 @@
                     <a:p>
                       <a:pPr algn="ctr" indent="0" marL="0">
                         <a:lnSpc>
-                          <a:spcPts val="1680"/>
+                          <a:spcPts val="1579"/>
                         </a:lnSpc>
                         <a:buNone/>
                       </a:pPr>
                       <a:r>
-                        <a:rPr lang="en-US" sz="1200" b="1" dirty="0">
+                        <a:rPr lang="en-US" sz="1150" b="1" dirty="0">
                           <a:solidFill>
                             <a:srgbClr val="F6F4EF"/>
                           </a:solidFill>
@@ -43239,7 +44015,7 @@
                         </a:rPr>
                         <a:t>Sig. (2-tailed)</a:t>
                       </a:r>
-                      <a:endParaRPr lang="en-US" sz="1200" dirty="0">
+                      <a:endParaRPr lang="en-US" sz="1150" dirty="0">
                         <a:latin typeface="Tahoma" charset="0"/>
                         <a:ea typeface="Tahoma" charset="0"/>
                         <a:cs typeface="Tahoma" charset="0"/>
@@ -43291,12 +44067,12 @@
                     <a:p>
                       <a:pPr indent="0" marL="0">
                         <a:lnSpc>
-                          <a:spcPts val="1680"/>
+                          <a:spcPts val="1579"/>
                         </a:lnSpc>
                         <a:buNone/>
                       </a:pPr>
                       <a:r>
-                        <a:rPr lang="en-US" sz="1200" dirty="0">
+                        <a:rPr lang="en-US" sz="1150" dirty="0">
                           <a:solidFill>
                             <a:srgbClr val="14233A"/>
                           </a:solidFill>
@@ -43306,7 +44082,7 @@
                         </a:rPr>
                         <a:t>before - after</a:t>
                       </a:r>
-                      <a:endParaRPr lang="en-US" sz="1200" dirty="0">
+                      <a:endParaRPr lang="en-US" sz="1150" dirty="0">
                         <a:latin typeface="Tahoma" charset="0"/>
                         <a:ea typeface="Tahoma" charset="0"/>
                         <a:cs typeface="Tahoma" charset="0"/>
@@ -43356,12 +44132,12 @@
                     <a:p>
                       <a:pPr algn="ctr" indent="0" marL="0">
                         <a:lnSpc>
-                          <a:spcPts val="1680"/>
+                          <a:spcPts val="1579"/>
                         </a:lnSpc>
                         <a:buNone/>
                       </a:pPr>
                       <a:r>
-                        <a:rPr lang="en-US" sz="1200" dirty="0">
+                        <a:rPr lang="en-US" sz="1150" dirty="0">
                           <a:solidFill>
                             <a:srgbClr val="14233A"/>
                           </a:solidFill>
@@ -43371,7 +44147,7 @@
                         </a:rPr>
                         <a:t>-4.167</a:t>
                       </a:r>
-                      <a:endParaRPr lang="en-US" sz="1200" dirty="0">
+                      <a:endParaRPr lang="en-US" sz="1150" dirty="0">
                         <a:latin typeface="Tahoma" charset="0"/>
                         <a:ea typeface="Tahoma" charset="0"/>
                         <a:cs typeface="Tahoma" charset="0"/>
@@ -43427,12 +44203,12 @@
                     <a:p>
                       <a:pPr algn="ctr" indent="0" marL="0">
                         <a:lnSpc>
-                          <a:spcPts val="1680"/>
+                          <a:spcPts val="1579"/>
                         </a:lnSpc>
                         <a:buNone/>
                       </a:pPr>
                       <a:r>
-                        <a:rPr lang="en-US" sz="1200" dirty="0">
+                        <a:rPr lang="en-US" sz="1150" dirty="0">
                           <a:solidFill>
                             <a:srgbClr val="14233A"/>
                           </a:solidFill>
@@ -43442,7 +44218,7 @@
                         </a:rPr>
                         <a:t>2.639</a:t>
                       </a:r>
-                      <a:endParaRPr lang="en-US" sz="1200" dirty="0">
+                      <a:endParaRPr lang="en-US" sz="1150" dirty="0">
                         <a:latin typeface="Tahoma" charset="0"/>
                         <a:ea typeface="Tahoma" charset="0"/>
                         <a:cs typeface="Tahoma" charset="0"/>
@@ -43498,12 +44274,12 @@
                     <a:p>
                       <a:pPr algn="ctr" indent="0" marL="0">
                         <a:lnSpc>
-                          <a:spcPts val="1680"/>
+                          <a:spcPts val="1579"/>
                         </a:lnSpc>
                         <a:buNone/>
                       </a:pPr>
                       <a:r>
-                        <a:rPr lang="en-US" sz="1200" dirty="0">
+                        <a:rPr lang="en-US" sz="1150" dirty="0">
                           <a:solidFill>
                             <a:srgbClr val="14233A"/>
                           </a:solidFill>
@@ -43513,7 +44289,7 @@
                         </a:rPr>
                         <a:t>1.078</a:t>
                       </a:r>
-                      <a:endParaRPr lang="en-US" sz="1200" dirty="0">
+                      <a:endParaRPr lang="en-US" sz="1150" dirty="0">
                         <a:latin typeface="Tahoma" charset="0"/>
                         <a:ea typeface="Tahoma" charset="0"/>
                         <a:cs typeface="Tahoma" charset="0"/>
@@ -43569,12 +44345,12 @@
                     <a:p>
                       <a:pPr algn="ctr" indent="0" marL="0">
                         <a:lnSpc>
-                          <a:spcPts val="1680"/>
+                          <a:spcPts val="1579"/>
                         </a:lnSpc>
                         <a:buNone/>
                       </a:pPr>
                       <a:r>
-                        <a:rPr lang="en-US" sz="1200" dirty="0">
+                        <a:rPr lang="en-US" sz="1150" dirty="0">
                           <a:solidFill>
                             <a:srgbClr val="14233A"/>
                           </a:solidFill>
@@ -43584,7 +44360,7 @@
                         </a:rPr>
                         <a:t>-6.937</a:t>
                       </a:r>
-                      <a:endParaRPr lang="en-US" sz="1200" dirty="0">
+                      <a:endParaRPr lang="en-US" sz="1150" dirty="0">
                         <a:latin typeface="Tahoma" charset="0"/>
                         <a:ea typeface="Tahoma" charset="0"/>
                         <a:cs typeface="Tahoma" charset="0"/>
@@ -43640,12 +44416,12 @@
                     <a:p>
                       <a:pPr algn="ctr" indent="0" marL="0">
                         <a:lnSpc>
-                          <a:spcPts val="1680"/>
+                          <a:spcPts val="1579"/>
                         </a:lnSpc>
                         <a:buNone/>
                       </a:pPr>
                       <a:r>
-                        <a:rPr lang="en-US" sz="1200" dirty="0">
+                        <a:rPr lang="en-US" sz="1150" dirty="0">
                           <a:solidFill>
                             <a:srgbClr val="14233A"/>
                           </a:solidFill>
@@ -43655,7 +44431,7 @@
                         </a:rPr>
                         <a:t>-1.397</a:t>
                       </a:r>
-                      <a:endParaRPr lang="en-US" sz="1200" dirty="0">
+                      <a:endParaRPr lang="en-US" sz="1150" dirty="0">
                         <a:latin typeface="Tahoma" charset="0"/>
                         <a:ea typeface="Tahoma" charset="0"/>
                         <a:cs typeface="Tahoma" charset="0"/>
@@ -43711,12 +44487,12 @@
                     <a:p>
                       <a:pPr algn="ctr" indent="0" marL="0">
                         <a:lnSpc>
-                          <a:spcPts val="1680"/>
+                          <a:spcPts val="1579"/>
                         </a:lnSpc>
                         <a:buNone/>
                       </a:pPr>
                       <a:r>
-                        <a:rPr lang="en-US" sz="1200" dirty="0">
+                        <a:rPr lang="en-US" sz="1150" dirty="0">
                           <a:solidFill>
                             <a:srgbClr val="14233A"/>
                           </a:solidFill>
@@ -43726,7 +44502,7 @@
                         </a:rPr>
                         <a:t>-3.867</a:t>
                       </a:r>
-                      <a:endParaRPr lang="en-US" sz="1200" dirty="0">
+                      <a:endParaRPr lang="en-US" sz="1150" dirty="0">
                         <a:latin typeface="Tahoma" charset="0"/>
                         <a:ea typeface="Tahoma" charset="0"/>
                         <a:cs typeface="Tahoma" charset="0"/>
@@ -43782,12 +44558,12 @@
                     <a:p>
                       <a:pPr algn="ctr" indent="0" marL="0">
                         <a:lnSpc>
-                          <a:spcPts val="1680"/>
+                          <a:spcPts val="1579"/>
                         </a:lnSpc>
                         <a:buNone/>
                       </a:pPr>
                       <a:r>
-                        <a:rPr lang="en-US" sz="1200" dirty="0">
+                        <a:rPr lang="en-US" sz="1150" dirty="0">
                           <a:solidFill>
                             <a:srgbClr val="14233A"/>
                           </a:solidFill>
@@ -43797,7 +44573,7 @@
                         </a:rPr>
                         <a:t>5</a:t>
                       </a:r>
-                      <a:endParaRPr lang="en-US" sz="1200" dirty="0">
+                      <a:endParaRPr lang="en-US" sz="1150" dirty="0">
                         <a:latin typeface="Tahoma" charset="0"/>
                         <a:ea typeface="Tahoma" charset="0"/>
                         <a:cs typeface="Tahoma" charset="0"/>
@@ -43853,12 +44629,12 @@
                     <a:p>
                       <a:pPr algn="ctr" indent="0" marL="0">
                         <a:lnSpc>
-                          <a:spcPts val="1680"/>
+                          <a:spcPts val="1579"/>
                         </a:lnSpc>
                         <a:buNone/>
                       </a:pPr>
                       <a:r>
-                        <a:rPr lang="en-US" sz="1200" dirty="0">
+                        <a:rPr lang="en-US" sz="1150" dirty="0">
                           <a:solidFill>
                             <a:srgbClr val="9A5B00"/>
                           </a:solidFill>
@@ -43868,7 +44644,7 @@
                         </a:rPr>
                         <a:t>.012</a:t>
                       </a:r>
-                      <a:endParaRPr lang="en-US" sz="1200" dirty="0">
+                      <a:endParaRPr lang="en-US" sz="1150" dirty="0">
                         <a:latin typeface="Tahoma" charset="0"/>
                         <a:ea typeface="Tahoma" charset="0"/>
                         <a:cs typeface="Tahoma" charset="0"/>
@@ -44470,12 +45246,12 @@
           <a:p>
             <a:pPr algn="l" indent="0" marL="0">
               <a:lnSpc>
-                <a:spcPts val="1820"/>
+                <a:spcPts val="1711"/>
               </a:lnSpc>
               <a:buNone/>
             </a:pPr>
             <a:r>
-              <a:rPr lang="en-US" sz="1400" dirty="0">
+              <a:rPr lang="en-US" sz="1300" dirty="0">
                 <a:solidFill>
                   <a:srgbClr val="14233A"/>
                 </a:solidFill>
@@ -44485,7 +45261,7 @@
               </a:rPr>
               <a:t>Accept H0, reject H1</a:t>
             </a:r>
-            <a:endParaRPr lang="en-US" sz="1400" dirty="0"/>
+            <a:endParaRPr lang="en-US" sz="1300" dirty="0"/>
           </a:p>
         </p:txBody>
       </p:sp>
@@ -44615,12 +45391,12 @@
           <a:p>
             <a:pPr algn="l" indent="0" marL="0">
               <a:lnSpc>
-                <a:spcPts val="1820"/>
+                <a:spcPts val="1711"/>
               </a:lnSpc>
               <a:buNone/>
             </a:pPr>
             <a:r>
-              <a:rPr lang="en-US" sz="1400" dirty="0">
+              <a:rPr lang="en-US" sz="1300" dirty="0">
                 <a:solidFill>
                   <a:srgbClr val="14233A"/>
                 </a:solidFill>
@@ -44630,7 +45406,7 @@
               </a:rPr>
               <a:t>Reject H0, accept H1</a:t>
             </a:r>
-            <a:endParaRPr lang="en-US" sz="1400" dirty="0"/>
+            <a:endParaRPr lang="en-US" sz="1300" dirty="0"/>
           </a:p>
         </p:txBody>
       </p:sp>
